--- a/backbone_slides.pptx
+++ b/backbone_slides.pptx
@@ -3226,7 +3226,7 @@
         <p:spPr>
           <a:xfrm>
             <a:off x="548640" y="1014984"/>
-            <a:ext cx="2548432" cy="448056"/>
+            <a:ext cx="3200400" cy="448056"/>
           </a:xfrm>
           <a:prstGeom prst="roundRect">
             <a:avLst>
@@ -3270,8 +3270,8 @@
         </p:nvSpPr>
         <p:spPr>
           <a:xfrm>
-            <a:off x="548640" y="1014984"/>
-            <a:ext cx="2548432" cy="448056"/>
+            <a:off x="548640" y="1131295"/>
+            <a:ext cx="3200400" cy="215432"/>
           </a:xfrm>
           <a:prstGeom prst="rect">
             <a:avLst/>
@@ -3305,8 +3305,8 @@
         </p:nvSpPr>
         <p:spPr>
           <a:xfrm>
-            <a:off x="548640" y="1899666"/>
-            <a:ext cx="8229600" cy="1666951"/>
+            <a:off x="548640" y="1875617"/>
+            <a:ext cx="11242822" cy="1363278"/>
           </a:xfrm>
           <a:prstGeom prst="rect">
             <a:avLst/>
@@ -3325,7 +3325,7 @@
               </a:lnSpc>
             </a:pPr>
             <a:r>
-              <a:rPr sz="5400" b="1" i="0" spc="-100">
+              <a:rPr sz="4000" b="1" i="0" spc="-100">
                 <a:solidFill>
                   <a:srgbClr val="FFFFFF"/>
                 </a:solidFill>
@@ -3345,8 +3345,8 @@
         </p:nvSpPr>
         <p:spPr>
           <a:xfrm>
-            <a:off x="548640" y="3931920"/>
-            <a:ext cx="8229600" cy="347472"/>
+            <a:off x="606247" y="3704874"/>
+            <a:ext cx="8229600" cy="276971"/>
           </a:xfrm>
           <a:prstGeom prst="rect">
             <a:avLst/>
@@ -3361,7 +3361,7 @@
           <a:p>
             <a:pPr algn="l"/>
             <a:r>
-              <a:rPr sz="2000" b="1" i="0" spc="-100">
+              <a:rPr sz="1800" b="1" i="0" spc="-100">
                 <a:solidFill>
                   <a:srgbClr val="B3D4CB"/>
                 </a:solidFill>
@@ -3380,7 +3380,7 @@
         </p:nvSpPr>
         <p:spPr>
           <a:xfrm>
-            <a:off x="548640" y="4617720"/>
+            <a:off x="548640" y="3437503"/>
             <a:ext cx="1645920" cy="36576"/>
           </a:xfrm>
           <a:prstGeom prst="rect">
@@ -3423,8 +3423,8 @@
         </p:nvSpPr>
         <p:spPr>
           <a:xfrm>
-            <a:off x="6866503" y="5102352"/>
-            <a:ext cx="4572000" cy="310896"/>
+            <a:off x="6866229" y="5102352"/>
+            <a:ext cx="5029200" cy="276971"/>
           </a:xfrm>
           <a:prstGeom prst="rect">
             <a:avLst/>
@@ -3439,7 +3439,7 @@
           <a:p>
             <a:pPr algn="r"/>
             <a:r>
-              <a:rPr sz="1500" b="0" i="0" spc="-100">
+              <a:rPr sz="1800" b="0" i="0" spc="-100">
                 <a:solidFill>
                   <a:srgbClr val="8BB8AE"/>
                 </a:solidFill>
@@ -3458,8 +3458,8 @@
         </p:nvSpPr>
         <p:spPr>
           <a:xfrm>
-            <a:off x="6866503" y="5477621"/>
-            <a:ext cx="4572000" cy="411480"/>
+            <a:off x="6866229" y="5477256"/>
+            <a:ext cx="5029200" cy="430865"/>
           </a:xfrm>
           <a:prstGeom prst="rect">
             <a:avLst/>
@@ -3474,7 +3474,7 @@
           <a:p>
             <a:pPr algn="r"/>
             <a:r>
-              <a:rPr sz="2200" b="1" i="0" spc="-100">
+              <a:rPr sz="2800" b="1" i="0" spc="-100">
                 <a:solidFill>
                   <a:srgbClr val="FFFFFF"/>
                 </a:solidFill>
@@ -3494,7 +3494,7 @@
         <p:spPr>
           <a:xfrm>
             <a:off x="272216" y="6378122"/>
-            <a:ext cx="7315200" cy="384048"/>
+            <a:ext cx="7315200" cy="215432"/>
           </a:xfrm>
           <a:prstGeom prst="rect">
             <a:avLst/>
@@ -3646,41 +3646,6 @@
       </p:sp>
       <p:sp>
         <p:nvSpPr>
-          <p:cNvPr id="5" name="TextBox 4"/>
-          <p:cNvSpPr txBox="1"/>
-          <p:nvPr/>
-        </p:nvSpPr>
-        <p:spPr>
-          <a:xfrm>
-            <a:off x="251460" y="945032"/>
-            <a:ext cx="11247120" cy="246888"/>
-          </a:xfrm>
-          <a:prstGeom prst="rect">
-            <a:avLst/>
-          </a:prstGeom>
-          <a:noFill/>
-        </p:spPr>
-        <p:txBody>
-          <a:bodyPr wrap="square" lIns="0" rIns="0" tIns="0" bIns="0" anchor="t">
-            <a:spAutoFit/>
-          </a:bodyPr>
-          <a:lstStyle/>
-          <a:p>
-            <a:pPr algn="l"/>
-            <a:r>
-              <a:rPr sz="1300" b="0" i="0" spc="-100">
-                <a:solidFill>
-                  <a:srgbClr val="7A7A7A"/>
-                </a:solidFill>
-                <a:latin typeface="Pretendard"/>
-              </a:rPr>
-              <a:t>Three (or more) parallel pillars with tag, big word, sub word, and short body.</a:t>
-            </a:r>
-          </a:p>
-        </p:txBody>
-      </p:sp>
-      <p:sp>
-        <p:nvSpPr>
           <p:cNvPr id="6" name="Rounded Rectangle 5"/>
           <p:cNvSpPr/>
           <p:nvPr/>
@@ -4834,41 +4799,6 @@
       </p:sp>
       <p:sp>
         <p:nvSpPr>
-          <p:cNvPr id="5" name="TextBox 4"/>
-          <p:cNvSpPr txBox="1"/>
-          <p:nvPr/>
-        </p:nvSpPr>
-        <p:spPr>
-          <a:xfrm>
-            <a:off x="251460" y="945032"/>
-            <a:ext cx="11247120" cy="246888"/>
-          </a:xfrm>
-          <a:prstGeom prst="rect">
-            <a:avLst/>
-          </a:prstGeom>
-          <a:noFill/>
-        </p:spPr>
-        <p:txBody>
-          <a:bodyPr wrap="square" lIns="0" rIns="0" tIns="0" bIns="0" anchor="t">
-            <a:spAutoFit/>
-          </a:bodyPr>
-          <a:lstStyle/>
-          <a:p>
-            <a:pPr algn="l"/>
-            <a:r>
-              <a:rPr sz="1300" b="0" i="0" spc="-100">
-                <a:solidFill>
-                  <a:srgbClr val="7A7A7A"/>
-                </a:solidFill>
-                <a:latin typeface="Pretendard"/>
-              </a:rPr>
-              <a:t>One panel per trial. Visual proof that CIs lie within the equivalence margin.</a:t>
-            </a:r>
-          </a:p>
-        </p:txBody>
-      </p:sp>
-      <p:sp>
-        <p:nvSpPr>
           <p:cNvPr id="6" name="Rounded Rectangle 5"/>
           <p:cNvSpPr/>
           <p:nvPr/>
@@ -7767,41 +7697,6 @@
       </p:sp>
       <p:sp>
         <p:nvSpPr>
-          <p:cNvPr id="5" name="TextBox 4"/>
-          <p:cNvSpPr txBox="1"/>
-          <p:nvPr/>
-        </p:nvSpPr>
-        <p:spPr>
-          <a:xfrm>
-            <a:off x="251460" y="945032"/>
-            <a:ext cx="11247120" cy="246888"/>
-          </a:xfrm>
-          <a:prstGeom prst="rect">
-            <a:avLst/>
-          </a:prstGeom>
-          <a:noFill/>
-        </p:spPr>
-        <p:txBody>
-          <a:bodyPr wrap="square" lIns="0" rIns="0" tIns="0" bIns="0" anchor="t">
-            <a:spAutoFit/>
-          </a:bodyPr>
-          <a:lstStyle/>
-          <a:p>
-            <a:pPr algn="l"/>
-            <a:r>
-              <a:rPr sz="1300" b="0" i="0" spc="-100">
-                <a:solidFill>
-                  <a:srgbClr val="7A7A7A"/>
-                </a:solidFill>
-                <a:latin typeface="Pretendard"/>
-              </a:rPr>
-              <a:t>One large visualization occupying the body card.</a:t>
-            </a:r>
-          </a:p>
-        </p:txBody>
-      </p:sp>
-      <p:sp>
-        <p:nvSpPr>
           <p:cNvPr id="6" name="Rounded Rectangle 5"/>
           <p:cNvSpPr/>
           <p:nvPr/>
@@ -9149,41 +9044,6 @@
       </p:sp>
       <p:sp>
         <p:nvSpPr>
-          <p:cNvPr id="5" name="TextBox 4"/>
-          <p:cNvSpPr txBox="1"/>
-          <p:nvPr/>
-        </p:nvSpPr>
-        <p:spPr>
-          <a:xfrm>
-            <a:off x="251460" y="945032"/>
-            <a:ext cx="11247120" cy="246888"/>
-          </a:xfrm>
-          <a:prstGeom prst="rect">
-            <a:avLst/>
-          </a:prstGeom>
-          <a:noFill/>
-        </p:spPr>
-        <p:txBody>
-          <a:bodyPr wrap="square" lIns="0" rIns="0" tIns="0" bIns="0" anchor="t">
-            <a:spAutoFit/>
-          </a:bodyPr>
-          <a:lstStyle/>
-          <a:p>
-            <a:pPr algn="l"/>
-            <a:r>
-              <a:rPr sz="1300" b="0" i="0" spc="-100">
-                <a:solidFill>
-                  <a:srgbClr val="7A7A7A"/>
-                </a:solidFill>
-                <a:latin typeface="Pretendard"/>
-              </a:rPr>
-              <a:t>Four KPI tiles surfacing headline metrics, with supporting chart below.</a:t>
-            </a:r>
-          </a:p>
-        </p:txBody>
-      </p:sp>
-      <p:sp>
-        <p:nvSpPr>
           <p:cNvPr id="6" name="Rounded Rectangle 5"/>
           <p:cNvSpPr/>
           <p:nvPr/>
@@ -11360,41 +11220,6 @@
       </p:sp>
       <p:sp>
         <p:nvSpPr>
-          <p:cNvPr id="5" name="TextBox 4"/>
-          <p:cNvSpPr txBox="1"/>
-          <p:nvPr/>
-        </p:nvSpPr>
-        <p:spPr>
-          <a:xfrm>
-            <a:off x="251460" y="945032"/>
-            <a:ext cx="11247120" cy="246888"/>
-          </a:xfrm>
-          <a:prstGeom prst="rect">
-            <a:avLst/>
-          </a:prstGeom>
-          <a:noFill/>
-        </p:spPr>
-        <p:txBody>
-          <a:bodyPr wrap="square" lIns="0" rIns="0" tIns="0" bIns="0" anchor="t">
-            <a:spAutoFit/>
-          </a:bodyPr>
-          <a:lstStyle/>
-          <a:p>
-            <a:pPr algn="l"/>
-            <a:r>
-              <a:rPr sz="1300" b="0" i="0" spc="-100">
-                <a:solidFill>
-                  <a:srgbClr val="7A7A7A"/>
-                </a:solidFill>
-                <a:latin typeface="Pretendard"/>
-              </a:rPr>
-              <a:t>Headline claim on the left, supporting visualization on the right.</a:t>
-            </a:r>
-          </a:p>
-        </p:txBody>
-      </p:sp>
-      <p:sp>
-        <p:nvSpPr>
           <p:cNvPr id="6" name="Rounded Rectangle 5"/>
           <p:cNvSpPr/>
           <p:nvPr/>
@@ -12230,41 +12055,6 @@
       </p:sp>
       <p:sp>
         <p:nvSpPr>
-          <p:cNvPr id="5" name="TextBox 4"/>
-          <p:cNvSpPr txBox="1"/>
-          <p:nvPr/>
-        </p:nvSpPr>
-        <p:spPr>
-          <a:xfrm>
-            <a:off x="251460" y="945032"/>
-            <a:ext cx="11247120" cy="246888"/>
-          </a:xfrm>
-          <a:prstGeom prst="rect">
-            <a:avLst/>
-          </a:prstGeom>
-          <a:noFill/>
-        </p:spPr>
-        <p:txBody>
-          <a:bodyPr wrap="square" lIns="0" rIns="0" tIns="0" bIns="0" anchor="t">
-            <a:spAutoFit/>
-          </a:bodyPr>
-          <a:lstStyle/>
-          <a:p>
-            <a:pPr algn="l"/>
-            <a:r>
-              <a:rPr sz="1300" b="0" i="0" spc="-100">
-                <a:solidFill>
-                  <a:srgbClr val="7A7A7A"/>
-                </a:solidFill>
-                <a:latin typeface="Pretendard"/>
-              </a:rPr>
-              <a:t>Three large KPI tiles for headline numbers, with supporting chart below.</a:t>
-            </a:r>
-          </a:p>
-        </p:txBody>
-      </p:sp>
-      <p:sp>
-        <p:nvSpPr>
           <p:cNvPr id="6" name="Rounded Rectangle 5"/>
           <p:cNvSpPr/>
           <p:nvPr/>
@@ -13615,41 +13405,6 @@
       </p:sp>
       <p:sp>
         <p:nvSpPr>
-          <p:cNvPr id="5" name="TextBox 4"/>
-          <p:cNvSpPr txBox="1"/>
-          <p:nvPr/>
-        </p:nvSpPr>
-        <p:spPr>
-          <a:xfrm>
-            <a:off x="251460" y="945032"/>
-            <a:ext cx="11247120" cy="246888"/>
-          </a:xfrm>
-          <a:prstGeom prst="rect">
-            <a:avLst/>
-          </a:prstGeom>
-          <a:noFill/>
-        </p:spPr>
-        <p:txBody>
-          <a:bodyPr wrap="square" lIns="0" rIns="0" tIns="0" bIns="0" anchor="t">
-            <a:spAutoFit/>
-          </a:bodyPr>
-          <a:lstStyle/>
-          <a:p>
-            <a:pPr algn="l"/>
-            <a:r>
-              <a:rPr sz="1300" b="0" i="0" spc="-100">
-                <a:solidFill>
-                  <a:srgbClr val="7A7A7A"/>
-                </a:solidFill>
-                <a:latin typeface="Pretendard"/>
-              </a:rPr>
-              <a:t>Side-by-side comparison table with significant findings highlighted.</a:t>
-            </a:r>
-          </a:p>
-        </p:txBody>
-      </p:sp>
-      <p:sp>
-        <p:nvSpPr>
           <p:cNvPr id="6" name="Rounded Rectangle 5"/>
           <p:cNvSpPr/>
           <p:nvPr/>
@@ -15422,41 +15177,6 @@
                 <a:latin typeface="Pretendard"/>
               </a:rPr>
               <a:t>Stacked Insight Layers</a:t>
-            </a:r>
-          </a:p>
-        </p:txBody>
-      </p:sp>
-      <p:sp>
-        <p:nvSpPr>
-          <p:cNvPr id="5" name="TextBox 4"/>
-          <p:cNvSpPr txBox="1"/>
-          <p:nvPr/>
-        </p:nvSpPr>
-        <p:spPr>
-          <a:xfrm>
-            <a:off x="251460" y="945032"/>
-            <a:ext cx="11247120" cy="246888"/>
-          </a:xfrm>
-          <a:prstGeom prst="rect">
-            <a:avLst/>
-          </a:prstGeom>
-          <a:noFill/>
-        </p:spPr>
-        <p:txBody>
-          <a:bodyPr wrap="square" lIns="0" rIns="0" tIns="0" bIns="0" anchor="t">
-            <a:spAutoFit/>
-          </a:bodyPr>
-          <a:lstStyle/>
-          <a:p>
-            <a:pPr algn="l"/>
-            <a:r>
-              <a:rPr sz="1300" b="0" i="0" spc="-100">
-                <a:solidFill>
-                  <a:srgbClr val="7A7A7A"/>
-                </a:solidFill>
-                <a:latin typeface="Pretendard"/>
-              </a:rPr>
-              <a:t>Three horizontal bands — finding, supporting evidence, clinical implication.</a:t>
             </a:r>
           </a:p>
         </p:txBody>

--- a/backbone_slides.pptx
+++ b/backbone_slides.pptx
@@ -7448,94 +7448,6 @@
       </p:sp>
       <p:sp>
         <p:nvSpPr>
-          <p:cNvPr id="31" name="Rectangle 30"/>
-          <p:cNvSpPr/>
-          <p:nvPr/>
-        </p:nvSpPr>
-        <p:spPr>
-          <a:xfrm>
-            <a:off x="7772400" y="6492240"/>
-            <a:ext cx="182880" cy="164592"/>
-          </a:xfrm>
-          <a:prstGeom prst="rect">
-            <a:avLst/>
-          </a:prstGeom>
-          <a:noFill/>
-          <a:ln w="12700">
-            <a:solidFill>
-              <a:srgbClr val="00754A"/>
-            </a:solidFill>
-          </a:ln>
-        </p:spPr>
-        <p:style>
-          <a:lnRef idx="1">
-            <a:schemeClr val="accent1"/>
-          </a:lnRef>
-          <a:fillRef idx="3">
-            <a:schemeClr val="accent1"/>
-          </a:fillRef>
-          <a:effectRef idx="0">
-            <a:schemeClr val="accent1"/>
-          </a:effectRef>
-          <a:fontRef idx="minor">
-            <a:schemeClr val="lt1"/>
-          </a:fontRef>
-        </p:style>
-        <p:txBody>
-          <a:bodyPr rtlCol="0" anchor="ctr"/>
-          <a:lstStyle/>
-          <a:p>
-            <a:pPr algn="ctr"/>
-            <a:endParaRPr/>
-          </a:p>
-        </p:txBody>
-      </p:sp>
-      <p:sp>
-        <p:nvSpPr>
-          <p:cNvPr id="33" name="Rectangle 32"/>
-          <p:cNvSpPr/>
-          <p:nvPr/>
-        </p:nvSpPr>
-        <p:spPr>
-          <a:xfrm>
-            <a:off x="9601200" y="6492240"/>
-            <a:ext cx="182880" cy="164592"/>
-          </a:xfrm>
-          <a:prstGeom prst="rect">
-            <a:avLst/>
-          </a:prstGeom>
-          <a:noFill/>
-          <a:ln w="12700">
-            <a:solidFill>
-              <a:srgbClr val="006241"/>
-            </a:solidFill>
-          </a:ln>
-        </p:spPr>
-        <p:style>
-          <a:lnRef idx="1">
-            <a:schemeClr val="accent1"/>
-          </a:lnRef>
-          <a:fillRef idx="3">
-            <a:schemeClr val="accent1"/>
-          </a:fillRef>
-          <a:effectRef idx="0">
-            <a:schemeClr val="accent1"/>
-          </a:effectRef>
-          <a:fontRef idx="minor">
-            <a:schemeClr val="lt1"/>
-          </a:fontRef>
-        </p:style>
-        <p:txBody>
-          <a:bodyPr rtlCol="0" anchor="ctr"/>
-          <a:lstStyle/>
-          <a:p>
-            <a:pPr algn="ctr"/>
-            <a:endParaRPr/>
-          </a:p>
-        </p:txBody>
-      </p:sp>
-      <p:sp>
-        <p:nvSpPr>
           <p:cNvPr id="35" name="TextBox 34"/>
           <p:cNvSpPr txBox="1"/>
           <p:nvPr/>
@@ -8410,94 +8322,6 @@
           </a:solidFill>
           <a:ln>
             <a:noFill/>
-          </a:ln>
-        </p:spPr>
-        <p:style>
-          <a:lnRef idx="1">
-            <a:schemeClr val="accent1"/>
-          </a:lnRef>
-          <a:fillRef idx="3">
-            <a:schemeClr val="accent1"/>
-          </a:fillRef>
-          <a:effectRef idx="0">
-            <a:schemeClr val="accent1"/>
-          </a:effectRef>
-          <a:fontRef idx="minor">
-            <a:schemeClr val="lt1"/>
-          </a:fontRef>
-        </p:style>
-        <p:txBody>
-          <a:bodyPr rtlCol="0" anchor="ctr"/>
-          <a:lstStyle/>
-          <a:p>
-            <a:pPr algn="ctr"/>
-            <a:endParaRPr/>
-          </a:p>
-        </p:txBody>
-      </p:sp>
-      <p:sp>
-        <p:nvSpPr>
-          <p:cNvPr id="31" name="Rectangle 30"/>
-          <p:cNvSpPr/>
-          <p:nvPr/>
-        </p:nvSpPr>
-        <p:spPr>
-          <a:xfrm>
-            <a:off x="7772400" y="6492240"/>
-            <a:ext cx="182880" cy="164592"/>
-          </a:xfrm>
-          <a:prstGeom prst="rect">
-            <a:avLst/>
-          </a:prstGeom>
-          <a:noFill/>
-          <a:ln w="12700">
-            <a:solidFill>
-              <a:srgbClr val="00754A"/>
-            </a:solidFill>
-          </a:ln>
-        </p:spPr>
-        <p:style>
-          <a:lnRef idx="1">
-            <a:schemeClr val="accent1"/>
-          </a:lnRef>
-          <a:fillRef idx="3">
-            <a:schemeClr val="accent1"/>
-          </a:fillRef>
-          <a:effectRef idx="0">
-            <a:schemeClr val="accent1"/>
-          </a:effectRef>
-          <a:fontRef idx="minor">
-            <a:schemeClr val="lt1"/>
-          </a:fontRef>
-        </p:style>
-        <p:txBody>
-          <a:bodyPr rtlCol="0" anchor="ctr"/>
-          <a:lstStyle/>
-          <a:p>
-            <a:pPr algn="ctr"/>
-            <a:endParaRPr/>
-          </a:p>
-        </p:txBody>
-      </p:sp>
-      <p:sp>
-        <p:nvSpPr>
-          <p:cNvPr id="33" name="Rectangle 32"/>
-          <p:cNvSpPr/>
-          <p:nvPr/>
-        </p:nvSpPr>
-        <p:spPr>
-          <a:xfrm>
-            <a:off x="9601200" y="6492240"/>
-            <a:ext cx="182880" cy="164592"/>
-          </a:xfrm>
-          <a:prstGeom prst="rect">
-            <a:avLst/>
-          </a:prstGeom>
-          <a:noFill/>
-          <a:ln w="12700">
-            <a:solidFill>
-              <a:srgbClr val="006241"/>
-            </a:solidFill>
           </a:ln>
         </p:spPr>
         <p:style>

--- a/backbone_slides.pptx
+++ b/backbone_slides.pptx
@@ -7524,8 +7524,8 @@
         </p:nvSpPr>
         <p:spPr>
           <a:xfrm>
-            <a:off x="914400" y="3310128"/>
-            <a:ext cx="10332720" cy="32004"/>
+            <a:off x="1554480" y="3310128"/>
+            <a:ext cx="9052560" cy="32004"/>
           </a:xfrm>
           <a:prstGeom prst="rect">
             <a:avLst/>
@@ -7567,7 +7567,7 @@
         </p:nvSpPr>
         <p:spPr>
           <a:xfrm>
-            <a:off x="813816" y="3259836"/>
+            <a:off x="1453895" y="3259836"/>
             <a:ext cx="201168" cy="201168"/>
           </a:xfrm>
           <a:prstGeom prst="ellipse">
@@ -7610,7 +7610,7 @@
         </p:nvSpPr>
         <p:spPr>
           <a:xfrm>
-            <a:off x="-91440" y="2697480"/>
+            <a:off x="548639" y="2697480"/>
             <a:ext cx="2011680" cy="365760"/>
           </a:xfrm>
           <a:prstGeom prst="rect">
@@ -7645,7 +7645,7 @@
         </p:nvSpPr>
         <p:spPr>
           <a:xfrm>
-            <a:off x="-182879" y="3639312"/>
+            <a:off x="457200" y="3639312"/>
             <a:ext cx="2194560" cy="822960"/>
           </a:xfrm>
           <a:prstGeom prst="rect">
@@ -7692,7 +7692,7 @@
         </p:nvSpPr>
         <p:spPr>
           <a:xfrm>
-            <a:off x="3396996" y="3259836"/>
+            <a:off x="3717035" y="3259836"/>
             <a:ext cx="201168" cy="201168"/>
           </a:xfrm>
           <a:prstGeom prst="ellipse">
@@ -7735,7 +7735,7 @@
         </p:nvSpPr>
         <p:spPr>
           <a:xfrm>
-            <a:off x="2491740" y="2697480"/>
+            <a:off x="2811779" y="2697480"/>
             <a:ext cx="2011680" cy="365760"/>
           </a:xfrm>
           <a:prstGeom prst="rect">
@@ -7770,7 +7770,7 @@
         </p:nvSpPr>
         <p:spPr>
           <a:xfrm>
-            <a:off x="2400300" y="3639312"/>
+            <a:off x="2720339" y="3639312"/>
             <a:ext cx="2194560" cy="822960"/>
           </a:xfrm>
           <a:prstGeom prst="rect">
@@ -7942,7 +7942,7 @@
         </p:nvSpPr>
         <p:spPr>
           <a:xfrm>
-            <a:off x="8563356" y="3259836"/>
+            <a:off x="8243316" y="3259836"/>
             <a:ext cx="201168" cy="201168"/>
           </a:xfrm>
           <a:prstGeom prst="ellipse">
@@ -7985,7 +7985,7 @@
         </p:nvSpPr>
         <p:spPr>
           <a:xfrm>
-            <a:off x="7658100" y="2697480"/>
+            <a:off x="7338060" y="2697480"/>
             <a:ext cx="2011680" cy="365760"/>
           </a:xfrm>
           <a:prstGeom prst="rect">
@@ -8020,7 +8020,7 @@
         </p:nvSpPr>
         <p:spPr>
           <a:xfrm>
-            <a:off x="7566660" y="3639312"/>
+            <a:off x="7246620" y="3639312"/>
             <a:ext cx="2194560" cy="822960"/>
           </a:xfrm>
           <a:prstGeom prst="rect">
@@ -8067,7 +8067,7 @@
         </p:nvSpPr>
         <p:spPr>
           <a:xfrm>
-            <a:off x="11146536" y="3259836"/>
+            <a:off x="10506456" y="3259836"/>
             <a:ext cx="201168" cy="201168"/>
           </a:xfrm>
           <a:prstGeom prst="ellipse">
@@ -8110,7 +8110,7 @@
         </p:nvSpPr>
         <p:spPr>
           <a:xfrm>
-            <a:off x="10241280" y="2697480"/>
+            <a:off x="9601200" y="2697480"/>
             <a:ext cx="2011680" cy="365760"/>
           </a:xfrm>
           <a:prstGeom prst="rect">
@@ -8145,7 +8145,7 @@
         </p:nvSpPr>
         <p:spPr>
           <a:xfrm>
-            <a:off x="10149840" y="3639312"/>
+            <a:off x="9509760" y="3639312"/>
             <a:ext cx="2194560" cy="822960"/>
           </a:xfrm>
           <a:prstGeom prst="rect">

--- a/backbone_slides.pptx
+++ b/backbone_slides.pptx
@@ -3615,7 +3615,7 @@
           <a:p>
             <a:pPr algn="l"/>
             <a:r>
-              <a:rPr sz="1100" b="1" i="0" spc="-11">
+              <a:rPr sz="1300" b="1" i="0" spc="-13">
                 <a:solidFill>
                   <a:srgbClr val="8E8E93"/>
                 </a:solidFill>
@@ -3679,7 +3679,7 @@
               </a:lnSpc>
             </a:pPr>
             <a:r>
-              <a:rPr sz="3000" b="1" i="0" spc="-30">
+              <a:rPr sz="3200" b="1" i="0" spc="-32">
                 <a:solidFill>
                   <a:srgbClr val="006241"/>
                 </a:solidFill>
@@ -3894,7 +3894,7 @@
           <a:p>
             <a:pPr algn="ctr"/>
             <a:r>
-              <a:rPr sz="1200" b="1" i="0" spc="-12">
+              <a:rPr sz="1400" b="1" i="0" spc="-14">
                 <a:solidFill>
                   <a:srgbClr val="1F1F1F"/>
                 </a:solidFill>
@@ -3964,7 +3964,7 @@
           <a:p>
             <a:pPr algn="ctr"/>
             <a:r>
-              <a:rPr sz="1800" b="1" i="0" spc="-18">
+              <a:rPr sz="2200" b="1" i="0" spc="-22">
                 <a:solidFill>
                   <a:srgbClr val="161616"/>
                 </a:solidFill>
@@ -4003,7 +4003,7 @@
               </a:lnSpc>
             </a:pPr>
             <a:r>
-              <a:rPr sz="1300" b="0" i="0" spc="-13">
+              <a:rPr sz="1600" b="0" i="0" spc="-16">
                 <a:solidFill>
                   <a:srgbClr val="1F1F1F"/>
                 </a:solidFill>
@@ -4173,7 +4173,7 @@
           <a:p>
             <a:pPr algn="ctr"/>
             <a:r>
-              <a:rPr sz="1200" b="1" i="0" spc="-12">
+              <a:rPr sz="1400" b="1" i="0" spc="-14">
                 <a:solidFill>
                   <a:srgbClr val="1F1F1F"/>
                 </a:solidFill>
@@ -4243,7 +4243,7 @@
           <a:p>
             <a:pPr algn="ctr"/>
             <a:r>
-              <a:rPr sz="1800" b="1" i="0" spc="-18">
+              <a:rPr sz="2200" b="1" i="0" spc="-22">
                 <a:solidFill>
                   <a:srgbClr val="161616"/>
                 </a:solidFill>
@@ -4282,7 +4282,7 @@
               </a:lnSpc>
             </a:pPr>
             <a:r>
-              <a:rPr sz="1300" b="0" i="0" spc="-13">
+              <a:rPr sz="1600" b="0" i="0" spc="-16">
                 <a:solidFill>
                   <a:srgbClr val="1F1F1F"/>
                 </a:solidFill>
@@ -4452,7 +4452,7 @@
           <a:p>
             <a:pPr algn="ctr"/>
             <a:r>
-              <a:rPr sz="1200" b="1" i="0" spc="-12">
+              <a:rPr sz="1400" b="1" i="0" spc="-14">
                 <a:solidFill>
                   <a:srgbClr val="1F1F1F"/>
                 </a:solidFill>
@@ -4522,7 +4522,7 @@
           <a:p>
             <a:pPr algn="ctr"/>
             <a:r>
-              <a:rPr sz="1800" b="1" i="0" spc="-18">
+              <a:rPr sz="2200" b="1" i="0" spc="-22">
                 <a:solidFill>
                   <a:srgbClr val="161616"/>
                 </a:solidFill>
@@ -4561,7 +4561,7 @@
               </a:lnSpc>
             </a:pPr>
             <a:r>
-              <a:rPr sz="1300" b="0" i="0" spc="-13">
+              <a:rPr sz="1600" b="0" i="0" spc="-16">
                 <a:solidFill>
                   <a:srgbClr val="1F1F1F"/>
                 </a:solidFill>
@@ -4643,7 +4643,7 @@
           <a:p>
             <a:pPr algn="ctr"/>
             <a:r>
-              <a:rPr sz="1700" b="1" i="0" spc="-17">
+              <a:rPr sz="2000" b="1" i="0" spc="-20">
                 <a:solidFill>
                   <a:srgbClr val="1F1F1F"/>
                 </a:solidFill>
@@ -4678,7 +4678,7 @@
           <a:p>
             <a:pPr algn="l"/>
             <a:r>
-              <a:rPr sz="900" b="0" i="0" spc="-9">
+              <a:rPr sz="1100" b="0" i="0" spc="-11">
                 <a:solidFill>
                   <a:srgbClr val="8E8E93"/>
                 </a:solidFill>
@@ -4773,7 +4773,7 @@
           <a:p>
             <a:pPr algn="l"/>
             <a:r>
-              <a:rPr sz="1100" b="1" i="0" spc="-11">
+              <a:rPr sz="1300" b="1" i="0" spc="-13">
                 <a:solidFill>
                   <a:srgbClr val="8E8E93"/>
                 </a:solidFill>
@@ -4837,7 +4837,7 @@
               </a:lnSpc>
             </a:pPr>
             <a:r>
-              <a:rPr sz="3000" b="1" i="0" spc="-30">
+              <a:rPr sz="3200" b="1" i="0" spc="-32">
                 <a:solidFill>
                   <a:srgbClr val="006241"/>
                 </a:solidFill>
@@ -5006,7 +5006,7 @@
           <a:p>
             <a:pPr algn="l"/>
             <a:r>
-              <a:rPr sz="2000" b="1" i="0" spc="-20">
+              <a:rPr sz="2400" b="1" i="0" spc="-24">
                 <a:solidFill>
                   <a:srgbClr val="161616"/>
                 </a:solidFill>
@@ -5041,7 +5041,7 @@
           <a:p>
             <a:pPr algn="l"/>
             <a:r>
-              <a:rPr sz="1200" b="0" i="0" spc="-12">
+              <a:rPr sz="1400" b="0" i="0" spc="-14">
                 <a:solidFill>
                   <a:srgbClr val="7A7A7A"/>
                 </a:solidFill>
@@ -5122,7 +5122,7 @@
           <a:p>
             <a:pPr algn="ctr"/>
             <a:r>
-              <a:rPr sz="1400" b="1" i="0" spc="-14">
+              <a:rPr sz="1700" b="1" i="0" spc="-17">
                 <a:solidFill>
                   <a:srgbClr val="1F1F1F"/>
                 </a:solidFill>
@@ -5157,7 +5157,7 @@
           <a:p>
             <a:pPr algn="l"/>
             <a:r>
-              <a:rPr sz="1400" b="0" i="0" spc="-14">
+              <a:rPr sz="1700" b="0" i="0" spc="-17">
                 <a:solidFill>
                   <a:srgbClr val="7A7A7A"/>
                 </a:solidFill>
@@ -5544,7 +5544,7 @@
           <a:p>
             <a:pPr algn="ctr"/>
             <a:r>
-              <a:rPr sz="1200" b="0" i="0" spc="-12">
+              <a:rPr sz="1400" b="0" i="0" spc="-14">
                 <a:solidFill>
                   <a:srgbClr val="7A7A7A"/>
                 </a:solidFill>
@@ -5579,7 +5579,7 @@
           <a:p>
             <a:pPr algn="ctr"/>
             <a:r>
-              <a:rPr sz="1200" b="1" i="0" spc="-12">
+              <a:rPr sz="1400" b="1" i="0" spc="-14">
                 <a:solidFill>
                   <a:srgbClr val="006241"/>
                 </a:solidFill>
@@ -5614,7 +5614,7 @@
           <a:p>
             <a:pPr algn="ctr"/>
             <a:r>
-              <a:rPr sz="1200" b="0" i="0" spc="-12">
+              <a:rPr sz="1400" b="0" i="0" spc="-14">
                 <a:solidFill>
                   <a:srgbClr val="7A7A7A"/>
                 </a:solidFill>
@@ -5649,7 +5649,7 @@
           <a:p>
             <a:pPr algn="ctr"/>
             <a:r>
-              <a:rPr sz="1200" b="1" i="0" spc="-12">
+              <a:rPr sz="1400" b="1" i="0" spc="-14">
                 <a:solidFill>
                   <a:srgbClr val="006241"/>
                 </a:solidFill>
@@ -5684,7 +5684,7 @@
           <a:p>
             <a:pPr algn="ctr"/>
             <a:r>
-              <a:rPr sz="1200" b="0" i="0" spc="-12">
+              <a:rPr sz="1400" b="0" i="0" spc="-14">
                 <a:solidFill>
                   <a:srgbClr val="7A7A7A"/>
                 </a:solidFill>
@@ -5719,7 +5719,7 @@
           <a:p>
             <a:pPr algn="ctr"/>
             <a:r>
-              <a:rPr sz="1600" b="1" i="0" spc="-16">
+              <a:rPr sz="2000" b="1" i="0" spc="-20">
                 <a:solidFill>
                   <a:srgbClr val="00754A"/>
                 </a:solidFill>
@@ -5800,7 +5800,7 @@
           <a:p>
             <a:pPr algn="ctr"/>
             <a:r>
-              <a:rPr sz="1400" b="1" i="0" spc="-14">
+              <a:rPr sz="1700" b="1" i="0" spc="-17">
                 <a:solidFill>
                   <a:srgbClr val="1F1F1F"/>
                 </a:solidFill>
@@ -5923,7 +5923,7 @@
           <a:p>
             <a:pPr algn="l"/>
             <a:r>
-              <a:rPr sz="2000" b="1" i="0" spc="-20">
+              <a:rPr sz="2400" b="1" i="0" spc="-24">
                 <a:solidFill>
                   <a:srgbClr val="161616"/>
                 </a:solidFill>
@@ -5958,7 +5958,7 @@
           <a:p>
             <a:pPr algn="l"/>
             <a:r>
-              <a:rPr sz="1200" b="0" i="0" spc="-12">
+              <a:rPr sz="1400" b="0" i="0" spc="-14">
                 <a:solidFill>
                   <a:srgbClr val="7A7A7A"/>
                 </a:solidFill>
@@ -6039,7 +6039,7 @@
           <a:p>
             <a:pPr algn="ctr"/>
             <a:r>
-              <a:rPr sz="1400" b="1" i="0" spc="-14">
+              <a:rPr sz="1700" b="1" i="0" spc="-17">
                 <a:solidFill>
                   <a:srgbClr val="1F1F1F"/>
                 </a:solidFill>
@@ -6074,7 +6074,7 @@
           <a:p>
             <a:pPr algn="l"/>
             <a:r>
-              <a:rPr sz="1400" b="0" i="0" spc="-14">
+              <a:rPr sz="1700" b="0" i="0" spc="-17">
                 <a:solidFill>
                   <a:srgbClr val="7A7A7A"/>
                 </a:solidFill>
@@ -6461,7 +6461,7 @@
           <a:p>
             <a:pPr algn="ctr"/>
             <a:r>
-              <a:rPr sz="1200" b="0" i="0" spc="-12">
+              <a:rPr sz="1400" b="0" i="0" spc="-14">
                 <a:solidFill>
                   <a:srgbClr val="7A7A7A"/>
                 </a:solidFill>
@@ -6496,7 +6496,7 @@
           <a:p>
             <a:pPr algn="ctr"/>
             <a:r>
-              <a:rPr sz="1200" b="1" i="0" spc="-12">
+              <a:rPr sz="1400" b="1" i="0" spc="-14">
                 <a:solidFill>
                   <a:srgbClr val="006241"/>
                 </a:solidFill>
@@ -6531,7 +6531,7 @@
           <a:p>
             <a:pPr algn="ctr"/>
             <a:r>
-              <a:rPr sz="1200" b="0" i="0" spc="-12">
+              <a:rPr sz="1400" b="0" i="0" spc="-14">
                 <a:solidFill>
                   <a:srgbClr val="7A7A7A"/>
                 </a:solidFill>
@@ -6566,7 +6566,7 @@
           <a:p>
             <a:pPr algn="ctr"/>
             <a:r>
-              <a:rPr sz="1200" b="1" i="0" spc="-12">
+              <a:rPr sz="1400" b="1" i="0" spc="-14">
                 <a:solidFill>
                   <a:srgbClr val="006241"/>
                 </a:solidFill>
@@ -6601,7 +6601,7 @@
           <a:p>
             <a:pPr algn="ctr"/>
             <a:r>
-              <a:rPr sz="1200" b="0" i="0" spc="-12">
+              <a:rPr sz="1400" b="0" i="0" spc="-14">
                 <a:solidFill>
                   <a:srgbClr val="7A7A7A"/>
                 </a:solidFill>
@@ -6636,7 +6636,7 @@
           <a:p>
             <a:pPr algn="ctr"/>
             <a:r>
-              <a:rPr sz="1600" b="1" i="0" spc="-16">
+              <a:rPr sz="2000" b="1" i="0" spc="-20">
                 <a:solidFill>
                   <a:srgbClr val="006241"/>
                 </a:solidFill>
@@ -6717,7 +6717,7 @@
           <a:p>
             <a:pPr algn="ctr"/>
             <a:r>
-              <a:rPr sz="1400" b="1" i="0" spc="-14">
+              <a:rPr sz="1700" b="1" i="0" spc="-17">
                 <a:solidFill>
                   <a:srgbClr val="1F1F1F"/>
                 </a:solidFill>
@@ -6752,7 +6752,7 @@
           <a:p>
             <a:pPr algn="ctr"/>
             <a:r>
-              <a:rPr sz="1200" b="0" i="0" spc="-12">
+              <a:rPr sz="1400" b="0" i="0" spc="-14">
                 <a:solidFill>
                   <a:srgbClr val="7A7A7A"/>
                 </a:solidFill>
@@ -6833,7 +6833,7 @@
           <a:p>
             <a:pPr algn="l"/>
             <a:r>
-              <a:rPr sz="1400" b="1" i="0" spc="-14">
+              <a:rPr sz="1700" b="1" i="0" spc="-17">
                 <a:solidFill>
                   <a:srgbClr val="1F1F1F"/>
                 </a:solidFill>
@@ -6868,7 +6868,7 @@
           <a:p>
             <a:pPr algn="l"/>
             <a:r>
-              <a:rPr sz="900" b="0" i="0" spc="-9">
+              <a:rPr sz="1100" b="0" i="0" spc="-11">
                 <a:solidFill>
                   <a:srgbClr val="8E8E93"/>
                 </a:solidFill>
@@ -6903,7 +6903,7 @@
           <a:p>
             <a:pPr algn="r"/>
             <a:r>
-              <a:rPr sz="800" b="0" i="0" spc="-8">
+              <a:rPr sz="1200" b="0" i="0" spc="-12">
                 <a:solidFill>
                   <a:srgbClr val="8E8E93"/>
                 </a:solidFill>
@@ -7325,7 +7325,7 @@
           <a:p>
             <a:pPr algn="l"/>
             <a:r>
-              <a:rPr sz="1100" b="1" i="0" spc="-11">
+              <a:rPr sz="1300" b="1" i="0" spc="-13">
                 <a:solidFill>
                   <a:srgbClr val="8E8E93"/>
                 </a:solidFill>
@@ -7389,7 +7389,7 @@
               </a:lnSpc>
             </a:pPr>
             <a:r>
-              <a:rPr sz="3000" b="1" i="0" spc="-30">
+              <a:rPr sz="3200" b="1" i="0" spc="-32">
                 <a:solidFill>
                   <a:srgbClr val="006241"/>
                 </a:solidFill>
@@ -7470,7 +7470,7 @@
           <a:p>
             <a:pPr algn="l"/>
             <a:r>
-              <a:rPr sz="900" b="0" i="0" spc="-9">
+              <a:rPr sz="1100" b="0" i="0" spc="-11">
                 <a:solidFill>
                   <a:srgbClr val="8E8E93"/>
                 </a:solidFill>
@@ -7505,7 +7505,7 @@
           <a:p>
             <a:pPr algn="r"/>
             <a:r>
-              <a:rPr sz="800" b="0" i="0" spc="-8">
+              <a:rPr sz="1200" b="0" i="0" spc="-12">
                 <a:solidFill>
                   <a:srgbClr val="8E8E93"/>
                 </a:solidFill>
@@ -7626,7 +7626,7 @@
           <a:p>
             <a:pPr algn="ctr"/>
             <a:r>
-              <a:rPr sz="1800" b="1" spc="-18">
+              <a:rPr sz="2200" b="1" spc="-22">
                 <a:solidFill>
                   <a:srgbClr val="006241"/>
                 </a:solidFill>
@@ -7661,7 +7661,7 @@
           <a:p>
             <a:pPr algn="ctr"/>
             <a:r>
-              <a:rPr sz="1200" b="0" spc="-12">
+              <a:rPr sz="1400" b="0" spc="-14">
                 <a:solidFill>
                   <a:srgbClr val="1F1F1F"/>
                 </a:solidFill>
@@ -7673,7 +7673,7 @@
           <a:p>
             <a:pPr algn="ctr"/>
             <a:r>
-              <a:rPr sz="1200" b="0" spc="-12">
+              <a:rPr sz="1400" b="0" spc="-14">
                 <a:solidFill>
                   <a:srgbClr val="1F1F1F"/>
                 </a:solidFill>
@@ -7751,7 +7751,7 @@
           <a:p>
             <a:pPr algn="ctr"/>
             <a:r>
-              <a:rPr sz="1800" b="1" spc="-18">
+              <a:rPr sz="2200" b="1" spc="-22">
                 <a:solidFill>
                   <a:srgbClr val="006241"/>
                 </a:solidFill>
@@ -7786,7 +7786,7 @@
           <a:p>
             <a:pPr algn="ctr"/>
             <a:r>
-              <a:rPr sz="1200" b="0" spc="-12">
+              <a:rPr sz="1400" b="0" spc="-14">
                 <a:solidFill>
                   <a:srgbClr val="1F1F1F"/>
                 </a:solidFill>
@@ -7798,7 +7798,7 @@
           <a:p>
             <a:pPr algn="ctr"/>
             <a:r>
-              <a:rPr sz="1200" b="0" spc="-12">
+              <a:rPr sz="1400" b="0" spc="-14">
                 <a:solidFill>
                   <a:srgbClr val="1F1F1F"/>
                 </a:solidFill>
@@ -7876,7 +7876,7 @@
           <a:p>
             <a:pPr algn="ctr"/>
             <a:r>
-              <a:rPr sz="1800" b="1" spc="-18">
+              <a:rPr sz="2200" b="1" spc="-22">
                 <a:solidFill>
                   <a:srgbClr val="006241"/>
                 </a:solidFill>
@@ -7911,7 +7911,7 @@
           <a:p>
             <a:pPr algn="ctr"/>
             <a:r>
-              <a:rPr sz="1200" b="0" spc="-12">
+              <a:rPr sz="1400" b="0" spc="-14">
                 <a:solidFill>
                   <a:srgbClr val="1F1F1F"/>
                 </a:solidFill>
@@ -7923,7 +7923,7 @@
           <a:p>
             <a:pPr algn="ctr"/>
             <a:r>
-              <a:rPr sz="1200" b="0" spc="-12">
+              <a:rPr sz="1400" b="0" spc="-14">
                 <a:solidFill>
                   <a:srgbClr val="1F1F1F"/>
                 </a:solidFill>
@@ -8001,7 +8001,7 @@
           <a:p>
             <a:pPr algn="ctr"/>
             <a:r>
-              <a:rPr sz="1800" b="1" spc="-18">
+              <a:rPr sz="2200" b="1" spc="-22">
                 <a:solidFill>
                   <a:srgbClr val="006241"/>
                 </a:solidFill>
@@ -8036,7 +8036,7 @@
           <a:p>
             <a:pPr algn="ctr"/>
             <a:r>
-              <a:rPr sz="1200" b="0" spc="-12">
+              <a:rPr sz="1400" b="0" spc="-14">
                 <a:solidFill>
                   <a:srgbClr val="1F1F1F"/>
                 </a:solidFill>
@@ -8048,7 +8048,7 @@
           <a:p>
             <a:pPr algn="ctr"/>
             <a:r>
-              <a:rPr sz="1200" b="0" spc="-12">
+              <a:rPr sz="1400" b="0" spc="-14">
                 <a:solidFill>
                   <a:srgbClr val="1F1F1F"/>
                 </a:solidFill>
@@ -8126,7 +8126,7 @@
           <a:p>
             <a:pPr algn="ctr"/>
             <a:r>
-              <a:rPr sz="1800" b="1" spc="-18">
+              <a:rPr sz="2200" b="1" spc="-22">
                 <a:solidFill>
                   <a:srgbClr val="006241"/>
                 </a:solidFill>
@@ -8161,7 +8161,7 @@
           <a:p>
             <a:pPr algn="ctr"/>
             <a:r>
-              <a:rPr sz="1200" b="0" spc="-12">
+              <a:rPr sz="1400" b="0" spc="-14">
                 <a:solidFill>
                   <a:srgbClr val="1F1F1F"/>
                 </a:solidFill>
@@ -8173,7 +8173,7 @@
           <a:p>
             <a:pPr algn="ctr"/>
             <a:r>
-              <a:rPr sz="1200" b="0" spc="-12">
+              <a:rPr sz="1400" b="0" spc="-14">
                 <a:solidFill>
                   <a:srgbClr val="1F1F1F"/>
                 </a:solidFill>
@@ -8226,7 +8226,7 @@
           <a:p>
             <a:pPr algn="l"/>
             <a:r>
-              <a:rPr sz="1100" b="1" i="0" spc="-11">
+              <a:rPr sz="1300" b="1" i="0" spc="-13">
                 <a:solidFill>
                   <a:srgbClr val="8E8E93"/>
                 </a:solidFill>
@@ -8290,7 +8290,7 @@
               </a:lnSpc>
             </a:pPr>
             <a:r>
-              <a:rPr sz="3000" b="1" i="0" spc="-30">
+              <a:rPr sz="3200" b="1" i="0" spc="-32">
                 <a:solidFill>
                   <a:srgbClr val="006241"/>
                 </a:solidFill>
@@ -8371,7 +8371,7 @@
           <a:p>
             <a:pPr algn="l"/>
             <a:r>
-              <a:rPr sz="900" b="0" i="0" spc="-9">
+              <a:rPr sz="1100" b="0" i="0" spc="-11">
                 <a:solidFill>
                   <a:srgbClr val="8E8E93"/>
                 </a:solidFill>
@@ -8406,7 +8406,7 @@
           <a:p>
             <a:pPr algn="r"/>
             <a:r>
-              <a:rPr sz="800" b="0" i="0" spc="-8">
+              <a:rPr sz="1200" b="0" i="0" spc="-12">
                 <a:solidFill>
                   <a:srgbClr val="8E8E93"/>
                 </a:solidFill>
@@ -8484,7 +8484,7 @@
           <a:p>
             <a:pPr algn="ctr"/>
             <a:r>
-              <a:rPr sz="1500" b="1" spc="-15">
+              <a:rPr sz="1800" b="1" spc="-18">
                 <a:solidFill>
                   <a:srgbClr val="1F1F1F"/>
                 </a:solidFill>
@@ -8519,7 +8519,7 @@
           <a:p>
             <a:pPr algn="ctr"/>
             <a:r>
-              <a:rPr sz="1300" b="0" spc="-13">
+              <a:rPr sz="1600" b="0" spc="-16">
                 <a:solidFill>
                   <a:srgbClr val="6B6B6B"/>
                 </a:solidFill>
@@ -8597,7 +8597,7 @@
           <a:p>
             <a:pPr algn="ctr"/>
             <a:r>
-              <a:rPr sz="1500" b="1" spc="-15">
+              <a:rPr sz="1800" b="1" spc="-18">
                 <a:solidFill>
                   <a:srgbClr val="1F1F1F"/>
                 </a:solidFill>
@@ -8632,7 +8632,7 @@
           <a:p>
             <a:pPr algn="ctr"/>
             <a:r>
-              <a:rPr sz="1300" b="0" spc="-13">
+              <a:rPr sz="1600" b="0" spc="-16">
                 <a:solidFill>
                   <a:srgbClr val="6B6B6B"/>
                 </a:solidFill>
@@ -8710,7 +8710,7 @@
           <a:p>
             <a:pPr algn="ctr"/>
             <a:r>
-              <a:rPr sz="1500" b="1" spc="-15">
+              <a:rPr sz="1800" b="1" spc="-18">
                 <a:solidFill>
                   <a:srgbClr val="1F1F1F"/>
                 </a:solidFill>
@@ -8745,7 +8745,7 @@
           <a:p>
             <a:pPr algn="ctr"/>
             <a:r>
-              <a:rPr sz="1300" b="0" spc="-13">
+              <a:rPr sz="1600" b="0" spc="-16">
                 <a:solidFill>
                   <a:srgbClr val="6B6B6B"/>
                 </a:solidFill>
@@ -8823,7 +8823,7 @@
           <a:p>
             <a:pPr algn="ctr"/>
             <a:r>
-              <a:rPr sz="1500" b="1" spc="-15">
+              <a:rPr sz="1800" b="1" spc="-18">
                 <a:solidFill>
                   <a:srgbClr val="1F1F1F"/>
                 </a:solidFill>
@@ -8858,7 +8858,7 @@
           <a:p>
             <a:pPr algn="ctr"/>
             <a:r>
-              <a:rPr sz="1300" b="0" spc="-13">
+              <a:rPr sz="1600" b="0" spc="-16">
                 <a:solidFill>
                   <a:srgbClr val="6B6B6B"/>
                 </a:solidFill>
@@ -9108,7 +9108,7 @@
           <a:p>
             <a:pPr algn="ctr"/>
             <a:r>
-              <a:rPr sz="1100" b="0" spc="-11">
+              <a:rPr sz="1500" b="0" spc="-15">
                 <a:solidFill>
                   <a:srgbClr val="6B6B6B"/>
                 </a:solidFill>
@@ -9120,7 +9120,7 @@
           <a:p>
             <a:pPr algn="ctr"/>
             <a:r>
-              <a:rPr sz="1100" b="0" spc="-11">
+              <a:rPr sz="1500" b="0" spc="-15">
                 <a:solidFill>
                   <a:srgbClr val="6B6B6B"/>
                 </a:solidFill>
@@ -9572,7 +9572,7 @@
           <a:p>
             <a:pPr algn="l"/>
             <a:r>
-              <a:rPr sz="1100" b="1" i="0" spc="-11">
+              <a:rPr sz="1300" b="1" i="0" spc="-13">
                 <a:solidFill>
                   <a:srgbClr val="8E8E93"/>
                 </a:solidFill>
@@ -9636,7 +9636,7 @@
               </a:lnSpc>
             </a:pPr>
             <a:r>
-              <a:rPr sz="3000" b="1" i="0" spc="-30">
+              <a:rPr sz="3200" b="1" i="0" spc="-32">
                 <a:solidFill>
                   <a:srgbClr val="006241"/>
                 </a:solidFill>
@@ -9717,7 +9717,7 @@
           <a:p>
             <a:pPr algn="l"/>
             <a:r>
-              <a:rPr sz="1400" b="1" i="0" spc="-14">
+              <a:rPr sz="1700" b="1" i="0" spc="-17">
                 <a:solidFill>
                   <a:srgbClr val="161616"/>
                 </a:solidFill>
@@ -9840,7 +9840,7 @@
           <a:p>
             <a:pPr algn="r"/>
             <a:r>
-              <a:rPr sz="1200" b="0" i="0" spc="-12">
+              <a:rPr sz="1400" b="0" i="0" spc="-14">
                 <a:solidFill>
                   <a:srgbClr val="7A7A7A"/>
                 </a:solidFill>
@@ -9919,7 +9919,7 @@
           <a:p>
             <a:pPr algn="r"/>
             <a:r>
-              <a:rPr sz="1200" b="0" i="0" spc="-12">
+              <a:rPr sz="1400" b="0" i="0" spc="-14">
                 <a:solidFill>
                   <a:srgbClr val="7A7A7A"/>
                 </a:solidFill>
@@ -9998,7 +9998,7 @@
           <a:p>
             <a:pPr algn="r"/>
             <a:r>
-              <a:rPr sz="1200" b="0" i="0" spc="-12">
+              <a:rPr sz="1400" b="0" i="0" spc="-14">
                 <a:solidFill>
                   <a:srgbClr val="7A7A7A"/>
                 </a:solidFill>
@@ -10077,7 +10077,7 @@
           <a:p>
             <a:pPr algn="r"/>
             <a:r>
-              <a:rPr sz="1200" b="0" i="0" spc="-12">
+              <a:rPr sz="1400" b="0" i="0" spc="-14">
                 <a:solidFill>
                   <a:srgbClr val="7A7A7A"/>
                 </a:solidFill>
@@ -10154,7 +10154,7 @@
           <a:p>
             <a:pPr algn="r"/>
             <a:r>
-              <a:rPr sz="1200" b="0" i="0" spc="-12">
+              <a:rPr sz="1400" b="0" i="0" spc="-14">
                 <a:solidFill>
                   <a:srgbClr val="7A7A7A"/>
                 </a:solidFill>
@@ -10277,7 +10277,7 @@
           <a:p>
             <a:pPr algn="ctr"/>
             <a:r>
-              <a:rPr sz="1300" b="0" i="0" spc="-13">
+              <a:rPr sz="1600" b="0" i="0" spc="-16">
                 <a:solidFill>
                   <a:srgbClr val="7A7A7A"/>
                 </a:solidFill>
@@ -10400,7 +10400,7 @@
           <a:p>
             <a:pPr algn="ctr"/>
             <a:r>
-              <a:rPr sz="1300" b="0" i="0" spc="-13">
+              <a:rPr sz="1600" b="0" i="0" spc="-16">
                 <a:solidFill>
                   <a:srgbClr val="7A7A7A"/>
                 </a:solidFill>
@@ -10523,7 +10523,7 @@
           <a:p>
             <a:pPr algn="ctr"/>
             <a:r>
-              <a:rPr sz="1300" b="0" i="0" spc="-13">
+              <a:rPr sz="1600" b="0" i="0" spc="-16">
                 <a:solidFill>
                   <a:srgbClr val="7A7A7A"/>
                 </a:solidFill>
@@ -10646,7 +10646,7 @@
           <a:p>
             <a:pPr algn="ctr"/>
             <a:r>
-              <a:rPr sz="1300" b="0" i="0" spc="-13">
+              <a:rPr sz="1600" b="0" i="0" spc="-16">
                 <a:solidFill>
                   <a:srgbClr val="7A7A7A"/>
                 </a:solidFill>
@@ -10725,7 +10725,7 @@
           <a:p>
             <a:pPr algn="l"/>
             <a:r>
-              <a:rPr sz="1200" b="1" i="0" spc="-12">
+              <a:rPr sz="1400" b="1" i="0" spc="-14">
                 <a:solidFill>
                   <a:srgbClr val="161616"/>
                 </a:solidFill>
@@ -10804,7 +10804,7 @@
           <a:p>
             <a:pPr algn="l"/>
             <a:r>
-              <a:rPr sz="1200" b="1" i="0" spc="-12">
+              <a:rPr sz="1400" b="1" i="0" spc="-14">
                 <a:solidFill>
                   <a:srgbClr val="161616"/>
                 </a:solidFill>
@@ -10839,7 +10839,7 @@
           <a:p>
             <a:pPr algn="l"/>
             <a:r>
-              <a:rPr sz="900" b="0" i="0" spc="-9">
+              <a:rPr sz="1100" b="0" i="0" spc="-11">
                 <a:solidFill>
                   <a:srgbClr val="8E8E93"/>
                 </a:solidFill>
@@ -10874,7 +10874,7 @@
           <a:p>
             <a:pPr algn="r"/>
             <a:r>
-              <a:rPr sz="800" b="0" i="0" spc="-8">
+              <a:rPr sz="1200" b="0" i="0" spc="-12">
                 <a:solidFill>
                   <a:srgbClr val="8E8E93"/>
                 </a:solidFill>
@@ -10942,7 +10942,7 @@
           <a:p>
             <a:pPr algn="l"/>
             <a:r>
-              <a:rPr sz="1100" b="1" i="0" spc="-11">
+              <a:rPr sz="1300" b="1" i="0" spc="-13">
                 <a:solidFill>
                   <a:srgbClr val="8E8E93"/>
                 </a:solidFill>
@@ -11006,7 +11006,7 @@
               </a:lnSpc>
             </a:pPr>
             <a:r>
-              <a:rPr sz="3000" b="1" i="0" spc="-30">
+              <a:rPr sz="3200" b="1" i="0" spc="-32">
                 <a:solidFill>
                   <a:srgbClr val="006241"/>
                 </a:solidFill>
@@ -11175,7 +11175,7 @@
           <a:p>
             <a:pPr algn="l"/>
             <a:r>
-              <a:rPr sz="3200" b="1" i="0" spc="-32">
+              <a:rPr sz="4000" b="1" i="0" spc="-40">
                 <a:solidFill>
                   <a:srgbClr val="006241"/>
                 </a:solidFill>
@@ -11210,7 +11210,7 @@
           <a:p>
             <a:pPr algn="l"/>
             <a:r>
-              <a:rPr sz="1200" b="0" i="0" spc="-12">
+              <a:rPr sz="1400" b="0" i="0" spc="-14">
                 <a:solidFill>
                   <a:srgbClr val="7A7A7A"/>
                 </a:solidFill>
@@ -11291,7 +11291,7 @@
           <a:p>
             <a:pPr algn="ctr"/>
             <a:r>
-              <a:rPr sz="1000" b="1" i="0" spc="-10">
+              <a:rPr sz="1400" b="1" i="0" spc="-14">
                 <a:solidFill>
                   <a:srgbClr val="1F1F1F"/>
                 </a:solidFill>
@@ -11414,7 +11414,7 @@
           <a:p>
             <a:pPr algn="l"/>
             <a:r>
-              <a:rPr sz="3200" b="1" i="0" spc="-32">
+              <a:rPr sz="4000" b="1" i="0" spc="-40">
                 <a:solidFill>
                   <a:srgbClr val="006241"/>
                 </a:solidFill>
@@ -11449,7 +11449,7 @@
           <a:p>
             <a:pPr algn="l"/>
             <a:r>
-              <a:rPr sz="1200" b="0" i="0" spc="-12">
+              <a:rPr sz="1400" b="0" i="0" spc="-14">
                 <a:solidFill>
                   <a:srgbClr val="7A7A7A"/>
                 </a:solidFill>
@@ -11530,7 +11530,7 @@
           <a:p>
             <a:pPr algn="ctr"/>
             <a:r>
-              <a:rPr sz="1000" b="1" i="0" spc="-10">
+              <a:rPr sz="1400" b="1" i="0" spc="-14">
                 <a:solidFill>
                   <a:srgbClr val="1F1F1F"/>
                 </a:solidFill>
@@ -11653,7 +11653,7 @@
           <a:p>
             <a:pPr algn="l"/>
             <a:r>
-              <a:rPr sz="3200" b="1" i="0" spc="-32">
+              <a:rPr sz="4000" b="1" i="0" spc="-40">
                 <a:solidFill>
                   <a:srgbClr val="006241"/>
                 </a:solidFill>
@@ -11688,7 +11688,7 @@
           <a:p>
             <a:pPr algn="l"/>
             <a:r>
-              <a:rPr sz="1200" b="0" i="0" spc="-12">
+              <a:rPr sz="1400" b="0" i="0" spc="-14">
                 <a:solidFill>
                   <a:srgbClr val="7A7A7A"/>
                 </a:solidFill>
@@ -11769,7 +11769,7 @@
           <a:p>
             <a:pPr algn="ctr"/>
             <a:r>
-              <a:rPr sz="1000" b="1" i="0" spc="-10">
+              <a:rPr sz="1400" b="1" i="0" spc="-14">
                 <a:solidFill>
                   <a:srgbClr val="1F1F1F"/>
                 </a:solidFill>
@@ -11892,7 +11892,7 @@
           <a:p>
             <a:pPr algn="l"/>
             <a:r>
-              <a:rPr sz="3200" b="1" i="0" spc="-32">
+              <a:rPr sz="4000" b="1" i="0" spc="-40">
                 <a:solidFill>
                   <a:srgbClr val="006241"/>
                 </a:solidFill>
@@ -11927,7 +11927,7 @@
           <a:p>
             <a:pPr algn="l"/>
             <a:r>
-              <a:rPr sz="1200" b="0" i="0" spc="-12">
+              <a:rPr sz="1400" b="0" i="0" spc="-14">
                 <a:solidFill>
                   <a:srgbClr val="7A7A7A"/>
                 </a:solidFill>
@@ -12008,7 +12008,7 @@
           <a:p>
             <a:pPr algn="ctr"/>
             <a:r>
-              <a:rPr sz="1000" b="1" i="0" spc="-10">
+              <a:rPr sz="1400" b="1" i="0" spc="-14">
                 <a:solidFill>
                   <a:srgbClr val="1F1F1F"/>
                 </a:solidFill>
@@ -12089,7 +12089,7 @@
           <a:p>
             <a:pPr algn="l"/>
             <a:r>
-              <a:rPr sz="1300" b="1" i="0" spc="-13">
+              <a:rPr sz="1600" b="1" i="0" spc="-16">
                 <a:solidFill>
                   <a:srgbClr val="161616"/>
                 </a:solidFill>
@@ -12864,7 +12864,7 @@
           <a:p>
             <a:pPr algn="ctr"/>
             <a:r>
-              <a:rPr sz="1100" b="0" i="0" spc="-11">
+              <a:rPr sz="1500" b="0" i="0" spc="-15">
                 <a:solidFill>
                   <a:srgbClr val="7A7A7A"/>
                 </a:solidFill>
@@ -12899,7 +12899,7 @@
           <a:p>
             <a:pPr algn="ctr"/>
             <a:r>
-              <a:rPr sz="1100" b="0" i="0" spc="-11">
+              <a:rPr sz="1500" b="0" i="0" spc="-15">
                 <a:solidFill>
                   <a:srgbClr val="7A7A7A"/>
                 </a:solidFill>
@@ -12934,7 +12934,7 @@
           <a:p>
             <a:pPr algn="ctr"/>
             <a:r>
-              <a:rPr sz="1100" b="0" i="0" spc="-11">
+              <a:rPr sz="1500" b="0" i="0" spc="-15">
                 <a:solidFill>
                   <a:srgbClr val="7A7A7A"/>
                 </a:solidFill>
@@ -12969,7 +12969,7 @@
           <a:p>
             <a:pPr algn="ctr"/>
             <a:r>
-              <a:rPr sz="1100" b="0" i="0" spc="-11">
+              <a:rPr sz="1500" b="0" i="0" spc="-15">
                 <a:solidFill>
                   <a:srgbClr val="7A7A7A"/>
                 </a:solidFill>
@@ -13004,7 +13004,7 @@
           <a:p>
             <a:pPr algn="ctr"/>
             <a:r>
-              <a:rPr sz="1100" b="0" i="0" spc="-11">
+              <a:rPr sz="1500" b="0" i="0" spc="-15">
                 <a:solidFill>
                   <a:srgbClr val="7A7A7A"/>
                 </a:solidFill>
@@ -13039,7 +13039,7 @@
           <a:p>
             <a:pPr algn="l"/>
             <a:r>
-              <a:rPr sz="900" b="0" i="0" spc="-9">
+              <a:rPr sz="1100" b="0" i="0" spc="-11">
                 <a:solidFill>
                   <a:srgbClr val="8E8E93"/>
                 </a:solidFill>
@@ -13074,7 +13074,7 @@
           <a:p>
             <a:pPr algn="r"/>
             <a:r>
-              <a:rPr sz="800" b="0" i="0" spc="-8">
+              <a:rPr sz="1200" b="0" i="0" spc="-12">
                 <a:solidFill>
                   <a:srgbClr val="8E8E93"/>
                 </a:solidFill>
@@ -13142,7 +13142,7 @@
           <a:p>
             <a:pPr algn="l"/>
             <a:r>
-              <a:rPr sz="1100" b="1" i="0" spc="-11">
+              <a:rPr sz="1300" b="1" i="0" spc="-13">
                 <a:solidFill>
                   <a:srgbClr val="8E8E93"/>
                 </a:solidFill>
@@ -13206,7 +13206,7 @@
               </a:lnSpc>
             </a:pPr>
             <a:r>
-              <a:rPr sz="3000" b="1" i="0" spc="-30">
+              <a:rPr sz="3200" b="1" i="0" spc="-32">
                 <a:solidFill>
                   <a:srgbClr val="006241"/>
                 </a:solidFill>
@@ -13287,7 +13287,7 @@
           <a:p>
             <a:pPr algn="l"/>
             <a:r>
-              <a:rPr sz="2200" b="1" i="0" spc="-22">
+              <a:rPr sz="2600" b="1" i="0" spc="-26">
                 <a:solidFill>
                   <a:srgbClr val="161616"/>
                 </a:solidFill>
@@ -13322,7 +13322,7 @@
           <a:p>
             <a:pPr algn="l"/>
             <a:r>
-              <a:rPr sz="1100" b="1" i="0" spc="-11">
+              <a:rPr sz="1500" b="1" i="0" spc="-15">
                 <a:solidFill>
                   <a:srgbClr val="00754A"/>
                 </a:solidFill>
@@ -13357,7 +13357,7 @@
           <a:p>
             <a:pPr algn="l"/>
             <a:r>
-              <a:rPr sz="1500" b="0" i="0" spc="-15">
+              <a:rPr sz="1800" b="0" i="0" spc="-18">
                 <a:solidFill>
                   <a:srgbClr val="1F1F1F"/>
                 </a:solidFill>
@@ -13392,7 +13392,7 @@
           <a:p>
             <a:pPr algn="l"/>
             <a:r>
-              <a:rPr sz="1100" b="1" i="0" spc="-11">
+              <a:rPr sz="1500" b="1" i="0" spc="-15">
                 <a:solidFill>
                   <a:srgbClr val="00754A"/>
                 </a:solidFill>
@@ -13427,7 +13427,7 @@
           <a:p>
             <a:pPr algn="l"/>
             <a:r>
-              <a:rPr sz="1500" b="0" i="0" spc="-15">
+              <a:rPr sz="1800" b="0" i="0" spc="-18">
                 <a:solidFill>
                   <a:srgbClr val="1F1F1F"/>
                 </a:solidFill>
@@ -13462,7 +13462,7 @@
           <a:p>
             <a:pPr algn="l"/>
             <a:r>
-              <a:rPr sz="1100" b="1" i="0" spc="-11">
+              <a:rPr sz="1500" b="1" i="0" spc="-15">
                 <a:solidFill>
                   <a:srgbClr val="00754A"/>
                 </a:solidFill>
@@ -13497,7 +13497,7 @@
           <a:p>
             <a:pPr algn="l"/>
             <a:r>
-              <a:rPr sz="1500" b="0" i="0" spc="-15">
+              <a:rPr sz="1800" b="0" i="0" spc="-18">
                 <a:solidFill>
                   <a:srgbClr val="1F1F1F"/>
                 </a:solidFill>
@@ -13578,7 +13578,7 @@
           <a:p>
             <a:pPr algn="l"/>
             <a:r>
-              <a:rPr sz="1000" b="1" i="0" spc="-10">
+              <a:rPr sz="1400" b="1" i="0" spc="-14">
                 <a:solidFill>
                   <a:srgbClr val="CBA258"/>
                 </a:solidFill>
@@ -13613,7 +13613,7 @@
           <a:p>
             <a:pPr algn="l"/>
             <a:r>
-              <a:rPr sz="1400" b="1" i="0" spc="-14">
+              <a:rPr sz="1700" b="1" i="0" spc="-17">
                 <a:solidFill>
                   <a:srgbClr val="1F1F1F"/>
                 </a:solidFill>
@@ -13694,7 +13694,7 @@
           <a:p>
             <a:pPr algn="l"/>
             <a:r>
-              <a:rPr sz="1300" b="1" i="0" spc="-13">
+              <a:rPr sz="1600" b="1" i="0" spc="-16">
                 <a:solidFill>
                   <a:srgbClr val="161616"/>
                 </a:solidFill>
@@ -13817,7 +13817,7 @@
           <a:p>
             <a:pPr algn="ctr"/>
             <a:r>
-              <a:rPr sz="3600" b="1" i="0" spc="-36">
+              <a:rPr sz="4400" b="1" i="0" spc="-44">
                 <a:solidFill>
                   <a:srgbClr val="006241"/>
                 </a:solidFill>
@@ -13852,7 +13852,7 @@
           <a:p>
             <a:pPr algn="ctr"/>
             <a:r>
-              <a:rPr sz="1100" b="0" i="0" spc="-11">
+              <a:rPr sz="1500" b="0" i="0" spc="-15">
                 <a:solidFill>
                   <a:srgbClr val="7A7A7A"/>
                 </a:solidFill>
@@ -13887,7 +13887,7 @@
           <a:p>
             <a:pPr algn="l"/>
             <a:r>
-              <a:rPr sz="900" b="0" i="0" spc="-9">
+              <a:rPr sz="1100" b="0" i="0" spc="-11">
                 <a:solidFill>
                   <a:srgbClr val="8E8E93"/>
                 </a:solidFill>
@@ -13922,7 +13922,7 @@
           <a:p>
             <a:pPr algn="r"/>
             <a:r>
-              <a:rPr sz="800" b="0" i="0" spc="-8">
+              <a:rPr sz="1200" b="0" i="0" spc="-12">
                 <a:solidFill>
                   <a:srgbClr val="8E8E93"/>
                 </a:solidFill>
@@ -13990,7 +13990,7 @@
           <a:p>
             <a:pPr algn="l"/>
             <a:r>
-              <a:rPr sz="1100" b="1" i="0" spc="-11">
+              <a:rPr sz="1300" b="1" i="0" spc="-13">
                 <a:solidFill>
                   <a:srgbClr val="8E8E93"/>
                 </a:solidFill>
@@ -14054,7 +14054,7 @@
               </a:lnSpc>
             </a:pPr>
             <a:r>
-              <a:rPr sz="3000" b="1" i="0" spc="-30">
+              <a:rPr sz="3200" b="1" i="0" spc="-32">
                 <a:solidFill>
                   <a:srgbClr val="006241"/>
                 </a:solidFill>
@@ -14223,7 +14223,7 @@
           <a:p>
             <a:pPr algn="l"/>
             <a:r>
-              <a:rPr sz="1100" b="1" i="0" spc="-11">
+              <a:rPr sz="1500" b="1" i="0" spc="-15">
                 <a:solidFill>
                   <a:srgbClr val="00754A"/>
                 </a:solidFill>
@@ -14293,7 +14293,7 @@
           <a:p>
             <a:pPr algn="ctr"/>
             <a:r>
-              <a:rPr sz="1200" b="0" i="0" spc="-12">
+              <a:rPr sz="1400" b="0" i="0" spc="-14">
                 <a:solidFill>
                   <a:srgbClr val="7A7A7A"/>
                 </a:solidFill>
@@ -14416,7 +14416,7 @@
           <a:p>
             <a:pPr algn="l"/>
             <a:r>
-              <a:rPr sz="1100" b="1" i="0" spc="-11">
+              <a:rPr sz="1500" b="1" i="0" spc="-15">
                 <a:solidFill>
                   <a:srgbClr val="00754A"/>
                 </a:solidFill>
@@ -14486,7 +14486,7 @@
           <a:p>
             <a:pPr algn="ctr"/>
             <a:r>
-              <a:rPr sz="1200" b="0" i="0" spc="-12">
+              <a:rPr sz="1400" b="0" i="0" spc="-14">
                 <a:solidFill>
                   <a:srgbClr val="7A7A7A"/>
                 </a:solidFill>
@@ -14609,7 +14609,7 @@
           <a:p>
             <a:pPr algn="l"/>
             <a:r>
-              <a:rPr sz="1100" b="1" i="0" spc="-11">
+              <a:rPr sz="1500" b="1" i="0" spc="-15">
                 <a:solidFill>
                   <a:srgbClr val="00754A"/>
                 </a:solidFill>
@@ -14679,7 +14679,7 @@
           <a:p>
             <a:pPr algn="ctr"/>
             <a:r>
-              <a:rPr sz="1200" b="0" i="0" spc="-12">
+              <a:rPr sz="1400" b="0" i="0" spc="-14">
                 <a:solidFill>
                   <a:srgbClr val="7A7A7A"/>
                 </a:solidFill>
@@ -14760,7 +14760,7 @@
           <a:p>
             <a:pPr algn="l"/>
             <a:r>
-              <a:rPr sz="1300" b="1" i="0" spc="-13">
+              <a:rPr sz="1600" b="1" i="0" spc="-16">
                 <a:solidFill>
                   <a:srgbClr val="161616"/>
                 </a:solidFill>
@@ -14839,7 +14839,7 @@
           <a:p>
             <a:pPr algn="ctr"/>
             <a:r>
-              <a:rPr sz="1200" b="1" i="0" spc="-12">
+              <a:rPr sz="1400" b="1" i="0" spc="-14">
                 <a:solidFill>
                   <a:srgbClr val="00754A"/>
                 </a:solidFill>
@@ -14874,7 +14874,7 @@
           <a:p>
             <a:pPr algn="ctr"/>
             <a:r>
-              <a:rPr sz="1200" b="0" i="0" spc="-12">
+              <a:rPr sz="1400" b="0" i="0" spc="-14">
                 <a:solidFill>
                   <a:srgbClr val="7A7A7A"/>
                 </a:solidFill>
@@ -14953,7 +14953,7 @@
           <a:p>
             <a:pPr algn="ctr"/>
             <a:r>
-              <a:rPr sz="1200" b="1" i="0" spc="-12">
+              <a:rPr sz="1400" b="1" i="0" spc="-14">
                 <a:solidFill>
                   <a:srgbClr val="00754A"/>
                 </a:solidFill>
@@ -14988,7 +14988,7 @@
           <a:p>
             <a:pPr algn="ctr"/>
             <a:r>
-              <a:rPr sz="1200" b="0" i="0" spc="-12">
+              <a:rPr sz="1400" b="0" i="0" spc="-14">
                 <a:solidFill>
                   <a:srgbClr val="7A7A7A"/>
                 </a:solidFill>
@@ -15067,7 +15067,7 @@
           <a:p>
             <a:pPr algn="ctr"/>
             <a:r>
-              <a:rPr sz="1200" b="1" i="0" spc="-12">
+              <a:rPr sz="1400" b="1" i="0" spc="-14">
                 <a:solidFill>
                   <a:srgbClr val="00754A"/>
                 </a:solidFill>
@@ -15102,7 +15102,7 @@
           <a:p>
             <a:pPr algn="ctr"/>
             <a:r>
-              <a:rPr sz="1200" b="0" i="0" spc="-12">
+              <a:rPr sz="1400" b="0" i="0" spc="-14">
                 <a:solidFill>
                   <a:srgbClr val="7A7A7A"/>
                 </a:solidFill>
@@ -15181,7 +15181,7 @@
           <a:p>
             <a:pPr algn="ctr"/>
             <a:r>
-              <a:rPr sz="1200" b="1" i="0" spc="-12">
+              <a:rPr sz="1400" b="1" i="0" spc="-14">
                 <a:solidFill>
                   <a:srgbClr val="00754A"/>
                 </a:solidFill>
@@ -15216,7 +15216,7 @@
           <a:p>
             <a:pPr algn="ctr"/>
             <a:r>
-              <a:rPr sz="1200" b="0" i="0" spc="-12">
+              <a:rPr sz="1400" b="0" i="0" spc="-14">
                 <a:solidFill>
                   <a:srgbClr val="7A7A7A"/>
                 </a:solidFill>
@@ -15251,7 +15251,7 @@
           <a:p>
             <a:pPr algn="l"/>
             <a:r>
-              <a:rPr sz="900" b="0" i="0" spc="-9">
+              <a:rPr sz="1100" b="0" i="0" spc="-11">
                 <a:solidFill>
                   <a:srgbClr val="8E8E93"/>
                 </a:solidFill>
@@ -15286,7 +15286,7 @@
           <a:p>
             <a:pPr algn="r"/>
             <a:r>
-              <a:rPr sz="800" b="0" i="0" spc="-8">
+              <a:rPr sz="1200" b="0" i="0" spc="-12">
                 <a:solidFill>
                   <a:srgbClr val="8E8E93"/>
                 </a:solidFill>
@@ -15354,7 +15354,7 @@
           <a:p>
             <a:pPr algn="l"/>
             <a:r>
-              <a:rPr sz="1100" b="1" i="0" spc="-11">
+              <a:rPr sz="1300" b="1" i="0" spc="-13">
                 <a:solidFill>
                   <a:srgbClr val="8E8E93"/>
                 </a:solidFill>
@@ -15418,7 +15418,7 @@
               </a:lnSpc>
             </a:pPr>
             <a:r>
-              <a:rPr sz="3000" b="1" i="0" spc="-30">
+              <a:rPr sz="3200" b="1" i="0" spc="-32">
                 <a:solidFill>
                   <a:srgbClr val="006241"/>
                 </a:solidFill>
@@ -15499,7 +15499,7 @@
           <a:p>
             <a:pPr algn="l"/>
             <a:r>
-              <a:rPr sz="1400" b="1" i="0" spc="-14">
+              <a:rPr sz="1700" b="1" i="0" spc="-17">
                 <a:solidFill>
                   <a:srgbClr val="161616"/>
                 </a:solidFill>
@@ -15576,7 +15576,7 @@
           <a:p>
             <a:pPr algn="l"/>
             <a:r>
-              <a:rPr sz="1200" b="1" i="0" spc="-12">
+              <a:rPr sz="1400" b="1" i="0" spc="-14">
                 <a:solidFill>
                   <a:srgbClr val="161616"/>
                 </a:solidFill>
@@ -15611,7 +15611,7 @@
           <a:p>
             <a:pPr algn="ctr"/>
             <a:r>
-              <a:rPr sz="1200" b="1" i="0" spc="-12">
+              <a:rPr sz="1400" b="1" i="0" spc="-14">
                 <a:solidFill>
                   <a:srgbClr val="00754A"/>
                 </a:solidFill>
@@ -15646,7 +15646,7 @@
           <a:p>
             <a:pPr algn="ctr"/>
             <a:r>
-              <a:rPr sz="1200" b="1" i="0" spc="-12">
+              <a:rPr sz="1400" b="1" i="0" spc="-14">
                 <a:solidFill>
                   <a:srgbClr val="006241"/>
                 </a:solidFill>
@@ -15725,7 +15725,7 @@
           <a:p>
             <a:pPr algn="l"/>
             <a:r>
-              <a:rPr sz="1200" b="1" i="0" spc="-12">
+              <a:rPr sz="1400" b="1" i="0" spc="-14">
                 <a:solidFill>
                   <a:srgbClr val="161616"/>
                 </a:solidFill>
@@ -15760,7 +15760,7 @@
           <a:p>
             <a:pPr algn="ctr"/>
             <a:r>
-              <a:rPr sz="1300" b="0" i="0" spc="-13">
+              <a:rPr sz="1600" b="0" i="0" spc="-16">
                 <a:solidFill>
                   <a:srgbClr val="161616"/>
                 </a:solidFill>
@@ -15795,7 +15795,7 @@
           <a:p>
             <a:pPr algn="ctr"/>
             <a:r>
-              <a:rPr sz="1300" b="0" i="0" spc="-13">
+              <a:rPr sz="1600" b="0" i="0" spc="-16">
                 <a:solidFill>
                   <a:srgbClr val="161616"/>
                 </a:solidFill>
@@ -15872,7 +15872,7 @@
           <a:p>
             <a:pPr algn="l"/>
             <a:r>
-              <a:rPr sz="1200" b="1" i="0" spc="-12">
+              <a:rPr sz="1400" b="1" i="0" spc="-14">
                 <a:solidFill>
                   <a:srgbClr val="161616"/>
                 </a:solidFill>
@@ -15907,7 +15907,7 @@
           <a:p>
             <a:pPr algn="ctr"/>
             <a:r>
-              <a:rPr sz="1300" b="1" i="0" spc="-13">
+              <a:rPr sz="1600" b="1" i="0" spc="-16">
                 <a:solidFill>
                   <a:srgbClr val="00754A"/>
                 </a:solidFill>
@@ -15942,7 +15942,7 @@
           <a:p>
             <a:pPr algn="ctr"/>
             <a:r>
-              <a:rPr sz="1300" b="0" i="0" spc="-13">
+              <a:rPr sz="1600" b="0" i="0" spc="-16">
                 <a:solidFill>
                   <a:srgbClr val="161616"/>
                 </a:solidFill>
@@ -16023,7 +16023,7 @@
           <a:p>
             <a:pPr algn="ctr"/>
             <a:r>
-              <a:rPr sz="900" b="1" i="0" spc="-9">
+              <a:rPr sz="1100" b="1" i="0" spc="-11">
                 <a:solidFill>
                   <a:srgbClr val="1F1F1F"/>
                 </a:solidFill>
@@ -16102,7 +16102,7 @@
           <a:p>
             <a:pPr algn="l"/>
             <a:r>
-              <a:rPr sz="1200" b="1" i="0" spc="-12">
+              <a:rPr sz="1400" b="1" i="0" spc="-14">
                 <a:solidFill>
                   <a:srgbClr val="161616"/>
                 </a:solidFill>
@@ -16137,7 +16137,7 @@
           <a:p>
             <a:pPr algn="ctr"/>
             <a:r>
-              <a:rPr sz="1300" b="0" i="0" spc="-13">
+              <a:rPr sz="1600" b="0" i="0" spc="-16">
                 <a:solidFill>
                   <a:srgbClr val="161616"/>
                 </a:solidFill>
@@ -16172,7 +16172,7 @@
           <a:p>
             <a:pPr algn="ctr"/>
             <a:r>
-              <a:rPr sz="1300" b="0" i="0" spc="-13">
+              <a:rPr sz="1600" b="0" i="0" spc="-16">
                 <a:solidFill>
                   <a:srgbClr val="161616"/>
                 </a:solidFill>
@@ -16249,7 +16249,7 @@
           <a:p>
             <a:pPr algn="l"/>
             <a:r>
-              <a:rPr sz="1200" b="1" i="0" spc="-12">
+              <a:rPr sz="1400" b="1" i="0" spc="-14">
                 <a:solidFill>
                   <a:srgbClr val="161616"/>
                 </a:solidFill>
@@ -16284,7 +16284,7 @@
           <a:p>
             <a:pPr algn="ctr"/>
             <a:r>
-              <a:rPr sz="1300" b="1" i="0" spc="-13">
+              <a:rPr sz="1600" b="1" i="0" spc="-16">
                 <a:solidFill>
                   <a:srgbClr val="00754A"/>
                 </a:solidFill>
@@ -16319,7 +16319,7 @@
           <a:p>
             <a:pPr algn="ctr"/>
             <a:r>
-              <a:rPr sz="1300" b="0" i="0" spc="-13">
+              <a:rPr sz="1600" b="0" i="0" spc="-16">
                 <a:solidFill>
                   <a:srgbClr val="161616"/>
                 </a:solidFill>
@@ -16400,7 +16400,7 @@
           <a:p>
             <a:pPr algn="ctr"/>
             <a:r>
-              <a:rPr sz="900" b="1" i="0" spc="-9">
+              <a:rPr sz="1100" b="1" i="0" spc="-11">
                 <a:solidFill>
                   <a:srgbClr val="1F1F1F"/>
                 </a:solidFill>
@@ -16479,7 +16479,7 @@
           <a:p>
             <a:pPr algn="l"/>
             <a:r>
-              <a:rPr sz="1200" b="1" i="0" spc="-12">
+              <a:rPr sz="1400" b="1" i="0" spc="-14">
                 <a:solidFill>
                   <a:srgbClr val="161616"/>
                 </a:solidFill>
@@ -16514,7 +16514,7 @@
           <a:p>
             <a:pPr algn="ctr"/>
             <a:r>
-              <a:rPr sz="1300" b="1" i="0" spc="-13">
+              <a:rPr sz="1600" b="1" i="0" spc="-16">
                 <a:solidFill>
                   <a:srgbClr val="00754A"/>
                 </a:solidFill>
@@ -16549,7 +16549,7 @@
           <a:p>
             <a:pPr algn="ctr"/>
             <a:r>
-              <a:rPr sz="1300" b="0" i="0" spc="-13">
+              <a:rPr sz="1600" b="0" i="0" spc="-16">
                 <a:solidFill>
                   <a:srgbClr val="161616"/>
                 </a:solidFill>
@@ -16630,7 +16630,7 @@
           <a:p>
             <a:pPr algn="ctr"/>
             <a:r>
-              <a:rPr sz="900" b="1" i="0" spc="-9">
+              <a:rPr sz="1100" b="1" i="0" spc="-11">
                 <a:solidFill>
                   <a:srgbClr val="1F1F1F"/>
                 </a:solidFill>
@@ -16707,7 +16707,7 @@
           <a:p>
             <a:pPr algn="l"/>
             <a:r>
-              <a:rPr sz="1200" b="1" i="0" spc="-12">
+              <a:rPr sz="1400" b="1" i="0" spc="-14">
                 <a:solidFill>
                   <a:srgbClr val="161616"/>
                 </a:solidFill>
@@ -16742,7 +16742,7 @@
           <a:p>
             <a:pPr algn="ctr"/>
             <a:r>
-              <a:rPr sz="1300" b="1" i="0" spc="-13">
+              <a:rPr sz="1600" b="1" i="0" spc="-16">
                 <a:solidFill>
                   <a:srgbClr val="00754A"/>
                 </a:solidFill>
@@ -16777,7 +16777,7 @@
           <a:p>
             <a:pPr algn="ctr"/>
             <a:r>
-              <a:rPr sz="1300" b="0" i="0" spc="-13">
+              <a:rPr sz="1600" b="0" i="0" spc="-16">
                 <a:solidFill>
                   <a:srgbClr val="161616"/>
                 </a:solidFill>
@@ -16858,7 +16858,7 @@
           <a:p>
             <a:pPr algn="ctr"/>
             <a:r>
-              <a:rPr sz="900" b="1" i="0" spc="-9">
+              <a:rPr sz="1100" b="1" i="0" spc="-11">
                 <a:solidFill>
                   <a:srgbClr val="1F1F1F"/>
                 </a:solidFill>
@@ -16937,7 +16937,7 @@
           <a:p>
             <a:pPr algn="l"/>
             <a:r>
-              <a:rPr sz="1200" b="1" i="0" spc="-12">
+              <a:rPr sz="1400" b="1" i="0" spc="-14">
                 <a:solidFill>
                   <a:srgbClr val="161616"/>
                 </a:solidFill>
@@ -16972,7 +16972,7 @@
           <a:p>
             <a:pPr algn="ctr"/>
             <a:r>
-              <a:rPr sz="1300" b="0" i="0" spc="-13">
+              <a:rPr sz="1600" b="0" i="0" spc="-16">
                 <a:solidFill>
                   <a:srgbClr val="161616"/>
                 </a:solidFill>
@@ -17007,7 +17007,7 @@
           <a:p>
             <a:pPr algn="ctr"/>
             <a:r>
-              <a:rPr sz="1300" b="0" i="0" spc="-13">
+              <a:rPr sz="1600" b="0" i="0" spc="-16">
                 <a:solidFill>
                   <a:srgbClr val="161616"/>
                 </a:solidFill>
@@ -17042,7 +17042,7 @@
           <a:p>
             <a:pPr algn="l"/>
             <a:r>
-              <a:rPr sz="900" b="0" i="0" spc="-9">
+              <a:rPr sz="1100" b="0" i="0" spc="-11">
                 <a:solidFill>
                   <a:srgbClr val="8E8E93"/>
                 </a:solidFill>
@@ -17077,7 +17077,7 @@
           <a:p>
             <a:pPr algn="r"/>
             <a:r>
-              <a:rPr sz="800" b="0" i="0" spc="-8">
+              <a:rPr sz="1200" b="0" i="0" spc="-12">
                 <a:solidFill>
                   <a:srgbClr val="8E8E93"/>
                 </a:solidFill>
@@ -17145,7 +17145,7 @@
           <a:p>
             <a:pPr algn="l"/>
             <a:r>
-              <a:rPr sz="1100" b="1" i="0" spc="-11">
+              <a:rPr sz="1300" b="1" i="0" spc="-13">
                 <a:solidFill>
                   <a:srgbClr val="8E8E93"/>
                 </a:solidFill>
@@ -17209,7 +17209,7 @@
               </a:lnSpc>
             </a:pPr>
             <a:r>
-              <a:rPr sz="3000" b="1" i="0" spc="-30">
+              <a:rPr sz="3200" b="1" i="0" spc="-32">
                 <a:solidFill>
                   <a:srgbClr val="006241"/>
                 </a:solidFill>
@@ -17336,7 +17336,7 @@
           <a:p>
             <a:pPr algn="l"/>
             <a:r>
-              <a:rPr sz="1100" b="1" i="0" spc="-11">
+              <a:rPr sz="1500" b="1" i="0" spc="-15">
                 <a:solidFill>
                   <a:srgbClr val="CBA258"/>
                 </a:solidFill>
@@ -17371,7 +17371,7 @@
           <a:p>
             <a:pPr algn="l"/>
             <a:r>
-              <a:rPr sz="2200" b="1" i="0" spc="-22">
+              <a:rPr sz="2600" b="1" i="0" spc="-26">
                 <a:solidFill>
                   <a:srgbClr val="1F1F1F"/>
                 </a:solidFill>
@@ -17450,7 +17450,7 @@
           <a:p>
             <a:pPr algn="l"/>
             <a:r>
-              <a:rPr sz="1200" b="1" i="0" spc="-12">
+              <a:rPr sz="1400" b="1" i="0" spc="-14">
                 <a:solidFill>
                   <a:srgbClr val="161616"/>
                 </a:solidFill>
@@ -17573,7 +17573,7 @@
           <a:p>
             <a:pPr algn="ctr"/>
             <a:r>
-              <a:rPr sz="1100" b="0" i="0" spc="-11">
+              <a:rPr sz="1500" b="0" i="0" spc="-15">
                 <a:solidFill>
                   <a:srgbClr val="7A7A7A"/>
                 </a:solidFill>
@@ -17696,7 +17696,7 @@
           <a:p>
             <a:pPr algn="ctr"/>
             <a:r>
-              <a:rPr sz="1100" b="0" i="0" spc="-11">
+              <a:rPr sz="1500" b="0" i="0" spc="-15">
                 <a:solidFill>
                   <a:srgbClr val="7A7A7A"/>
                 </a:solidFill>
@@ -17819,7 +17819,7 @@
           <a:p>
             <a:pPr algn="ctr"/>
             <a:r>
-              <a:rPr sz="1100" b="0" i="0" spc="-11">
+              <a:rPr sz="1500" b="0" i="0" spc="-15">
                 <a:solidFill>
                   <a:srgbClr val="7A7A7A"/>
                 </a:solidFill>
@@ -17942,7 +17942,7 @@
           <a:p>
             <a:pPr algn="ctr"/>
             <a:r>
-              <a:rPr sz="1100" b="0" i="0" spc="-11">
+              <a:rPr sz="1500" b="0" i="0" spc="-15">
                 <a:solidFill>
                   <a:srgbClr val="7A7A7A"/>
                 </a:solidFill>
@@ -18023,7 +18023,7 @@
           <a:p>
             <a:pPr algn="l"/>
             <a:r>
-              <a:rPr sz="1100" b="1" i="0" spc="-11">
+              <a:rPr sz="1500" b="1" i="0" spc="-15">
                 <a:solidFill>
                   <a:srgbClr val="006241"/>
                 </a:solidFill>
@@ -18058,7 +18058,7 @@
           <a:p>
             <a:pPr algn="l"/>
             <a:r>
-              <a:rPr sz="1600" b="1" i="0" spc="-16">
+              <a:rPr sz="2000" b="1" i="0" spc="-20">
                 <a:solidFill>
                   <a:srgbClr val="161616"/>
                 </a:solidFill>
@@ -18093,7 +18093,7 @@
           <a:p>
             <a:pPr algn="l"/>
             <a:r>
-              <a:rPr sz="900" b="0" i="0" spc="-9">
+              <a:rPr sz="1100" b="0" i="0" spc="-11">
                 <a:solidFill>
                   <a:srgbClr val="8E8E93"/>
                 </a:solidFill>
@@ -18128,7 +18128,7 @@
           <a:p>
             <a:pPr algn="r"/>
             <a:r>
-              <a:rPr sz="800" b="0" i="0" spc="-8">
+              <a:rPr sz="1200" b="0" i="0" spc="-12">
                 <a:solidFill>
                   <a:srgbClr val="8E8E93"/>
                 </a:solidFill>
@@ -18196,7 +18196,7 @@
           <a:p>
             <a:pPr algn="l"/>
             <a:r>
-              <a:rPr sz="1100" b="1" i="0" spc="-11">
+              <a:rPr sz="1300" b="1" i="0" spc="-13">
                 <a:solidFill>
                   <a:srgbClr val="8E8E93"/>
                 </a:solidFill>
@@ -18419,7 +18419,7 @@
           <a:p>
             <a:pPr algn="ctr"/>
             <a:r>
-              <a:rPr sz="1500" b="0" i="1" spc="-15">
+              <a:rPr sz="1800" b="0" i="1" spc="-18">
                 <a:solidFill>
                   <a:srgbClr val="7A7A7A"/>
                 </a:solidFill>
@@ -18454,7 +18454,7 @@
           <a:p>
             <a:pPr algn="l"/>
             <a:r>
-              <a:rPr sz="900" b="0" i="0" spc="-9">
+              <a:rPr sz="1100" b="0" i="0" spc="-11">
                 <a:solidFill>
                   <a:srgbClr val="8E8E93"/>
                 </a:solidFill>

--- a/backbone_slides.pptx
+++ b/backbone_slides.pptx
@@ -19,6 +19,7 @@
     <p:sldId id="267" r:id="rId13"/>
     <p:sldId id="268" r:id="rId19"/>
     <p:sldId id="269" r:id="rId20"/>
+    <p:sldId id="270" r:id="rId21"/>
   </p:sldIdLst>
   <p:sldSz cx="12192000" cy="6858000"/>
   <p:notesSz cx="6858000" cy="9144000"/>
@@ -9127,6 +9128,439 @@
                 <a:latin typeface="Pretendard"/>
               </a:rPr>
               <a:t>– reason / criterion</a:t>
+            </a:r>
+          </a:p>
+        </p:txBody>
+      </p:sp>
+    </p:spTree>
+  </p:cSld>
+  <p:clrMapOvr>
+    <a:masterClrMapping/>
+  </p:clrMapOvr>
+</p:sld>
+</file>
+
+<file path=ppt/slides/slide15.xml><?xml version="1.0" encoding="utf-8"?>
+<p:sld xmlns:a="http://schemas.openxmlformats.org/drawingml/2006/main" xmlns:p="http://schemas.openxmlformats.org/presentationml/2006/main" xmlns:r="http://schemas.openxmlformats.org/officeDocument/2006/relationships">
+  <p:cSld>
+    <p:spTree>
+      <p:nvGrpSpPr>
+        <p:cNvPr id="1" name=""/>
+        <p:cNvGrpSpPr/>
+        <p:nvPr/>
+      </p:nvGrpSpPr>
+      <p:grpSpPr/>
+      <p:sp>
+        <p:nvSpPr>
+          <p:cNvPr id="2" name="TextBox 1"/>
+          <p:cNvSpPr txBox="1"/>
+          <p:nvPr/>
+        </p:nvSpPr>
+        <p:spPr>
+          <a:xfrm>
+            <a:off x="138257" y="123444"/>
+            <a:ext cx="5486400" cy="256032"/>
+          </a:xfrm>
+          <a:prstGeom prst="rect">
+            <a:avLst/>
+          </a:prstGeom>
+          <a:noFill/>
+        </p:spPr>
+        <p:txBody>
+          <a:bodyPr wrap="square" lIns="0" tIns="0" rIns="0" bIns="0" anchor="t">
+            <a:spAutoFit/>
+          </a:bodyPr>
+          <a:lstStyle/>
+          <a:p>
+            <a:pPr algn="l"/>
+            <a:r>
+              <a:rPr sz="1300" b="1" i="0" spc="-13">
+                <a:solidFill>
+                  <a:srgbClr val="8E8E93"/>
+                </a:solidFill>
+                <a:latin typeface="Pretendard"/>
+              </a:rPr>
+              <a:t>PATTERN L</a:t>
+            </a:r>
+          </a:p>
+        </p:txBody>
+      </p:sp>
+      <p:pic>
+        <p:nvPicPr>
+          <p:cNvPr id="3" name="Picture 2" descr="logo.png"/>
+          <p:cNvPicPr>
+            <a:picLocks noChangeAspect="1"/>
+          </p:cNvPicPr>
+          <p:nvPr/>
+        </p:nvPicPr>
+        <p:blipFill>
+          <a:blip r:embed="rId2"/>
+          <a:srcRect l="3240" t="21391" r="16358" b="11330"/>
+          <a:stretch>
+            <a:fillRect/>
+          </a:stretch>
+        </p:blipFill>
+        <p:spPr>
+          <a:xfrm>
+            <a:off x="10748356" y="11978"/>
+            <a:ext cx="1443644" cy="798573"/>
+          </a:xfrm>
+          <a:prstGeom prst="rect">
+            <a:avLst/>
+          </a:prstGeom>
+        </p:spPr>
+      </p:pic>
+      <p:sp>
+        <p:nvSpPr>
+          <p:cNvPr id="4" name="TextBox 3"/>
+          <p:cNvSpPr txBox="1"/>
+          <p:nvPr/>
+        </p:nvSpPr>
+        <p:spPr>
+          <a:xfrm>
+            <a:off x="251460" y="436260"/>
+            <a:ext cx="10972800" cy="457200"/>
+          </a:xfrm>
+          <a:prstGeom prst="rect">
+            <a:avLst/>
+          </a:prstGeom>
+          <a:noFill/>
+        </p:spPr>
+        <p:txBody>
+          <a:bodyPr wrap="square" lIns="0" tIns="0" rIns="0" bIns="0" anchor="t">
+            <a:spAutoFit/>
+          </a:bodyPr>
+          <a:lstStyle/>
+          <a:p>
+            <a:pPr algn="l">
+              <a:lnSpc>
+                <a:spcPct val="120000"/>
+              </a:lnSpc>
+            </a:pPr>
+            <a:r>
+              <a:rPr sz="3200" b="1" i="0" spc="-32">
+                <a:solidFill>
+                  <a:srgbClr val="006241"/>
+                </a:solidFill>
+                <a:latin typeface="Pretendard"/>
+              </a:rPr>
+              <a:t>Text Block — one editable text frame</a:t>
+            </a:r>
+          </a:p>
+        </p:txBody>
+      </p:sp>
+      <p:sp>
+        <p:nvSpPr>
+          <p:cNvPr id="6" name="Rounded Rectangle 5"/>
+          <p:cNvSpPr/>
+          <p:nvPr/>
+        </p:nvSpPr>
+        <p:spPr>
+          <a:xfrm>
+            <a:off x="251642" y="1290309"/>
+            <a:ext cx="11699382" cy="5227350"/>
+          </a:xfrm>
+          <a:prstGeom prst="roundRect">
+            <a:avLst>
+              <a:gd name="adj" fmla="val 2099"/>
+            </a:avLst>
+          </a:prstGeom>
+          <a:solidFill>
+            <a:srgbClr val="FFFFFF"/>
+          </a:solidFill>
+          <a:ln>
+            <a:noFill/>
+          </a:ln>
+        </p:spPr>
+        <p:style>
+          <a:lnRef idx="1">
+            <a:schemeClr val="accent1"/>
+          </a:lnRef>
+          <a:fillRef idx="3">
+            <a:schemeClr val="accent1"/>
+          </a:fillRef>
+          <a:effectRef idx="0">
+            <a:schemeClr val="accent1"/>
+          </a:effectRef>
+          <a:fontRef idx="minor">
+            <a:schemeClr val="lt1"/>
+          </a:fontRef>
+        </p:style>
+        <p:txBody>
+          <a:bodyPr rtlCol="0" anchor="ctr"/>
+          <a:lstStyle/>
+          <a:p>
+            <a:pPr algn="ctr"/>
+            <a:endParaRPr/>
+          </a:p>
+        </p:txBody>
+      </p:sp>
+      <p:sp>
+        <p:nvSpPr>
+          <p:cNvPr id="35" name="TextBox 34"/>
+          <p:cNvSpPr txBox="1"/>
+          <p:nvPr/>
+        </p:nvSpPr>
+        <p:spPr>
+          <a:xfrm>
+            <a:off x="138257" y="6620256"/>
+            <a:ext cx="548640" cy="228600"/>
+          </a:xfrm>
+          <a:prstGeom prst="rect">
+            <a:avLst/>
+          </a:prstGeom>
+          <a:noFill/>
+        </p:spPr>
+        <p:txBody>
+          <a:bodyPr wrap="square" lIns="0" tIns="0" rIns="0" bIns="0" anchor="t">
+            <a:spAutoFit/>
+          </a:bodyPr>
+          <a:lstStyle/>
+          <a:p>
+            <a:pPr algn="l"/>
+            <a:r>
+              <a:rPr sz="1100" b="0" i="0" spc="-11">
+                <a:solidFill>
+                  <a:srgbClr val="8E8E93"/>
+                </a:solidFill>
+                <a:latin typeface="Pretendard"/>
+              </a:rPr>
+              <a:t>15</a:t>
+            </a:r>
+          </a:p>
+        </p:txBody>
+      </p:sp>
+      <p:sp>
+        <p:nvSpPr>
+          <p:cNvPr id="36" name="TextBox 35"/>
+          <p:cNvSpPr txBox="1"/>
+          <p:nvPr/>
+        </p:nvSpPr>
+        <p:spPr>
+          <a:xfrm>
+            <a:off x="6567403" y="6617421"/>
+            <a:ext cx="5486400" cy="228600"/>
+          </a:xfrm>
+          <a:prstGeom prst="rect">
+            <a:avLst/>
+          </a:prstGeom>
+          <a:noFill/>
+        </p:spPr>
+        <p:txBody>
+          <a:bodyPr wrap="square" lIns="0" tIns="0" rIns="0" bIns="0" anchor="t">
+            <a:spAutoFit/>
+          </a:bodyPr>
+          <a:lstStyle/>
+          <a:p>
+            <a:pPr algn="r"/>
+            <a:r>
+              <a:rPr sz="1200" b="0" i="0" spc="-12">
+                <a:solidFill>
+                  <a:srgbClr val="8E8E93"/>
+                </a:solidFill>
+                <a:latin typeface="Pretendard"/>
+              </a:rPr>
+              <a:t>Source: study cohort  ·  n = NN</a:t>
+            </a:r>
+          </a:p>
+        </p:txBody>
+      </p:sp>
+      <p:sp>
+        <p:nvSpPr>
+          <p:cNvPr id="37" name="TextBox 36"/>
+          <p:cNvSpPr txBox="1"/>
+          <p:nvPr/>
+        </p:nvSpPr>
+        <p:spPr>
+          <a:xfrm>
+            <a:off x="640080" y="1554480"/>
+            <a:ext cx="10881360" cy="4709160"/>
+          </a:xfrm>
+          <a:prstGeom prst="rect">
+            <a:avLst/>
+          </a:prstGeom>
+          <a:noFill/>
+        </p:spPr>
+        <p:txBody>
+          <a:bodyPr wrap="square">
+            <a:noAutofit/>
+          </a:bodyPr>
+          <a:lstStyle/>
+          <a:p>
+            <a:pPr marL="342900" indent="-342900">
+              <a:lnSpc>
+                <a:spcPct val="118000"/>
+              </a:lnSpc>
+              <a:spcBef>
+                <a:spcPts val="1400"/>
+              </a:spcBef>
+              <a:buClr>
+                <a:srgbClr val="00754A"/>
+              </a:buClr>
+              <a:buSzPct val="68000"/>
+              <a:buFont typeface="Arial"/>
+              <a:buChar char="●"/>
+            </a:pPr>
+            <a:r>
+              <a:rPr sz="2800" b="0" spc="-28">
+                <a:solidFill>
+                  <a:srgbClr val="1F1F1F"/>
+                </a:solidFill>
+                <a:latin typeface="Pretendard"/>
+              </a:rPr>
+              <a:t>Primary point — the single message of this slide</a:t>
+            </a:r>
+          </a:p>
+          <a:p>
+            <a:pPr marL="342900" indent="-342900">
+              <a:lnSpc>
+                <a:spcPct val="118000"/>
+              </a:lnSpc>
+              <a:spcBef>
+                <a:spcPts val="1400"/>
+              </a:spcBef>
+              <a:buClr>
+                <a:srgbClr val="00754A"/>
+              </a:buClr>
+              <a:buSzPct val="68000"/>
+              <a:buFont typeface="Arial"/>
+              <a:buChar char="●"/>
+            </a:pPr>
+            <a:r>
+              <a:rPr sz="2800" b="0" spc="-28">
+                <a:solidFill>
+                  <a:srgbClr val="1F1F1F"/>
+                </a:solidFill>
+                <a:latin typeface="Pretendard"/>
+              </a:rPr>
+              <a:t>Supporting line with a </a:t>
+            </a:r>
+            <a:r>
+              <a:rPr sz="2800" b="1" spc="-28">
+                <a:solidFill>
+                  <a:srgbClr val="00754A"/>
+                </a:solidFill>
+                <a:latin typeface="Pretendard"/>
+              </a:rPr>
+              <a:t>key phrase</a:t>
+            </a:r>
+            <a:r>
+              <a:rPr sz="2800" b="0" spc="-28">
+                <a:solidFill>
+                  <a:srgbClr val="1F1F1F"/>
+                </a:solidFill>
+                <a:latin typeface="Pretendard"/>
+              </a:rPr>
+              <a:t> emphasised</a:t>
+            </a:r>
+          </a:p>
+          <a:p>
+            <a:pPr>
+              <a:lnSpc>
+                <a:spcPct val="55000"/>
+              </a:lnSpc>
+              <a:buNone/>
+            </a:pPr>
+          </a:p>
+          <a:p>
+            <a:pPr marL="342900" indent="-342900">
+              <a:lnSpc>
+                <a:spcPct val="118000"/>
+              </a:lnSpc>
+              <a:spcBef>
+                <a:spcPts val="1400"/>
+              </a:spcBef>
+              <a:buClr>
+                <a:srgbClr val="00754A"/>
+              </a:buClr>
+              <a:buSzPct val="68000"/>
+              <a:buFont typeface="Arial"/>
+              <a:buChar char="●"/>
+            </a:pPr>
+            <a:r>
+              <a:rPr sz="3200" b="0" spc="-32">
+                <a:solidFill>
+                  <a:srgbClr val="1F1F1F"/>
+                </a:solidFill>
+                <a:latin typeface="Pretendard"/>
+              </a:rPr>
+              <a:t>A larger line when one statement needs weight</a:t>
+            </a:r>
+          </a:p>
+          <a:p>
+            <a:pPr marL="342900" indent="-342900">
+              <a:lnSpc>
+                <a:spcPct val="118000"/>
+              </a:lnSpc>
+              <a:spcBef>
+                <a:spcPts val="1400"/>
+              </a:spcBef>
+              <a:buClr>
+                <a:srgbClr val="00754A"/>
+              </a:buClr>
+              <a:buSzPct val="68000"/>
+              <a:buFont typeface="Arial"/>
+              <a:buChar char="●"/>
+            </a:pPr>
+            <a:r>
+              <a:rPr sz="2400" b="0" spc="-24">
+                <a:solidFill>
+                  <a:srgbClr val="6B6B6B"/>
+                </a:solidFill>
+                <a:latin typeface="Pretendard"/>
+              </a:rPr>
+              <a:t>secondary detail, one step down</a:t>
+            </a:r>
+          </a:p>
+          <a:p>
+            <a:pPr>
+              <a:lnSpc>
+                <a:spcPct val="55000"/>
+              </a:lnSpc>
+              <a:buNone/>
+            </a:pPr>
+          </a:p>
+          <a:p>
+            <a:pPr marL="342900" indent="-342900">
+              <a:lnSpc>
+                <a:spcPct val="118000"/>
+              </a:lnSpc>
+              <a:spcBef>
+                <a:spcPts val="1400"/>
+              </a:spcBef>
+              <a:buClr>
+                <a:srgbClr val="00754A"/>
+              </a:buClr>
+              <a:buSzPct val="68000"/>
+              <a:buFont typeface="Arial"/>
+              <a:buChar char="●"/>
+            </a:pPr>
+            <a:r>
+              <a:rPr sz="2800" b="0" spc="-28">
+                <a:solidFill>
+                  <a:srgbClr val="1F1F1F"/>
+                </a:solidFill>
+                <a:latin typeface="Pretendard"/>
+              </a:rPr>
+              <a:t>Closing point — </a:t>
+            </a:r>
+            <a:r>
+              <a:rPr sz="2800" b="1" spc="-28">
+                <a:solidFill>
+                  <a:srgbClr val="00754A"/>
+                </a:solidFill>
+                <a:latin typeface="Pretendard"/>
+              </a:rPr>
+              <a:t>the conclusion</a:t>
+            </a:r>
+            <a:r>
+              <a:rPr sz="2800" b="0" spc="-28">
+                <a:solidFill>
+                  <a:srgbClr val="1F1F1F"/>
+                </a:solidFill>
+                <a:latin typeface="Pretendard"/>
+              </a:rPr>
+              <a:t> in bold</a:t>
             </a:r>
           </a:p>
         </p:txBody>

--- a/backbone_slides.pptx
+++ b/backbone_slides.pptx
@@ -17,9 +17,9 @@
     <p:sldId id="265" r:id="rId11"/>
     <p:sldId id="266" r:id="rId12"/>
     <p:sldId id="267" r:id="rId13"/>
-    <p:sldId id="268" r:id="rId19"/>
-    <p:sldId id="269" r:id="rId20"/>
-    <p:sldId id="270" r:id="rId21"/>
+    <p:sldId id="268" r:id="rId14"/>
+    <p:sldId id="269" r:id="rId15"/>
+    <p:sldId id="270" r:id="rId16"/>
   </p:sldIdLst>
   <p:sldSz cx="12192000" cy="6858000"/>
   <p:notesSz cx="6858000" cy="9144000"/>
@@ -345,7 +345,7 @@
           <a:p>
             <a:fld id="{5BCAD085-E8A6-8845-BD4E-CB4CCA059FC4}" type="datetimeFigureOut">
               <a:rPr lang="en-US" smtClean="0"/>
-              <a:t>6/7/2026</a:t>
+              <a:t>6/9/2026</a:t>
             </a:fld>
             <a:endParaRPr lang="en-US"/>
           </a:p>
@@ -513,7 +513,7 @@
           <a:p>
             <a:fld id="{5BCAD085-E8A6-8845-BD4E-CB4CCA059FC4}" type="datetimeFigureOut">
               <a:rPr lang="en-US" smtClean="0"/>
-              <a:t>6/7/2026</a:t>
+              <a:t>6/9/2026</a:t>
             </a:fld>
             <a:endParaRPr lang="en-US"/>
           </a:p>
@@ -691,7 +691,7 @@
           <a:p>
             <a:fld id="{5BCAD085-E8A6-8845-BD4E-CB4CCA059FC4}" type="datetimeFigureOut">
               <a:rPr lang="en-US" smtClean="0"/>
-              <a:t>6/7/2026</a:t>
+              <a:t>6/9/2026</a:t>
             </a:fld>
             <a:endParaRPr lang="en-US"/>
           </a:p>
@@ -859,7 +859,7 @@
           <a:p>
             <a:fld id="{5BCAD085-E8A6-8845-BD4E-CB4CCA059FC4}" type="datetimeFigureOut">
               <a:rPr lang="en-US" smtClean="0"/>
-              <a:t>6/7/2026</a:t>
+              <a:t>6/9/2026</a:t>
             </a:fld>
             <a:endParaRPr lang="en-US"/>
           </a:p>
@@ -1104,7 +1104,7 @@
           <a:p>
             <a:fld id="{5BCAD085-E8A6-8845-BD4E-CB4CCA059FC4}" type="datetimeFigureOut">
               <a:rPr lang="en-US" smtClean="0"/>
-              <a:t>6/7/2026</a:t>
+              <a:t>6/9/2026</a:t>
             </a:fld>
             <a:endParaRPr lang="en-US"/>
           </a:p>
@@ -1389,7 +1389,7 @@
           <a:p>
             <a:fld id="{5BCAD085-E8A6-8845-BD4E-CB4CCA059FC4}" type="datetimeFigureOut">
               <a:rPr lang="en-US" smtClean="0"/>
-              <a:t>6/7/2026</a:t>
+              <a:t>6/9/2026</a:t>
             </a:fld>
             <a:endParaRPr lang="en-US"/>
           </a:p>
@@ -1808,7 +1808,7 @@
           <a:p>
             <a:fld id="{5BCAD085-E8A6-8845-BD4E-CB4CCA059FC4}" type="datetimeFigureOut">
               <a:rPr lang="en-US" smtClean="0"/>
-              <a:t>6/7/2026</a:t>
+              <a:t>6/9/2026</a:t>
             </a:fld>
             <a:endParaRPr lang="en-US"/>
           </a:p>
@@ -1925,7 +1925,7 @@
           <a:p>
             <a:fld id="{5BCAD085-E8A6-8845-BD4E-CB4CCA059FC4}" type="datetimeFigureOut">
               <a:rPr lang="en-US" smtClean="0"/>
-              <a:t>6/7/2026</a:t>
+              <a:t>6/9/2026</a:t>
             </a:fld>
             <a:endParaRPr lang="en-US"/>
           </a:p>
@@ -2020,7 +2020,7 @@
           <a:p>
             <a:fld id="{5BCAD085-E8A6-8845-BD4E-CB4CCA059FC4}" type="datetimeFigureOut">
               <a:rPr lang="en-US" smtClean="0"/>
-              <a:t>6/7/2026</a:t>
+              <a:t>6/9/2026</a:t>
             </a:fld>
             <a:endParaRPr lang="en-US"/>
           </a:p>
@@ -2295,7 +2295,7 @@
           <a:p>
             <a:fld id="{5BCAD085-E8A6-8845-BD4E-CB4CCA059FC4}" type="datetimeFigureOut">
               <a:rPr lang="en-US" smtClean="0"/>
-              <a:t>6/7/2026</a:t>
+              <a:t>6/9/2026</a:t>
             </a:fld>
             <a:endParaRPr lang="en-US"/>
           </a:p>
@@ -2547,7 +2547,7 @@
           <a:p>
             <a:fld id="{5BCAD085-E8A6-8845-BD4E-CB4CCA059FC4}" type="datetimeFigureOut">
               <a:rPr lang="en-US" smtClean="0"/>
-              <a:t>6/7/2026</a:t>
+              <a:t>6/9/2026</a:t>
             </a:fld>
             <a:endParaRPr lang="en-US"/>
           </a:p>
@@ -2758,7 +2758,7 @@
           <a:p>
             <a:fld id="{5BCAD085-E8A6-8845-BD4E-CB4CCA059FC4}" type="datetimeFigureOut">
               <a:rPr lang="en-US" smtClean="0"/>
-              <a:t>6/7/2026</a:t>
+              <a:t>6/9/2026</a:t>
             </a:fld>
             <a:endParaRPr lang="en-US"/>
           </a:p>
@@ -7293,7 +7293,7 @@
 </file>
 
 <file path=ppt/slides/slide13.xml><?xml version="1.0" encoding="utf-8"?>
-<p:sld xmlns:a="http://schemas.openxmlformats.org/drawingml/2006/main" xmlns:p="http://schemas.openxmlformats.org/presentationml/2006/main" xmlns:r="http://schemas.openxmlformats.org/officeDocument/2006/relationships">
+<p:sld xmlns:a="http://schemas.openxmlformats.org/drawingml/2006/main" xmlns:r="http://schemas.openxmlformats.org/officeDocument/2006/relationships" xmlns:p="http://schemas.openxmlformats.org/presentationml/2006/main">
   <p:cSld>
     <p:spTree>
       <p:nvGrpSpPr>
@@ -7301,7 +7301,14 @@
         <p:cNvGrpSpPr/>
         <p:nvPr/>
       </p:nvGrpSpPr>
-      <p:grpSpPr/>
+      <p:grpSpPr>
+        <a:xfrm>
+          <a:off x="0" y="0"/>
+          <a:ext cx="0" cy="0"/>
+          <a:chOff x="0" y="0"/>
+          <a:chExt cx="0" cy="0"/>
+        </a:xfrm>
+      </p:grpSpPr>
       <p:sp>
         <p:nvSpPr>
           <p:cNvPr id="2" name="TextBox 1"/>
@@ -7557,6 +7564,7 @@
           <a:lstStyle/>
           <a:p>
             <a:pPr algn="ctr"/>
+            <a:endParaRPr/>
           </a:p>
         </p:txBody>
       </p:sp>
@@ -7600,6 +7608,7 @@
           <a:lstStyle/>
           <a:p>
             <a:pPr algn="ctr"/>
+            <a:endParaRPr/>
           </a:p>
         </p:txBody>
       </p:sp>
@@ -7725,6 +7734,7 @@
           <a:lstStyle/>
           <a:p>
             <a:pPr algn="ctr"/>
+            <a:endParaRPr/>
           </a:p>
         </p:txBody>
       </p:sp>
@@ -7850,6 +7860,7 @@
           <a:lstStyle/>
           <a:p>
             <a:pPr algn="ctr"/>
+            <a:endParaRPr/>
           </a:p>
         </p:txBody>
       </p:sp>
@@ -7975,6 +7986,7 @@
           <a:lstStyle/>
           <a:p>
             <a:pPr algn="ctr"/>
+            <a:endParaRPr/>
           </a:p>
         </p:txBody>
       </p:sp>
@@ -8100,6 +8112,7 @@
           <a:lstStyle/>
           <a:p>
             <a:pPr algn="ctr"/>
+            <a:endParaRPr/>
           </a:p>
         </p:txBody>
       </p:sp>
@@ -8194,7 +8207,7 @@
 </file>
 
 <file path=ppt/slides/slide14.xml><?xml version="1.0" encoding="utf-8"?>
-<p:sld xmlns:a="http://schemas.openxmlformats.org/drawingml/2006/main" xmlns:p="http://schemas.openxmlformats.org/presentationml/2006/main" xmlns:r="http://schemas.openxmlformats.org/officeDocument/2006/relationships">
+<p:sld xmlns:a="http://schemas.openxmlformats.org/drawingml/2006/main" xmlns:r="http://schemas.openxmlformats.org/officeDocument/2006/relationships" xmlns:p="http://schemas.openxmlformats.org/presentationml/2006/main">
   <p:cSld>
     <p:spTree>
       <p:nvGrpSpPr>
@@ -8202,7 +8215,14 @@
         <p:cNvGrpSpPr/>
         <p:nvPr/>
       </p:nvGrpSpPr>
-      <p:grpSpPr/>
+      <p:grpSpPr>
+        <a:xfrm>
+          <a:off x="0" y="0"/>
+          <a:ext cx="0" cy="0"/>
+          <a:chOff x="0" y="0"/>
+          <a:chExt cx="0" cy="0"/>
+        </a:xfrm>
+      </p:grpSpPr>
       <p:sp>
         <p:nvSpPr>
           <p:cNvPr id="2" name="TextBox 1"/>
@@ -8458,6 +8478,7 @@
           <a:lstStyle/>
           <a:p>
             <a:pPr algn="ctr"/>
+            <a:endParaRPr/>
           </a:p>
         </p:txBody>
       </p:sp>
@@ -8571,6 +8592,7 @@
           <a:lstStyle/>
           <a:p>
             <a:pPr algn="ctr"/>
+            <a:endParaRPr/>
           </a:p>
         </p:txBody>
       </p:sp>
@@ -8684,6 +8706,7 @@
           <a:lstStyle/>
           <a:p>
             <a:pPr algn="ctr"/>
+            <a:endParaRPr/>
           </a:p>
         </p:txBody>
       </p:sp>
@@ -8797,6 +8820,7 @@
           <a:lstStyle/>
           <a:p>
             <a:pPr algn="ctr"/>
+            <a:endParaRPr/>
           </a:p>
         </p:txBody>
       </p:sp>
@@ -8910,6 +8934,7 @@
           <a:lstStyle/>
           <a:p>
             <a:pPr algn="ctr"/>
+            <a:endParaRPr/>
           </a:p>
         </p:txBody>
       </p:sp>
@@ -8953,6 +8978,7 @@
           <a:lstStyle/>
           <a:p>
             <a:pPr algn="ctr"/>
+            <a:endParaRPr/>
           </a:p>
         </p:txBody>
       </p:sp>
@@ -8996,6 +9022,7 @@
           <a:lstStyle/>
           <a:p>
             <a:pPr algn="ctr"/>
+            <a:endParaRPr/>
           </a:p>
         </p:txBody>
       </p:sp>
@@ -9039,6 +9066,7 @@
           <a:lstStyle/>
           <a:p>
             <a:pPr algn="ctr"/>
+            <a:endParaRPr/>
           </a:p>
         </p:txBody>
       </p:sp>
@@ -9082,6 +9110,7 @@
           <a:lstStyle/>
           <a:p>
             <a:pPr algn="ctr"/>
+            <a:endParaRPr/>
           </a:p>
         </p:txBody>
       </p:sp>
@@ -9141,7 +9170,7 @@
 </file>
 
 <file path=ppt/slides/slide15.xml><?xml version="1.0" encoding="utf-8"?>
-<p:sld xmlns:a="http://schemas.openxmlformats.org/drawingml/2006/main" xmlns:p="http://schemas.openxmlformats.org/presentationml/2006/main" xmlns:r="http://schemas.openxmlformats.org/officeDocument/2006/relationships">
+<p:sld xmlns:a="http://schemas.openxmlformats.org/drawingml/2006/main" xmlns:r="http://schemas.openxmlformats.org/officeDocument/2006/relationships" xmlns:p="http://schemas.openxmlformats.org/presentationml/2006/main">
   <p:cSld>
     <p:spTree>
       <p:nvGrpSpPr>
@@ -9149,7 +9178,14 @@
         <p:cNvGrpSpPr/>
         <p:nvPr/>
       </p:nvGrpSpPr>
-      <p:grpSpPr/>
+      <p:grpSpPr>
+        <a:xfrm>
+          <a:off x="0" y="0"/>
+          <a:ext cx="0" cy="0"/>
+          <a:chOff x="0" y="0"/>
+          <a:chExt cx="0" cy="0"/>
+        </a:xfrm>
+      </p:grpSpPr>
       <p:sp>
         <p:nvSpPr>
           <p:cNvPr id="2" name="TextBox 1"/>
@@ -9461,6 +9497,12 @@
               </a:lnSpc>
               <a:buNone/>
             </a:pPr>
+            <a:endParaRPr sz="2800" b="0" spc="-28">
+              <a:solidFill>
+                <a:srgbClr val="1F1F1F"/>
+              </a:solidFill>
+              <a:latin typeface="Pretendard"/>
+            </a:endParaRPr>
           </a:p>
           <a:p>
             <a:pPr marL="342900" indent="-342900">
@@ -9519,6 +9561,12 @@
               </a:lnSpc>
               <a:buNone/>
             </a:pPr>
+            <a:endParaRPr sz="2400" b="0" spc="-24">
+              <a:solidFill>
+                <a:srgbClr val="6B6B6B"/>
+              </a:solidFill>
+              <a:latin typeface="Pretendard"/>
+            </a:endParaRPr>
           </a:p>
           <a:p>
             <a:pPr marL="342900" indent="-342900">
@@ -13699,251 +13747,6 @@
       </p:sp>
       <p:sp>
         <p:nvSpPr>
-          <p:cNvPr id="7" name="TextBox 6"/>
-          <p:cNvSpPr txBox="1"/>
-          <p:nvPr/>
-        </p:nvSpPr>
-        <p:spPr>
-          <a:xfrm>
-            <a:off x="617220" y="1645920"/>
-            <a:ext cx="5867732" cy="548640"/>
-          </a:xfrm>
-          <a:prstGeom prst="rect">
-            <a:avLst/>
-          </a:prstGeom>
-          <a:noFill/>
-        </p:spPr>
-        <p:txBody>
-          <a:bodyPr wrap="square" lIns="0" tIns="0" rIns="0" bIns="0" anchor="t">
-            <a:spAutoFit/>
-          </a:bodyPr>
-          <a:lstStyle/>
-          <a:p>
-            <a:pPr algn="l"/>
-            <a:r>
-              <a:rPr sz="2600" b="1" i="0" spc="-26">
-                <a:solidFill>
-                  <a:srgbClr val="161616"/>
-                </a:solidFill>
-                <a:latin typeface="Pretendard"/>
-              </a:rPr>
-              <a:t>Headline claim — the punchline</a:t>
-            </a:r>
-          </a:p>
-        </p:txBody>
-      </p:sp>
-      <p:sp>
-        <p:nvSpPr>
-          <p:cNvPr id="8" name="TextBox 7"/>
-          <p:cNvSpPr txBox="1"/>
-          <p:nvPr/>
-        </p:nvSpPr>
-        <p:spPr>
-          <a:xfrm>
-            <a:off x="617220" y="2331720"/>
-            <a:ext cx="274320" cy="274320"/>
-          </a:xfrm>
-          <a:prstGeom prst="rect">
-            <a:avLst/>
-          </a:prstGeom>
-          <a:noFill/>
-        </p:spPr>
-        <p:txBody>
-          <a:bodyPr wrap="square" lIns="0" tIns="0" rIns="0" bIns="0" anchor="t">
-            <a:spAutoFit/>
-          </a:bodyPr>
-          <a:lstStyle/>
-          <a:p>
-            <a:pPr algn="l"/>
-            <a:r>
-              <a:rPr sz="1500" b="1" i="0" spc="-15">
-                <a:solidFill>
-                  <a:srgbClr val="00754A"/>
-                </a:solidFill>
-                <a:latin typeface="Pretendard"/>
-              </a:rPr>
-              <a:t>●</a:t>
-            </a:r>
-          </a:p>
-        </p:txBody>
-      </p:sp>
-      <p:sp>
-        <p:nvSpPr>
-          <p:cNvPr id="9" name="TextBox 8"/>
-          <p:cNvSpPr txBox="1"/>
-          <p:nvPr/>
-        </p:nvSpPr>
-        <p:spPr>
-          <a:xfrm>
-            <a:off x="937259" y="2331720"/>
-            <a:ext cx="5547692" cy="365760"/>
-          </a:xfrm>
-          <a:prstGeom prst="rect">
-            <a:avLst/>
-          </a:prstGeom>
-          <a:noFill/>
-        </p:spPr>
-        <p:txBody>
-          <a:bodyPr wrap="square" lIns="0" tIns="0" rIns="0" bIns="0" anchor="t">
-            <a:spAutoFit/>
-          </a:bodyPr>
-          <a:lstStyle/>
-          <a:p>
-            <a:pPr algn="l"/>
-            <a:r>
-              <a:rPr sz="1800" b="0" i="0" spc="-18">
-                <a:solidFill>
-                  <a:srgbClr val="1F1F1F"/>
-                </a:solidFill>
-                <a:latin typeface="Pretendard"/>
-              </a:rPr>
-              <a:t>First supporting point with concise wording.</a:t>
-            </a:r>
-          </a:p>
-        </p:txBody>
-      </p:sp>
-      <p:sp>
-        <p:nvSpPr>
-          <p:cNvPr id="10" name="TextBox 9"/>
-          <p:cNvSpPr txBox="1"/>
-          <p:nvPr/>
-        </p:nvSpPr>
-        <p:spPr>
-          <a:xfrm>
-            <a:off x="617220" y="2834639"/>
-            <a:ext cx="274320" cy="274320"/>
-          </a:xfrm>
-          <a:prstGeom prst="rect">
-            <a:avLst/>
-          </a:prstGeom>
-          <a:noFill/>
-        </p:spPr>
-        <p:txBody>
-          <a:bodyPr wrap="square" lIns="0" tIns="0" rIns="0" bIns="0" anchor="t">
-            <a:spAutoFit/>
-          </a:bodyPr>
-          <a:lstStyle/>
-          <a:p>
-            <a:pPr algn="l"/>
-            <a:r>
-              <a:rPr sz="1500" b="1" i="0" spc="-15">
-                <a:solidFill>
-                  <a:srgbClr val="00754A"/>
-                </a:solidFill>
-                <a:latin typeface="Pretendard"/>
-              </a:rPr>
-              <a:t>●</a:t>
-            </a:r>
-          </a:p>
-        </p:txBody>
-      </p:sp>
-      <p:sp>
-        <p:nvSpPr>
-          <p:cNvPr id="11" name="TextBox 10"/>
-          <p:cNvSpPr txBox="1"/>
-          <p:nvPr/>
-        </p:nvSpPr>
-        <p:spPr>
-          <a:xfrm>
-            <a:off x="937259" y="2834639"/>
-            <a:ext cx="5547692" cy="365760"/>
-          </a:xfrm>
-          <a:prstGeom prst="rect">
-            <a:avLst/>
-          </a:prstGeom>
-          <a:noFill/>
-        </p:spPr>
-        <p:txBody>
-          <a:bodyPr wrap="square" lIns="0" tIns="0" rIns="0" bIns="0" anchor="t">
-            <a:spAutoFit/>
-          </a:bodyPr>
-          <a:lstStyle/>
-          <a:p>
-            <a:pPr algn="l"/>
-            <a:r>
-              <a:rPr sz="1800" b="0" i="0" spc="-18">
-                <a:solidFill>
-                  <a:srgbClr val="1F1F1F"/>
-                </a:solidFill>
-                <a:latin typeface="Pretendard"/>
-              </a:rPr>
-              <a:t>Second supporting point with concrete numbers.</a:t>
-            </a:r>
-          </a:p>
-        </p:txBody>
-      </p:sp>
-      <p:sp>
-        <p:nvSpPr>
-          <p:cNvPr id="12" name="TextBox 11"/>
-          <p:cNvSpPr txBox="1"/>
-          <p:nvPr/>
-        </p:nvSpPr>
-        <p:spPr>
-          <a:xfrm>
-            <a:off x="617220" y="3337559"/>
-            <a:ext cx="274320" cy="274320"/>
-          </a:xfrm>
-          <a:prstGeom prst="rect">
-            <a:avLst/>
-          </a:prstGeom>
-          <a:noFill/>
-        </p:spPr>
-        <p:txBody>
-          <a:bodyPr wrap="square" lIns="0" tIns="0" rIns="0" bIns="0" anchor="t">
-            <a:spAutoFit/>
-          </a:bodyPr>
-          <a:lstStyle/>
-          <a:p>
-            <a:pPr algn="l"/>
-            <a:r>
-              <a:rPr sz="1500" b="1" i="0" spc="-15">
-                <a:solidFill>
-                  <a:srgbClr val="00754A"/>
-                </a:solidFill>
-                <a:latin typeface="Pretendard"/>
-              </a:rPr>
-              <a:t>●</a:t>
-            </a:r>
-          </a:p>
-        </p:txBody>
-      </p:sp>
-      <p:sp>
-        <p:nvSpPr>
-          <p:cNvPr id="13" name="TextBox 12"/>
-          <p:cNvSpPr txBox="1"/>
-          <p:nvPr/>
-        </p:nvSpPr>
-        <p:spPr>
-          <a:xfrm>
-            <a:off x="937259" y="3337559"/>
-            <a:ext cx="5547692" cy="365760"/>
-          </a:xfrm>
-          <a:prstGeom prst="rect">
-            <a:avLst/>
-          </a:prstGeom>
-          <a:noFill/>
-        </p:spPr>
-        <p:txBody>
-          <a:bodyPr wrap="square" lIns="0" tIns="0" rIns="0" bIns="0" anchor="t">
-            <a:spAutoFit/>
-          </a:bodyPr>
-          <a:lstStyle/>
-          <a:p>
-            <a:pPr algn="l"/>
-            <a:r>
-              <a:rPr sz="1800" b="0" i="0" spc="-18">
-                <a:solidFill>
-                  <a:srgbClr val="1F1F1F"/>
-                </a:solidFill>
-                <a:latin typeface="Pretendard"/>
-              </a:rPr>
-              <a:t>Third supporting point with clinical relevance.</a:t>
-            </a:r>
-          </a:p>
-        </p:txBody>
-      </p:sp>
-      <p:sp>
-        <p:nvSpPr>
           <p:cNvPr id="14" name="Rounded Rectangle 13"/>
           <p:cNvSpPr/>
           <p:nvPr/>
@@ -14363,6 +14166,242 @@
                 <a:latin typeface="Pretendard"/>
               </a:rPr>
               <a:t>Source: study cohort  ·  n = NN</a:t>
+            </a:r>
+          </a:p>
+        </p:txBody>
+      </p:sp>
+      <p:sp>
+        <p:nvSpPr>
+          <p:cNvPr id="25" name="TextBox 24"/>
+          <p:cNvSpPr txBox="1"/>
+          <p:nvPr/>
+        </p:nvSpPr>
+        <p:spPr>
+          <a:xfrm>
+            <a:off x="621792" y="1645920"/>
+            <a:ext cx="5870448" cy="3246120"/>
+          </a:xfrm>
+          <a:prstGeom prst="rect">
+            <a:avLst/>
+          </a:prstGeom>
+          <a:noFill/>
+        </p:spPr>
+        <p:txBody>
+          <a:bodyPr wrap="square">
+            <a:noAutofit/>
+          </a:bodyPr>
+          <a:lstStyle/>
+          <a:p>
+            <a:pPr>
+              <a:lnSpc>
+                <a:spcPct val="110000"/>
+              </a:lnSpc>
+              <a:spcBef>
+                <a:spcPts val="0"/>
+              </a:spcBef>
+              <a:buNone/>
+            </a:pPr>
+            <a:r>
+              <a:rPr sz="2600" b="1" spc="-26">
+                <a:solidFill>
+                  <a:srgbClr val="1F1F1F"/>
+                </a:solidFill>
+                <a:latin typeface="Pretendard"/>
+              </a:rPr>
+              <a:t>Headline claim — the punchline</a:t>
+            </a:r>
+          </a:p>
+          <a:p>
+            <a:pPr marL="320040" indent="-320040">
+              <a:lnSpc>
+                <a:spcPct val="112000"/>
+              </a:lnSpc>
+              <a:spcBef>
+                <a:spcPts val="1200"/>
+              </a:spcBef>
+              <a:buClr>
+                <a:srgbClr val="00754A"/>
+              </a:buClr>
+              <a:buSzPct val="68000"/>
+              <a:buFont typeface="Arial"/>
+              <a:buChar char="●"/>
+            </a:pPr>
+            <a:r>
+              <a:rPr sz="1800" b="0" spc="-18">
+                <a:solidFill>
+                  <a:srgbClr val="1F1F1F"/>
+                </a:solidFill>
+                <a:latin typeface="Pretendard"/>
+              </a:rPr>
+              <a:t>First supporting point with concise wording.</a:t>
+            </a:r>
+          </a:p>
+          <a:p>
+            <a:pPr marL="320040" indent="-320040">
+              <a:lnSpc>
+                <a:spcPct val="112000"/>
+              </a:lnSpc>
+              <a:spcBef>
+                <a:spcPts val="1200"/>
+              </a:spcBef>
+              <a:buClr>
+                <a:srgbClr val="00754A"/>
+              </a:buClr>
+              <a:buSzPct val="68000"/>
+              <a:buFont typeface="Arial"/>
+              <a:buChar char="●"/>
+            </a:pPr>
+            <a:r>
+              <a:rPr sz="1800" b="0" spc="-18">
+                <a:solidFill>
+                  <a:srgbClr val="1F1F1F"/>
+                </a:solidFill>
+                <a:latin typeface="Pretendard"/>
+              </a:rPr>
+              <a:t>Second supporting point with concrete numbers.</a:t>
+            </a:r>
+          </a:p>
+          <a:p>
+            <a:pPr marL="320040" indent="-320040">
+              <a:lnSpc>
+                <a:spcPct val="112000"/>
+              </a:lnSpc>
+              <a:spcBef>
+                <a:spcPts val="1200"/>
+              </a:spcBef>
+              <a:buClr>
+                <a:srgbClr val="00754A"/>
+              </a:buClr>
+              <a:buSzPct val="68000"/>
+              <a:buFont typeface="Arial"/>
+              <a:buChar char="●"/>
+            </a:pPr>
+            <a:r>
+              <a:rPr sz="1800" b="0" spc="-18">
+                <a:solidFill>
+                  <a:srgbClr val="1F1F1F"/>
+                </a:solidFill>
+                <a:latin typeface="Pretendard"/>
+              </a:rPr>
+              <a:t>Third supporting point with clinical relevance.</a:t>
+            </a:r>
+          </a:p>
+        </p:txBody>
+      </p:sp>
+      <p:sp>
+        <p:nvSpPr>
+          <p:cNvPr id="5" name="TextBox 4"/>
+          <p:cNvSpPr txBox="1"/>
+          <p:nvPr/>
+        </p:nvSpPr>
+        <p:spPr>
+          <a:xfrm>
+            <a:off x="621792" y="1645920"/>
+            <a:ext cx="5870448" cy="3246120"/>
+          </a:xfrm>
+          <a:prstGeom prst="rect">
+            <a:avLst/>
+          </a:prstGeom>
+          <a:noFill/>
+        </p:spPr>
+        <p:txBody>
+          <a:bodyPr wrap="square">
+            <a:noAutofit/>
+          </a:bodyPr>
+          <a:lstStyle/>
+          <a:p>
+            <a:pPr>
+              <a:lnSpc>
+                <a:spcPct val="110000"/>
+              </a:lnSpc>
+              <a:spcBef>
+                <a:spcPts val="0"/>
+              </a:spcBef>
+              <a:buNone/>
+            </a:pPr>
+            <a:r>
+              <a:rPr sz="2600" b="1" spc="-26" dirty="0">
+                <a:solidFill>
+                  <a:srgbClr val="1F1F1F"/>
+                </a:solidFill>
+                <a:latin typeface="Pretendard"/>
+              </a:rPr>
+              <a:t>Headline claim — the punchline</a:t>
+            </a:r>
+          </a:p>
+          <a:p>
+            <a:pPr marL="320040" indent="-320040">
+              <a:lnSpc>
+                <a:spcPct val="112000"/>
+              </a:lnSpc>
+              <a:spcBef>
+                <a:spcPts val="1200"/>
+              </a:spcBef>
+              <a:buClr>
+                <a:srgbClr val="00754A"/>
+              </a:buClr>
+              <a:buSzPct val="68000"/>
+              <a:buFont typeface="Arial"/>
+              <a:buChar char="●"/>
+            </a:pPr>
+            <a:r>
+              <a:rPr sz="1800" b="0" spc="-18" dirty="0">
+                <a:solidFill>
+                  <a:srgbClr val="1F1F1F"/>
+                </a:solidFill>
+                <a:latin typeface="Pretendard"/>
+              </a:rPr>
+              <a:t>First supporting point with concise wording.</a:t>
+            </a:r>
+          </a:p>
+          <a:p>
+            <a:pPr marL="320040" indent="-320040">
+              <a:lnSpc>
+                <a:spcPct val="112000"/>
+              </a:lnSpc>
+              <a:spcBef>
+                <a:spcPts val="1200"/>
+              </a:spcBef>
+              <a:buClr>
+                <a:srgbClr val="00754A"/>
+              </a:buClr>
+              <a:buSzPct val="68000"/>
+              <a:buFont typeface="Arial"/>
+              <a:buChar char="●"/>
+            </a:pPr>
+            <a:r>
+              <a:rPr sz="1800" b="0" spc="-18" dirty="0">
+                <a:solidFill>
+                  <a:srgbClr val="1F1F1F"/>
+                </a:solidFill>
+                <a:latin typeface="Pretendard"/>
+              </a:rPr>
+              <a:t>Second supporting point with concrete numbers.</a:t>
+            </a:r>
+          </a:p>
+          <a:p>
+            <a:pPr marL="320040" indent="-320040">
+              <a:lnSpc>
+                <a:spcPct val="112000"/>
+              </a:lnSpc>
+              <a:spcBef>
+                <a:spcPts val="1200"/>
+              </a:spcBef>
+              <a:buClr>
+                <a:srgbClr val="00754A"/>
+              </a:buClr>
+              <a:buSzPct val="68000"/>
+              <a:buFont typeface="Arial"/>
+              <a:buChar char="●"/>
+            </a:pPr>
+            <a:r>
+              <a:rPr sz="1800" b="0" spc="-18" dirty="0">
+                <a:solidFill>
+                  <a:srgbClr val="1F1F1F"/>
+                </a:solidFill>
+                <a:latin typeface="Pretendard"/>
+              </a:rPr>
+              <a:t>Third supporting point with clinical relevance.</a:t>
             </a:r>
           </a:p>
         </p:txBody>

--- a/backbone_slides.pptx
+++ b/backbone_slides.pptx
@@ -16,10 +16,10 @@
     <p:sldId id="264" r:id="rId10"/>
     <p:sldId id="265" r:id="rId11"/>
     <p:sldId id="266" r:id="rId12"/>
-    <p:sldId id="267" r:id="rId13"/>
     <p:sldId id="268" r:id="rId14"/>
     <p:sldId id="269" r:id="rId15"/>
     <p:sldId id="270" r:id="rId16"/>
+    <p:sldId id="267" r:id="rId13"/>
   </p:sldIdLst>
   <p:sldSz cx="12192000" cy="6858000"/>
   <p:notesSz cx="6858000" cy="9144000"/>
@@ -6926,14 +6926,6 @@
 <file path=ppt/slides/slide12.xml><?xml version="1.0" encoding="utf-8"?>
 <p:sld xmlns:a="http://schemas.openxmlformats.org/drawingml/2006/main" xmlns:r="http://schemas.openxmlformats.org/officeDocument/2006/relationships" xmlns:p="http://schemas.openxmlformats.org/presentationml/2006/main">
   <p:cSld>
-    <p:bg>
-      <p:bgPr>
-        <a:solidFill>
-          <a:srgbClr val="F2F0EB"/>
-        </a:solidFill>
-        <a:effectLst/>
-      </p:bgPr>
-    </p:bg>
     <p:spTree>
       <p:nvGrpSpPr>
         <p:cNvPr id="1" name=""/>
@@ -6950,95 +6942,42 @@
       </p:grpSpPr>
       <p:sp>
         <p:nvSpPr>
-          <p:cNvPr id="2" name="Rectangle 1"/>
-          <p:cNvSpPr/>
-          <p:nvPr/>
-        </p:nvSpPr>
-        <p:spPr>
-          <a:xfrm>
-            <a:off x="0" y="0"/>
-            <a:ext cx="64008" cy="6858000"/>
-          </a:xfrm>
-          <a:prstGeom prst="rect">
-            <a:avLst/>
-          </a:prstGeom>
-          <a:solidFill>
-            <a:srgbClr val="00754A"/>
-          </a:solidFill>
-          <a:ln>
-            <a:noFill/>
-          </a:ln>
-        </p:spPr>
-        <p:style>
-          <a:lnRef idx="1">
-            <a:schemeClr val="accent1"/>
-          </a:lnRef>
-          <a:fillRef idx="3">
-            <a:schemeClr val="accent1"/>
-          </a:fillRef>
-          <a:effectRef idx="0">
-            <a:schemeClr val="accent1"/>
-          </a:effectRef>
-          <a:fontRef idx="minor">
-            <a:schemeClr val="lt1"/>
-          </a:fontRef>
-        </p:style>
-        <p:txBody>
-          <a:bodyPr rtlCol="0" anchor="ctr"/>
-          <a:lstStyle/>
-          <a:p>
-            <a:pPr algn="ctr"/>
-            <a:endParaRPr/>
-          </a:p>
-        </p:txBody>
-      </p:sp>
-      <p:sp>
-        <p:nvSpPr>
-          <p:cNvPr id="3" name="Rectangle 2"/>
-          <p:cNvSpPr/>
-          <p:nvPr/>
-        </p:nvSpPr>
-        <p:spPr>
-          <a:xfrm>
-            <a:off x="6688836" y="0"/>
-            <a:ext cx="5472684" cy="6858000"/>
-          </a:xfrm>
-          <a:prstGeom prst="rect">
-            <a:avLst/>
-          </a:prstGeom>
-          <a:solidFill>
-            <a:srgbClr val="F2F0EB"/>
-          </a:solidFill>
-          <a:ln>
-            <a:noFill/>
-          </a:ln>
-        </p:spPr>
-        <p:style>
-          <a:lnRef idx="1">
-            <a:schemeClr val="accent1"/>
-          </a:lnRef>
-          <a:fillRef idx="3">
-            <a:schemeClr val="accent1"/>
-          </a:fillRef>
-          <a:effectRef idx="0">
-            <a:schemeClr val="accent1"/>
-          </a:effectRef>
-          <a:fontRef idx="minor">
-            <a:schemeClr val="lt1"/>
-          </a:fontRef>
-        </p:style>
-        <p:txBody>
-          <a:bodyPr rtlCol="0" anchor="ctr"/>
-          <a:lstStyle/>
-          <a:p>
-            <a:pPr algn="ctr"/>
-            <a:endParaRPr/>
+          <p:cNvPr id="2" name="TextBox 1"/>
+          <p:cNvSpPr txBox="1"/>
+          <p:nvPr/>
+        </p:nvSpPr>
+        <p:spPr>
+          <a:xfrm>
+            <a:off x="138257" y="123444"/>
+            <a:ext cx="5486400" cy="256032"/>
+          </a:xfrm>
+          <a:prstGeom prst="rect">
+            <a:avLst/>
+          </a:prstGeom>
+          <a:noFill/>
+        </p:spPr>
+        <p:txBody>
+          <a:bodyPr wrap="square" lIns="0" tIns="0" rIns="0" bIns="0" anchor="t">
+            <a:spAutoFit/>
+          </a:bodyPr>
+          <a:lstStyle/>
+          <a:p>
+            <a:pPr algn="l"/>
+            <a:r>
+              <a:rPr sz="1300" b="1" i="0" spc="-13">
+                <a:solidFill>
+                  <a:srgbClr val="8E8E93"/>
+                </a:solidFill>
+                <a:latin typeface="Pretendard"/>
+              </a:rPr>
+              <a:t>PATTERN J</a:t>
+            </a:r>
           </a:p>
         </p:txBody>
       </p:sp>
       <p:pic>
         <p:nvPicPr>
-          <p:cNvPr id="4" name="Picture 3" descr="logo.png"/>
+          <p:cNvPr id="3" name="Picture 2" descr="logo.png"/>
           <p:cNvPicPr>
             <a:picLocks noChangeAspect="1"/>
           </p:cNvPicPr>
@@ -7063,14 +7002,14 @@
       </p:pic>
       <p:sp>
         <p:nvSpPr>
-          <p:cNvPr id="5" name="TextBox 4"/>
-          <p:cNvSpPr txBox="1"/>
-          <p:nvPr/>
-        </p:nvSpPr>
-        <p:spPr>
-          <a:xfrm>
-            <a:off x="548640" y="2286000"/>
-            <a:ext cx="8229600" cy="1463040"/>
+          <p:cNvPr id="4" name="TextBox 3"/>
+          <p:cNvSpPr txBox="1"/>
+          <p:nvPr/>
+        </p:nvSpPr>
+        <p:spPr>
+          <a:xfrm>
+            <a:off x="251460" y="436260"/>
+            <a:ext cx="10972800" cy="457200"/>
           </a:xfrm>
           <a:prstGeom prst="rect">
             <a:avLst/>
@@ -7085,31 +7024,77 @@
           <a:p>
             <a:pPr algn="l">
               <a:lnSpc>
-                <a:spcPct val="110000"/>
+                <a:spcPct val="120000"/>
               </a:lnSpc>
             </a:pPr>
             <a:r>
-              <a:rPr sz="7200" b="1" i="0" spc="-72">
+              <a:rPr sz="3200" b="1" i="0" spc="-32">
                 <a:solidFill>
                   <a:srgbClr val="006241"/>
                 </a:solidFill>
                 <a:latin typeface="Pretendard"/>
               </a:rPr>
-              <a:t>Thank you</a:t>
-            </a:r>
-          </a:p>
-        </p:txBody>
-      </p:sp>
-      <p:sp>
-        <p:nvSpPr>
-          <p:cNvPr id="6" name="TextBox 5"/>
-          <p:cNvSpPr txBox="1"/>
-          <p:nvPr/>
-        </p:nvSpPr>
-        <p:spPr>
-          <a:xfrm>
-            <a:off x="548640" y="3931920"/>
-            <a:ext cx="8229600" cy="365760"/>
+              <a:t>Timeline — Milestone Track</a:t>
+            </a:r>
+          </a:p>
+        </p:txBody>
+      </p:sp>
+      <p:sp>
+        <p:nvSpPr>
+          <p:cNvPr id="6" name="Rounded Rectangle 5"/>
+          <p:cNvSpPr/>
+          <p:nvPr/>
+        </p:nvSpPr>
+        <p:spPr>
+          <a:xfrm>
+            <a:off x="251642" y="1290309"/>
+            <a:ext cx="11699382" cy="5227350"/>
+          </a:xfrm>
+          <a:prstGeom prst="roundRect">
+            <a:avLst>
+              <a:gd name="adj" fmla="val 2099"/>
+            </a:avLst>
+          </a:prstGeom>
+          <a:solidFill>
+            <a:srgbClr val="FFFFFF"/>
+          </a:solidFill>
+          <a:ln>
+            <a:noFill/>
+          </a:ln>
+        </p:spPr>
+        <p:style>
+          <a:lnRef idx="1">
+            <a:schemeClr val="accent1"/>
+          </a:lnRef>
+          <a:fillRef idx="3">
+            <a:schemeClr val="accent1"/>
+          </a:fillRef>
+          <a:effectRef idx="0">
+            <a:schemeClr val="accent1"/>
+          </a:effectRef>
+          <a:fontRef idx="minor">
+            <a:schemeClr val="lt1"/>
+          </a:fontRef>
+        </p:style>
+        <p:txBody>
+          <a:bodyPr rtlCol="0" anchor="ctr"/>
+          <a:lstStyle/>
+          <a:p>
+            <a:pPr algn="ctr"/>
+            <a:endParaRPr/>
+          </a:p>
+        </p:txBody>
+      </p:sp>
+      <p:sp>
+        <p:nvSpPr>
+          <p:cNvPr id="35" name="TextBox 34"/>
+          <p:cNvSpPr txBox="1"/>
+          <p:nvPr/>
+        </p:nvSpPr>
+        <p:spPr>
+          <a:xfrm>
+            <a:off x="138257" y="6620256"/>
+            <a:ext cx="548640" cy="228600"/>
           </a:xfrm>
           <a:prstGeom prst="rect">
             <a:avLst/>
@@ -7124,27 +7109,62 @@
           <a:p>
             <a:pPr algn="l"/>
             <a:r>
-              <a:rPr sz="2000" b="0" i="1" spc="-20">
-                <a:solidFill>
-                  <a:srgbClr val="6B6B6B"/>
-                </a:solidFill>
-                <a:latin typeface="Pretendard"/>
-              </a:rPr>
-              <a:t>Questions and discussion</a:t>
-            </a:r>
-          </a:p>
-        </p:txBody>
-      </p:sp>
-      <p:sp>
-        <p:nvSpPr>
-          <p:cNvPr id="7" name="Rectangle 6"/>
+              <a:rPr sz="1100" b="0" i="0" spc="-11">
+                <a:solidFill>
+                  <a:srgbClr val="8E8E93"/>
+                </a:solidFill>
+                <a:latin typeface="Pretendard"/>
+              </a:rPr>
+              <a:t>12</a:t>
+            </a:r>
+          </a:p>
+        </p:txBody>
+      </p:sp>
+      <p:sp>
+        <p:nvSpPr>
+          <p:cNvPr id="36" name="TextBox 35"/>
+          <p:cNvSpPr txBox="1"/>
+          <p:nvPr/>
+        </p:nvSpPr>
+        <p:spPr>
+          <a:xfrm>
+            <a:off x="6567403" y="6617421"/>
+            <a:ext cx="5486400" cy="228600"/>
+          </a:xfrm>
+          <a:prstGeom prst="rect">
+            <a:avLst/>
+          </a:prstGeom>
+          <a:noFill/>
+        </p:spPr>
+        <p:txBody>
+          <a:bodyPr wrap="square" lIns="0" tIns="0" rIns="0" bIns="0" anchor="t">
+            <a:spAutoFit/>
+          </a:bodyPr>
+          <a:lstStyle/>
+          <a:p>
+            <a:pPr algn="r"/>
+            <a:r>
+              <a:rPr sz="1200" b="0" i="0" spc="-12">
+                <a:solidFill>
+                  <a:srgbClr val="8E8E93"/>
+                </a:solidFill>
+                <a:latin typeface="Pretendard"/>
+              </a:rPr>
+              <a:t>Source: study cohort  ·  n = NN</a:t>
+            </a:r>
+          </a:p>
+        </p:txBody>
+      </p:sp>
+      <p:sp>
+        <p:nvSpPr>
+          <p:cNvPr id="37" name="Rectangle 36"/>
           <p:cNvSpPr/>
           <p:nvPr/>
         </p:nvSpPr>
         <p:spPr>
           <a:xfrm>
-            <a:off x="548640" y="4572000"/>
-            <a:ext cx="1645920" cy="36576"/>
+            <a:off x="1554480" y="3310128"/>
+            <a:ext cx="9052560" cy="32004"/>
           </a:xfrm>
           <a:prstGeom prst="rect">
             <a:avLst/>
@@ -7181,105 +7201,630 @@
       </p:sp>
       <p:sp>
         <p:nvSpPr>
-          <p:cNvPr id="8" name="TextBox 7"/>
-          <p:cNvSpPr txBox="1"/>
-          <p:nvPr/>
-        </p:nvSpPr>
-        <p:spPr>
-          <a:xfrm>
-            <a:off x="6866503" y="5102352"/>
-            <a:ext cx="4572000" cy="310896"/>
-          </a:xfrm>
-          <a:prstGeom prst="rect">
-            <a:avLst/>
-          </a:prstGeom>
-          <a:noFill/>
-        </p:spPr>
-        <p:txBody>
-          <a:bodyPr wrap="square" lIns="0" tIns="0" rIns="0" bIns="0" anchor="t">
-            <a:spAutoFit/>
-          </a:bodyPr>
-          <a:lstStyle/>
-          <a:p>
-            <a:pPr algn="r"/>
-            <a:r>
-              <a:rPr sz="1500" b="0" i="0" spc="-15">
-                <a:solidFill>
-                  <a:srgbClr val="6B6B6B"/>
-                </a:solidFill>
-                <a:latin typeface="Pretendard"/>
-              </a:rPr>
-              <a:t>Seoul National Univ. Bundang Hospital</a:t>
-            </a:r>
-          </a:p>
-        </p:txBody>
-      </p:sp>
-      <p:sp>
-        <p:nvSpPr>
-          <p:cNvPr id="9" name="TextBox 8"/>
-          <p:cNvSpPr txBox="1"/>
-          <p:nvPr/>
-        </p:nvSpPr>
-        <p:spPr>
-          <a:xfrm>
-            <a:off x="6866503" y="5477621"/>
-            <a:ext cx="4572000" cy="411480"/>
-          </a:xfrm>
-          <a:prstGeom prst="rect">
-            <a:avLst/>
-          </a:prstGeom>
-          <a:noFill/>
-        </p:spPr>
-        <p:txBody>
-          <a:bodyPr wrap="square" lIns="0" tIns="0" rIns="0" bIns="0" anchor="t">
-            <a:spAutoFit/>
-          </a:bodyPr>
-          <a:lstStyle/>
-          <a:p>
-            <a:pPr algn="r"/>
-            <a:r>
-              <a:rPr sz="2200" b="1" i="0" spc="-22">
+          <p:cNvPr id="38" name="Oval 37"/>
+          <p:cNvSpPr/>
+          <p:nvPr/>
+        </p:nvSpPr>
+        <p:spPr>
+          <a:xfrm>
+            <a:off x="1453895" y="3259836"/>
+            <a:ext cx="201168" cy="201168"/>
+          </a:xfrm>
+          <a:prstGeom prst="ellipse">
+            <a:avLst/>
+          </a:prstGeom>
+          <a:solidFill>
+            <a:srgbClr val="00754A"/>
+          </a:solidFill>
+          <a:ln>
+            <a:noFill/>
+          </a:ln>
+        </p:spPr>
+        <p:style>
+          <a:lnRef idx="1">
+            <a:schemeClr val="accent1"/>
+          </a:lnRef>
+          <a:fillRef idx="3">
+            <a:schemeClr val="accent1"/>
+          </a:fillRef>
+          <a:effectRef idx="0">
+            <a:schemeClr val="accent1"/>
+          </a:effectRef>
+          <a:fontRef idx="minor">
+            <a:schemeClr val="lt1"/>
+          </a:fontRef>
+        </p:style>
+        <p:txBody>
+          <a:bodyPr rtlCol="0" anchor="ctr"/>
+          <a:lstStyle/>
+          <a:p>
+            <a:pPr algn="ctr"/>
+            <a:endParaRPr/>
+          </a:p>
+        </p:txBody>
+      </p:sp>
+      <p:sp>
+        <p:nvSpPr>
+          <p:cNvPr id="39" name="TextBox 38"/>
+          <p:cNvSpPr txBox="1"/>
+          <p:nvPr/>
+        </p:nvSpPr>
+        <p:spPr>
+          <a:xfrm>
+            <a:off x="548639" y="2697480"/>
+            <a:ext cx="2011680" cy="365760"/>
+          </a:xfrm>
+          <a:prstGeom prst="rect">
+            <a:avLst/>
+          </a:prstGeom>
+          <a:noFill/>
+        </p:spPr>
+        <p:txBody>
+          <a:bodyPr wrap="square">
+            <a:spAutoFit/>
+          </a:bodyPr>
+          <a:lstStyle/>
+          <a:p>
+            <a:pPr algn="ctr"/>
+            <a:r>
+              <a:rPr sz="2200" b="1" spc="-22">
+                <a:solidFill>
+                  <a:srgbClr val="006241"/>
+                </a:solidFill>
+                <a:latin typeface="Pretendard"/>
+              </a:rPr>
+              <a:t>2018</a:t>
+            </a:r>
+          </a:p>
+        </p:txBody>
+      </p:sp>
+      <p:sp>
+        <p:nvSpPr>
+          <p:cNvPr id="40" name="TextBox 39"/>
+          <p:cNvSpPr txBox="1"/>
+          <p:nvPr/>
+        </p:nvSpPr>
+        <p:spPr>
+          <a:xfrm>
+            <a:off x="457200" y="3639312"/>
+            <a:ext cx="2194560" cy="822960"/>
+          </a:xfrm>
+          <a:prstGeom prst="rect">
+            <a:avLst/>
+          </a:prstGeom>
+          <a:noFill/>
+        </p:spPr>
+        <p:txBody>
+          <a:bodyPr wrap="square">
+            <a:spAutoFit/>
+          </a:bodyPr>
+          <a:lstStyle/>
+          <a:p>
+            <a:pPr algn="ctr"/>
+            <a:r>
+              <a:rPr sz="1400" b="0" spc="-14">
                 <a:solidFill>
                   <a:srgbClr val="1F1F1F"/>
                 </a:solidFill>
                 <a:latin typeface="Pretendard"/>
               </a:rPr>
-              <a:t>Sang-Min Park, MD, PhD</a:t>
-            </a:r>
-          </a:p>
-        </p:txBody>
-      </p:sp>
-      <p:sp>
-        <p:nvSpPr>
-          <p:cNvPr id="10" name="TextBox 9"/>
-          <p:cNvSpPr txBox="1"/>
-          <p:nvPr/>
-        </p:nvSpPr>
-        <p:spPr>
-          <a:xfrm>
-            <a:off x="272216" y="6378122"/>
-            <a:ext cx="7315200" cy="384048"/>
-          </a:xfrm>
-          <a:prstGeom prst="rect">
-            <a:avLst/>
-          </a:prstGeom>
-          <a:noFill/>
-        </p:spPr>
-        <p:txBody>
-          <a:bodyPr wrap="square" lIns="0" tIns="0" rIns="0" bIns="0" anchor="t">
-            <a:spAutoFit/>
-          </a:bodyPr>
-          <a:lstStyle/>
-          <a:p>
-            <a:pPr algn="l"/>
-            <a:r>
-              <a:rPr sz="1400" b="0" i="0" spc="-14">
-                <a:solidFill>
-                  <a:srgbClr val="6B6B6B"/>
-                </a:solidFill>
-                <a:latin typeface="Pretendard"/>
-              </a:rPr>
-              <a:t>Conference name   |   YYYY.MM</a:t>
+              <a:t>Single-center</a:t>
+            </a:r>
+          </a:p>
+          <a:p>
+            <a:pPr algn="ctr"/>
+            <a:r>
+              <a:rPr sz="1400" b="0" spc="-14">
+                <a:solidFill>
+                  <a:srgbClr val="1F1F1F"/>
+                </a:solidFill>
+                <a:latin typeface="Pretendard"/>
+              </a:rPr>
+              <a:t>pilot</a:t>
+            </a:r>
+          </a:p>
+        </p:txBody>
+      </p:sp>
+      <p:sp>
+        <p:nvSpPr>
+          <p:cNvPr id="41" name="Oval 40"/>
+          <p:cNvSpPr/>
+          <p:nvPr/>
+        </p:nvSpPr>
+        <p:spPr>
+          <a:xfrm>
+            <a:off x="3717035" y="3259836"/>
+            <a:ext cx="201168" cy="201168"/>
+          </a:xfrm>
+          <a:prstGeom prst="ellipse">
+            <a:avLst/>
+          </a:prstGeom>
+          <a:solidFill>
+            <a:srgbClr val="00754A"/>
+          </a:solidFill>
+          <a:ln>
+            <a:noFill/>
+          </a:ln>
+        </p:spPr>
+        <p:style>
+          <a:lnRef idx="1">
+            <a:schemeClr val="accent1"/>
+          </a:lnRef>
+          <a:fillRef idx="3">
+            <a:schemeClr val="accent1"/>
+          </a:fillRef>
+          <a:effectRef idx="0">
+            <a:schemeClr val="accent1"/>
+          </a:effectRef>
+          <a:fontRef idx="minor">
+            <a:schemeClr val="lt1"/>
+          </a:fontRef>
+        </p:style>
+        <p:txBody>
+          <a:bodyPr rtlCol="0" anchor="ctr"/>
+          <a:lstStyle/>
+          <a:p>
+            <a:pPr algn="ctr"/>
+            <a:endParaRPr/>
+          </a:p>
+        </p:txBody>
+      </p:sp>
+      <p:sp>
+        <p:nvSpPr>
+          <p:cNvPr id="42" name="TextBox 41"/>
+          <p:cNvSpPr txBox="1"/>
+          <p:nvPr/>
+        </p:nvSpPr>
+        <p:spPr>
+          <a:xfrm>
+            <a:off x="2811779" y="2697480"/>
+            <a:ext cx="2011680" cy="365760"/>
+          </a:xfrm>
+          <a:prstGeom prst="rect">
+            <a:avLst/>
+          </a:prstGeom>
+          <a:noFill/>
+        </p:spPr>
+        <p:txBody>
+          <a:bodyPr wrap="square">
+            <a:spAutoFit/>
+          </a:bodyPr>
+          <a:lstStyle/>
+          <a:p>
+            <a:pPr algn="ctr"/>
+            <a:r>
+              <a:rPr sz="2200" b="1" spc="-22">
+                <a:solidFill>
+                  <a:srgbClr val="006241"/>
+                </a:solidFill>
+                <a:latin typeface="Pretendard"/>
+              </a:rPr>
+              <a:t>2020</a:t>
+            </a:r>
+          </a:p>
+        </p:txBody>
+      </p:sp>
+      <p:sp>
+        <p:nvSpPr>
+          <p:cNvPr id="43" name="TextBox 42"/>
+          <p:cNvSpPr txBox="1"/>
+          <p:nvPr/>
+        </p:nvSpPr>
+        <p:spPr>
+          <a:xfrm>
+            <a:off x="2720339" y="3639312"/>
+            <a:ext cx="2194560" cy="822960"/>
+          </a:xfrm>
+          <a:prstGeom prst="rect">
+            <a:avLst/>
+          </a:prstGeom>
+          <a:noFill/>
+        </p:spPr>
+        <p:txBody>
+          <a:bodyPr wrap="square">
+            <a:spAutoFit/>
+          </a:bodyPr>
+          <a:lstStyle/>
+          <a:p>
+            <a:pPr algn="ctr"/>
+            <a:r>
+              <a:rPr sz="1400" b="0" spc="-14">
+                <a:solidFill>
+                  <a:srgbClr val="1F1F1F"/>
+                </a:solidFill>
+                <a:latin typeface="Pretendard"/>
+              </a:rPr>
+              <a:t>Multicenter</a:t>
+            </a:r>
+          </a:p>
+          <a:p>
+            <a:pPr algn="ctr"/>
+            <a:r>
+              <a:rPr sz="1400" b="0" spc="-14">
+                <a:solidFill>
+                  <a:srgbClr val="1F1F1F"/>
+                </a:solidFill>
+                <a:latin typeface="Pretendard"/>
+              </a:rPr>
+              <a:t>protocol</a:t>
+            </a:r>
+          </a:p>
+        </p:txBody>
+      </p:sp>
+      <p:sp>
+        <p:nvSpPr>
+          <p:cNvPr id="44" name="Oval 43"/>
+          <p:cNvSpPr/>
+          <p:nvPr/>
+        </p:nvSpPr>
+        <p:spPr>
+          <a:xfrm>
+            <a:off x="5980176" y="3259836"/>
+            <a:ext cx="201168" cy="201168"/>
+          </a:xfrm>
+          <a:prstGeom prst="ellipse">
+            <a:avLst/>
+          </a:prstGeom>
+          <a:solidFill>
+            <a:srgbClr val="00754A"/>
+          </a:solidFill>
+          <a:ln>
+            <a:noFill/>
+          </a:ln>
+        </p:spPr>
+        <p:style>
+          <a:lnRef idx="1">
+            <a:schemeClr val="accent1"/>
+          </a:lnRef>
+          <a:fillRef idx="3">
+            <a:schemeClr val="accent1"/>
+          </a:fillRef>
+          <a:effectRef idx="0">
+            <a:schemeClr val="accent1"/>
+          </a:effectRef>
+          <a:fontRef idx="minor">
+            <a:schemeClr val="lt1"/>
+          </a:fontRef>
+        </p:style>
+        <p:txBody>
+          <a:bodyPr rtlCol="0" anchor="ctr"/>
+          <a:lstStyle/>
+          <a:p>
+            <a:pPr algn="ctr"/>
+            <a:endParaRPr/>
+          </a:p>
+        </p:txBody>
+      </p:sp>
+      <p:sp>
+        <p:nvSpPr>
+          <p:cNvPr id="45" name="TextBox 44"/>
+          <p:cNvSpPr txBox="1"/>
+          <p:nvPr/>
+        </p:nvSpPr>
+        <p:spPr>
+          <a:xfrm>
+            <a:off x="5074920" y="2697480"/>
+            <a:ext cx="2011680" cy="365760"/>
+          </a:xfrm>
+          <a:prstGeom prst="rect">
+            <a:avLst/>
+          </a:prstGeom>
+          <a:noFill/>
+        </p:spPr>
+        <p:txBody>
+          <a:bodyPr wrap="square">
+            <a:spAutoFit/>
+          </a:bodyPr>
+          <a:lstStyle/>
+          <a:p>
+            <a:pPr algn="ctr"/>
+            <a:r>
+              <a:rPr sz="2200" b="1" spc="-22">
+                <a:solidFill>
+                  <a:srgbClr val="006241"/>
+                </a:solidFill>
+                <a:latin typeface="Pretendard"/>
+              </a:rPr>
+              <a:t>2021</a:t>
+            </a:r>
+          </a:p>
+        </p:txBody>
+      </p:sp>
+      <p:sp>
+        <p:nvSpPr>
+          <p:cNvPr id="46" name="TextBox 45"/>
+          <p:cNvSpPr txBox="1"/>
+          <p:nvPr/>
+        </p:nvSpPr>
+        <p:spPr>
+          <a:xfrm>
+            <a:off x="4983480" y="3639312"/>
+            <a:ext cx="2194560" cy="822960"/>
+          </a:xfrm>
+          <a:prstGeom prst="rect">
+            <a:avLst/>
+          </a:prstGeom>
+          <a:noFill/>
+        </p:spPr>
+        <p:txBody>
+          <a:bodyPr wrap="square">
+            <a:spAutoFit/>
+          </a:bodyPr>
+          <a:lstStyle/>
+          <a:p>
+            <a:pPr algn="ctr"/>
+            <a:r>
+              <a:rPr sz="1400" b="0" spc="-14">
+                <a:solidFill>
+                  <a:srgbClr val="1F1F1F"/>
+                </a:solidFill>
+                <a:latin typeface="Pretendard"/>
+              </a:rPr>
+              <a:t>First RCT</a:t>
+            </a:r>
+          </a:p>
+          <a:p>
+            <a:pPr algn="ctr"/>
+            <a:r>
+              <a:rPr sz="1400" b="0" spc="-14">
+                <a:solidFill>
+                  <a:srgbClr val="1F1F1F"/>
+                </a:solidFill>
+                <a:latin typeface="Pretendard"/>
+              </a:rPr>
+              <a:t>enrolment</a:t>
+            </a:r>
+          </a:p>
+        </p:txBody>
+      </p:sp>
+      <p:sp>
+        <p:nvSpPr>
+          <p:cNvPr id="47" name="Oval 46"/>
+          <p:cNvSpPr/>
+          <p:nvPr/>
+        </p:nvSpPr>
+        <p:spPr>
+          <a:xfrm>
+            <a:off x="8243316" y="3259836"/>
+            <a:ext cx="201168" cy="201168"/>
+          </a:xfrm>
+          <a:prstGeom prst="ellipse">
+            <a:avLst/>
+          </a:prstGeom>
+          <a:solidFill>
+            <a:srgbClr val="00754A"/>
+          </a:solidFill>
+          <a:ln>
+            <a:noFill/>
+          </a:ln>
+        </p:spPr>
+        <p:style>
+          <a:lnRef idx="1">
+            <a:schemeClr val="accent1"/>
+          </a:lnRef>
+          <a:fillRef idx="3">
+            <a:schemeClr val="accent1"/>
+          </a:fillRef>
+          <a:effectRef idx="0">
+            <a:schemeClr val="accent1"/>
+          </a:effectRef>
+          <a:fontRef idx="minor">
+            <a:schemeClr val="lt1"/>
+          </a:fontRef>
+        </p:style>
+        <p:txBody>
+          <a:bodyPr rtlCol="0" anchor="ctr"/>
+          <a:lstStyle/>
+          <a:p>
+            <a:pPr algn="ctr"/>
+            <a:endParaRPr/>
+          </a:p>
+        </p:txBody>
+      </p:sp>
+      <p:sp>
+        <p:nvSpPr>
+          <p:cNvPr id="48" name="TextBox 47"/>
+          <p:cNvSpPr txBox="1"/>
+          <p:nvPr/>
+        </p:nvSpPr>
+        <p:spPr>
+          <a:xfrm>
+            <a:off x="7338060" y="2697480"/>
+            <a:ext cx="2011680" cy="365760"/>
+          </a:xfrm>
+          <a:prstGeom prst="rect">
+            <a:avLst/>
+          </a:prstGeom>
+          <a:noFill/>
+        </p:spPr>
+        <p:txBody>
+          <a:bodyPr wrap="square">
+            <a:spAutoFit/>
+          </a:bodyPr>
+          <a:lstStyle/>
+          <a:p>
+            <a:pPr algn="ctr"/>
+            <a:r>
+              <a:rPr sz="2200" b="1" spc="-22">
+                <a:solidFill>
+                  <a:srgbClr val="006241"/>
+                </a:solidFill>
+                <a:latin typeface="Pretendard"/>
+              </a:rPr>
+              <a:t>2023</a:t>
+            </a:r>
+          </a:p>
+        </p:txBody>
+      </p:sp>
+      <p:sp>
+        <p:nvSpPr>
+          <p:cNvPr id="49" name="TextBox 48"/>
+          <p:cNvSpPr txBox="1"/>
+          <p:nvPr/>
+        </p:nvSpPr>
+        <p:spPr>
+          <a:xfrm>
+            <a:off x="7246620" y="3639312"/>
+            <a:ext cx="2194560" cy="822960"/>
+          </a:xfrm>
+          <a:prstGeom prst="rect">
+            <a:avLst/>
+          </a:prstGeom>
+          <a:noFill/>
+        </p:spPr>
+        <p:txBody>
+          <a:bodyPr wrap="square">
+            <a:spAutoFit/>
+          </a:bodyPr>
+          <a:lstStyle/>
+          <a:p>
+            <a:pPr algn="ctr"/>
+            <a:r>
+              <a:rPr sz="1400" b="0" spc="-14">
+                <a:solidFill>
+                  <a:srgbClr val="1F1F1F"/>
+                </a:solidFill>
+                <a:latin typeface="Pretendard"/>
+              </a:rPr>
+              <a:t>Two RCTs</a:t>
+            </a:r>
+          </a:p>
+          <a:p>
+            <a:pPr algn="ctr"/>
+            <a:r>
+              <a:rPr sz="1400" b="0" spc="-14">
+                <a:solidFill>
+                  <a:srgbClr val="1F1F1F"/>
+                </a:solidFill>
+                <a:latin typeface="Pretendard"/>
+              </a:rPr>
+              <a:t>completed</a:t>
+            </a:r>
+          </a:p>
+        </p:txBody>
+      </p:sp>
+      <p:sp>
+        <p:nvSpPr>
+          <p:cNvPr id="50" name="Oval 49"/>
+          <p:cNvSpPr/>
+          <p:nvPr/>
+        </p:nvSpPr>
+        <p:spPr>
+          <a:xfrm>
+            <a:off x="10506456" y="3259836"/>
+            <a:ext cx="201168" cy="201168"/>
+          </a:xfrm>
+          <a:prstGeom prst="ellipse">
+            <a:avLst/>
+          </a:prstGeom>
+          <a:solidFill>
+            <a:srgbClr val="00754A"/>
+          </a:solidFill>
+          <a:ln>
+            <a:noFill/>
+          </a:ln>
+        </p:spPr>
+        <p:style>
+          <a:lnRef idx="1">
+            <a:schemeClr val="accent1"/>
+          </a:lnRef>
+          <a:fillRef idx="3">
+            <a:schemeClr val="accent1"/>
+          </a:fillRef>
+          <a:effectRef idx="0">
+            <a:schemeClr val="accent1"/>
+          </a:effectRef>
+          <a:fontRef idx="minor">
+            <a:schemeClr val="lt1"/>
+          </a:fontRef>
+        </p:style>
+        <p:txBody>
+          <a:bodyPr rtlCol="0" anchor="ctr"/>
+          <a:lstStyle/>
+          <a:p>
+            <a:pPr algn="ctr"/>
+            <a:endParaRPr/>
+          </a:p>
+        </p:txBody>
+      </p:sp>
+      <p:sp>
+        <p:nvSpPr>
+          <p:cNvPr id="51" name="TextBox 50"/>
+          <p:cNvSpPr txBox="1"/>
+          <p:nvPr/>
+        </p:nvSpPr>
+        <p:spPr>
+          <a:xfrm>
+            <a:off x="9601200" y="2697480"/>
+            <a:ext cx="2011680" cy="365760"/>
+          </a:xfrm>
+          <a:prstGeom prst="rect">
+            <a:avLst/>
+          </a:prstGeom>
+          <a:noFill/>
+        </p:spPr>
+        <p:txBody>
+          <a:bodyPr wrap="square">
+            <a:spAutoFit/>
+          </a:bodyPr>
+          <a:lstStyle/>
+          <a:p>
+            <a:pPr algn="ctr"/>
+            <a:r>
+              <a:rPr sz="2200" b="1" spc="-22">
+                <a:solidFill>
+                  <a:srgbClr val="006241"/>
+                </a:solidFill>
+                <a:latin typeface="Pretendard"/>
+              </a:rPr>
+              <a:t>2025</a:t>
+            </a:r>
+          </a:p>
+        </p:txBody>
+      </p:sp>
+      <p:sp>
+        <p:nvSpPr>
+          <p:cNvPr id="52" name="TextBox 51"/>
+          <p:cNvSpPr txBox="1"/>
+          <p:nvPr/>
+        </p:nvSpPr>
+        <p:spPr>
+          <a:xfrm>
+            <a:off x="9509760" y="3639312"/>
+            <a:ext cx="2194560" cy="822960"/>
+          </a:xfrm>
+          <a:prstGeom prst="rect">
+            <a:avLst/>
+          </a:prstGeom>
+          <a:noFill/>
+        </p:spPr>
+        <p:txBody>
+          <a:bodyPr wrap="square">
+            <a:spAutoFit/>
+          </a:bodyPr>
+          <a:lstStyle/>
+          <a:p>
+            <a:pPr algn="ctr"/>
+            <a:r>
+              <a:rPr sz="1400" b="0" spc="-14">
+                <a:solidFill>
+                  <a:srgbClr val="1F1F1F"/>
+                </a:solidFill>
+                <a:latin typeface="Pretendard"/>
+              </a:rPr>
+              <a:t>Pooled</a:t>
+            </a:r>
+          </a:p>
+          <a:p>
+            <a:pPr algn="ctr"/>
+            <a:r>
+              <a:rPr sz="1400" b="0" spc="-14">
+                <a:solidFill>
+                  <a:srgbClr val="1F1F1F"/>
+                </a:solidFill>
+                <a:latin typeface="Pretendard"/>
+              </a:rPr>
+              <a:t>analyses</a:t>
             </a:r>
           </a:p>
         </p:txBody>
@@ -7339,7 +7884,7 @@
                 </a:solidFill>
                 <a:latin typeface="Pretendard"/>
               </a:rPr>
-              <a:t>PATTERN J</a:t>
+              <a:t>PATTERN K</a:t>
             </a:r>
           </a:p>
         </p:txBody>
@@ -7403,7 +7948,7 @@
                 </a:solidFill>
                 <a:latin typeface="Pretendard"/>
               </a:rPr>
-              <a:t>Timeline — Milestone Track</a:t>
+              <a:t>Process Flow — CONSORT</a:t>
             </a:r>
           </a:p>
         </p:txBody>
@@ -7526,16 +8071,472 @@
       </p:sp>
       <p:sp>
         <p:nvSpPr>
-          <p:cNvPr id="37" name="Rectangle 36"/>
+          <p:cNvPr id="37" name="Rounded Rectangle 36"/>
           <p:cNvSpPr/>
           <p:nvPr/>
         </p:nvSpPr>
         <p:spPr>
           <a:xfrm>
-            <a:off x="1554480" y="3310128"/>
-            <a:ext cx="9052560" cy="32004"/>
-          </a:xfrm>
-          <a:prstGeom prst="rect">
+            <a:off x="502920" y="2834640"/>
+            <a:ext cx="2468880" cy="1325880"/>
+          </a:xfrm>
+          <a:prstGeom prst="roundRect">
+            <a:avLst/>
+          </a:prstGeom>
+          <a:noFill/>
+          <a:ln w="15875">
+            <a:solidFill>
+              <a:srgbClr val="00754A"/>
+            </a:solidFill>
+          </a:ln>
+        </p:spPr>
+        <p:style>
+          <a:lnRef idx="1">
+            <a:schemeClr val="accent1"/>
+          </a:lnRef>
+          <a:fillRef idx="3">
+            <a:schemeClr val="accent1"/>
+          </a:fillRef>
+          <a:effectRef idx="0">
+            <a:schemeClr val="accent1"/>
+          </a:effectRef>
+          <a:fontRef idx="minor">
+            <a:schemeClr val="lt1"/>
+          </a:fontRef>
+        </p:style>
+        <p:txBody>
+          <a:bodyPr rtlCol="0" anchor="ctr"/>
+          <a:lstStyle/>
+          <a:p>
+            <a:pPr algn="ctr"/>
+            <a:endParaRPr/>
+          </a:p>
+        </p:txBody>
+      </p:sp>
+      <p:sp>
+        <p:nvSpPr>
+          <p:cNvPr id="38" name="TextBox 37"/>
+          <p:cNvSpPr txBox="1"/>
+          <p:nvPr/>
+        </p:nvSpPr>
+        <p:spPr>
+          <a:xfrm>
+            <a:off x="502920" y="3154680"/>
+            <a:ext cx="2468880" cy="411480"/>
+          </a:xfrm>
+          <a:prstGeom prst="rect">
+            <a:avLst/>
+          </a:prstGeom>
+          <a:noFill/>
+        </p:spPr>
+        <p:txBody>
+          <a:bodyPr wrap="square">
+            <a:spAutoFit/>
+          </a:bodyPr>
+          <a:lstStyle/>
+          <a:p>
+            <a:pPr algn="ctr"/>
+            <a:r>
+              <a:rPr sz="1800" b="1" spc="-18">
+                <a:solidFill>
+                  <a:srgbClr val="1F1F1F"/>
+                </a:solidFill>
+                <a:latin typeface="Pretendard"/>
+              </a:rPr>
+              <a:t>Assessed</a:t>
+            </a:r>
+          </a:p>
+        </p:txBody>
+      </p:sp>
+      <p:sp>
+        <p:nvSpPr>
+          <p:cNvPr id="39" name="TextBox 38"/>
+          <p:cNvSpPr txBox="1"/>
+          <p:nvPr/>
+        </p:nvSpPr>
+        <p:spPr>
+          <a:xfrm>
+            <a:off x="502920" y="3611880"/>
+            <a:ext cx="2468880" cy="411480"/>
+          </a:xfrm>
+          <a:prstGeom prst="rect">
+            <a:avLst/>
+          </a:prstGeom>
+          <a:noFill/>
+        </p:spPr>
+        <p:txBody>
+          <a:bodyPr wrap="square">
+            <a:spAutoFit/>
+          </a:bodyPr>
+          <a:lstStyle/>
+          <a:p>
+            <a:pPr algn="ctr"/>
+            <a:r>
+              <a:rPr sz="1600" b="0" spc="-16">
+                <a:solidFill>
+                  <a:srgbClr val="6B6B6B"/>
+                </a:solidFill>
+                <a:latin typeface="Pretendard"/>
+              </a:rPr>
+              <a:t>n = NNN</a:t>
+            </a:r>
+          </a:p>
+        </p:txBody>
+      </p:sp>
+      <p:sp>
+        <p:nvSpPr>
+          <p:cNvPr id="40" name="Rounded Rectangle 39"/>
+          <p:cNvSpPr/>
+          <p:nvPr/>
+        </p:nvSpPr>
+        <p:spPr>
+          <a:xfrm>
+            <a:off x="3291840" y="2834640"/>
+            <a:ext cx="2468880" cy="1325880"/>
+          </a:xfrm>
+          <a:prstGeom prst="roundRect">
+            <a:avLst/>
+          </a:prstGeom>
+          <a:noFill/>
+          <a:ln w="15875">
+            <a:solidFill>
+              <a:srgbClr val="00754A"/>
+            </a:solidFill>
+          </a:ln>
+        </p:spPr>
+        <p:style>
+          <a:lnRef idx="1">
+            <a:schemeClr val="accent1"/>
+          </a:lnRef>
+          <a:fillRef idx="3">
+            <a:schemeClr val="accent1"/>
+          </a:fillRef>
+          <a:effectRef idx="0">
+            <a:schemeClr val="accent1"/>
+          </a:effectRef>
+          <a:fontRef idx="minor">
+            <a:schemeClr val="lt1"/>
+          </a:fontRef>
+        </p:style>
+        <p:txBody>
+          <a:bodyPr rtlCol="0" anchor="ctr"/>
+          <a:lstStyle/>
+          <a:p>
+            <a:pPr algn="ctr"/>
+            <a:endParaRPr/>
+          </a:p>
+        </p:txBody>
+      </p:sp>
+      <p:sp>
+        <p:nvSpPr>
+          <p:cNvPr id="41" name="TextBox 40"/>
+          <p:cNvSpPr txBox="1"/>
+          <p:nvPr/>
+        </p:nvSpPr>
+        <p:spPr>
+          <a:xfrm>
+            <a:off x="3291840" y="3154680"/>
+            <a:ext cx="2468880" cy="411480"/>
+          </a:xfrm>
+          <a:prstGeom prst="rect">
+            <a:avLst/>
+          </a:prstGeom>
+          <a:noFill/>
+        </p:spPr>
+        <p:txBody>
+          <a:bodyPr wrap="square">
+            <a:spAutoFit/>
+          </a:bodyPr>
+          <a:lstStyle/>
+          <a:p>
+            <a:pPr algn="ctr"/>
+            <a:r>
+              <a:rPr sz="1800" b="1" spc="-18">
+                <a:solidFill>
+                  <a:srgbClr val="1F1F1F"/>
+                </a:solidFill>
+                <a:latin typeface="Pretendard"/>
+              </a:rPr>
+              <a:t>Randomized</a:t>
+            </a:r>
+          </a:p>
+        </p:txBody>
+      </p:sp>
+      <p:sp>
+        <p:nvSpPr>
+          <p:cNvPr id="42" name="TextBox 41"/>
+          <p:cNvSpPr txBox="1"/>
+          <p:nvPr/>
+        </p:nvSpPr>
+        <p:spPr>
+          <a:xfrm>
+            <a:off x="3291840" y="3611880"/>
+            <a:ext cx="2468880" cy="411480"/>
+          </a:xfrm>
+          <a:prstGeom prst="rect">
+            <a:avLst/>
+          </a:prstGeom>
+          <a:noFill/>
+        </p:spPr>
+        <p:txBody>
+          <a:bodyPr wrap="square">
+            <a:spAutoFit/>
+          </a:bodyPr>
+          <a:lstStyle/>
+          <a:p>
+            <a:pPr algn="ctr"/>
+            <a:r>
+              <a:rPr sz="1600" b="0" spc="-16">
+                <a:solidFill>
+                  <a:srgbClr val="6B6B6B"/>
+                </a:solidFill>
+                <a:latin typeface="Pretendard"/>
+              </a:rPr>
+              <a:t>n = NNN</a:t>
+            </a:r>
+          </a:p>
+        </p:txBody>
+      </p:sp>
+      <p:sp>
+        <p:nvSpPr>
+          <p:cNvPr id="43" name="Rounded Rectangle 42"/>
+          <p:cNvSpPr/>
+          <p:nvPr/>
+        </p:nvSpPr>
+        <p:spPr>
+          <a:xfrm>
+            <a:off x="6080760" y="2834640"/>
+            <a:ext cx="2468880" cy="1325880"/>
+          </a:xfrm>
+          <a:prstGeom prst="roundRect">
+            <a:avLst/>
+          </a:prstGeom>
+          <a:noFill/>
+          <a:ln w="15875">
+            <a:solidFill>
+              <a:srgbClr val="00754A"/>
+            </a:solidFill>
+          </a:ln>
+        </p:spPr>
+        <p:style>
+          <a:lnRef idx="1">
+            <a:schemeClr val="accent1"/>
+          </a:lnRef>
+          <a:fillRef idx="3">
+            <a:schemeClr val="accent1"/>
+          </a:fillRef>
+          <a:effectRef idx="0">
+            <a:schemeClr val="accent1"/>
+          </a:effectRef>
+          <a:fontRef idx="minor">
+            <a:schemeClr val="lt1"/>
+          </a:fontRef>
+        </p:style>
+        <p:txBody>
+          <a:bodyPr rtlCol="0" anchor="ctr"/>
+          <a:lstStyle/>
+          <a:p>
+            <a:pPr algn="ctr"/>
+            <a:endParaRPr/>
+          </a:p>
+        </p:txBody>
+      </p:sp>
+      <p:sp>
+        <p:nvSpPr>
+          <p:cNvPr id="44" name="TextBox 43"/>
+          <p:cNvSpPr txBox="1"/>
+          <p:nvPr/>
+        </p:nvSpPr>
+        <p:spPr>
+          <a:xfrm>
+            <a:off x="6080760" y="3154680"/>
+            <a:ext cx="2468880" cy="411480"/>
+          </a:xfrm>
+          <a:prstGeom prst="rect">
+            <a:avLst/>
+          </a:prstGeom>
+          <a:noFill/>
+        </p:spPr>
+        <p:txBody>
+          <a:bodyPr wrap="square">
+            <a:spAutoFit/>
+          </a:bodyPr>
+          <a:lstStyle/>
+          <a:p>
+            <a:pPr algn="ctr"/>
+            <a:r>
+              <a:rPr sz="1800" b="1" spc="-18">
+                <a:solidFill>
+                  <a:srgbClr val="1F1F1F"/>
+                </a:solidFill>
+                <a:latin typeface="Pretendard"/>
+              </a:rPr>
+              <a:t>Allocated</a:t>
+            </a:r>
+          </a:p>
+        </p:txBody>
+      </p:sp>
+      <p:sp>
+        <p:nvSpPr>
+          <p:cNvPr id="45" name="TextBox 44"/>
+          <p:cNvSpPr txBox="1"/>
+          <p:nvPr/>
+        </p:nvSpPr>
+        <p:spPr>
+          <a:xfrm>
+            <a:off x="6080760" y="3611880"/>
+            <a:ext cx="2468880" cy="411480"/>
+          </a:xfrm>
+          <a:prstGeom prst="rect">
+            <a:avLst/>
+          </a:prstGeom>
+          <a:noFill/>
+        </p:spPr>
+        <p:txBody>
+          <a:bodyPr wrap="square">
+            <a:spAutoFit/>
+          </a:bodyPr>
+          <a:lstStyle/>
+          <a:p>
+            <a:pPr algn="ctr"/>
+            <a:r>
+              <a:rPr sz="1600" b="0" spc="-16">
+                <a:solidFill>
+                  <a:srgbClr val="6B6B6B"/>
+                </a:solidFill>
+                <a:latin typeface="Pretendard"/>
+              </a:rPr>
+              <a:t>n = NN / NN</a:t>
+            </a:r>
+          </a:p>
+        </p:txBody>
+      </p:sp>
+      <p:sp>
+        <p:nvSpPr>
+          <p:cNvPr id="46" name="Rounded Rectangle 45"/>
+          <p:cNvSpPr/>
+          <p:nvPr/>
+        </p:nvSpPr>
+        <p:spPr>
+          <a:xfrm>
+            <a:off x="8869680" y="2834640"/>
+            <a:ext cx="2468880" cy="1325880"/>
+          </a:xfrm>
+          <a:prstGeom prst="roundRect">
+            <a:avLst/>
+          </a:prstGeom>
+          <a:noFill/>
+          <a:ln w="15875">
+            <a:solidFill>
+              <a:srgbClr val="00754A"/>
+            </a:solidFill>
+          </a:ln>
+        </p:spPr>
+        <p:style>
+          <a:lnRef idx="1">
+            <a:schemeClr val="accent1"/>
+          </a:lnRef>
+          <a:fillRef idx="3">
+            <a:schemeClr val="accent1"/>
+          </a:fillRef>
+          <a:effectRef idx="0">
+            <a:schemeClr val="accent1"/>
+          </a:effectRef>
+          <a:fontRef idx="minor">
+            <a:schemeClr val="lt1"/>
+          </a:fontRef>
+        </p:style>
+        <p:txBody>
+          <a:bodyPr rtlCol="0" anchor="ctr"/>
+          <a:lstStyle/>
+          <a:p>
+            <a:pPr algn="ctr"/>
+            <a:endParaRPr/>
+          </a:p>
+        </p:txBody>
+      </p:sp>
+      <p:sp>
+        <p:nvSpPr>
+          <p:cNvPr id="47" name="TextBox 46"/>
+          <p:cNvSpPr txBox="1"/>
+          <p:nvPr/>
+        </p:nvSpPr>
+        <p:spPr>
+          <a:xfrm>
+            <a:off x="8869680" y="3154680"/>
+            <a:ext cx="2468880" cy="411480"/>
+          </a:xfrm>
+          <a:prstGeom prst="rect">
+            <a:avLst/>
+          </a:prstGeom>
+          <a:noFill/>
+        </p:spPr>
+        <p:txBody>
+          <a:bodyPr wrap="square">
+            <a:spAutoFit/>
+          </a:bodyPr>
+          <a:lstStyle/>
+          <a:p>
+            <a:pPr algn="ctr"/>
+            <a:r>
+              <a:rPr sz="1800" b="1" spc="-18">
+                <a:solidFill>
+                  <a:srgbClr val="1F1F1F"/>
+                </a:solidFill>
+                <a:latin typeface="Pretendard"/>
+              </a:rPr>
+              <a:t>Analyzed</a:t>
+            </a:r>
+          </a:p>
+        </p:txBody>
+      </p:sp>
+      <p:sp>
+        <p:nvSpPr>
+          <p:cNvPr id="48" name="TextBox 47"/>
+          <p:cNvSpPr txBox="1"/>
+          <p:nvPr/>
+        </p:nvSpPr>
+        <p:spPr>
+          <a:xfrm>
+            <a:off x="8869680" y="3611880"/>
+            <a:ext cx="2468880" cy="411480"/>
+          </a:xfrm>
+          <a:prstGeom prst="rect">
+            <a:avLst/>
+          </a:prstGeom>
+          <a:noFill/>
+        </p:spPr>
+        <p:txBody>
+          <a:bodyPr wrap="square">
+            <a:spAutoFit/>
+          </a:bodyPr>
+          <a:lstStyle/>
+          <a:p>
+            <a:pPr algn="ctr"/>
+            <a:r>
+              <a:rPr sz="1600" b="0" spc="-16">
+                <a:solidFill>
+                  <a:srgbClr val="6B6B6B"/>
+                </a:solidFill>
+                <a:latin typeface="Pretendard"/>
+              </a:rPr>
+              <a:t>n = NN / NN</a:t>
+            </a:r>
+          </a:p>
+        </p:txBody>
+      </p:sp>
+      <p:sp>
+        <p:nvSpPr>
+          <p:cNvPr id="49" name="Right Arrow 48"/>
+          <p:cNvSpPr/>
+          <p:nvPr/>
+        </p:nvSpPr>
+        <p:spPr>
+          <a:xfrm>
+            <a:off x="2990088" y="3364992"/>
+            <a:ext cx="256032" cy="274320"/>
+          </a:xfrm>
+          <a:prstGeom prst="rightArrow">
             <a:avLst/>
           </a:prstGeom>
           <a:solidFill>
@@ -7570,16 +8571,16 @@
       </p:sp>
       <p:sp>
         <p:nvSpPr>
-          <p:cNvPr id="38" name="Oval 37"/>
+          <p:cNvPr id="50" name="Right Arrow 49"/>
           <p:cNvSpPr/>
           <p:nvPr/>
         </p:nvSpPr>
         <p:spPr>
           <a:xfrm>
-            <a:off x="1453895" y="3259836"/>
-            <a:ext cx="201168" cy="201168"/>
-          </a:xfrm>
-          <a:prstGeom prst="ellipse">
+            <a:off x="5779008" y="3364992"/>
+            <a:ext cx="256032" cy="274320"/>
+          </a:xfrm>
+          <a:prstGeom prst="rightArrow">
             <a:avLst/>
           </a:prstGeom>
           <a:solidFill>
@@ -7614,98 +8615,16 @@
       </p:sp>
       <p:sp>
         <p:nvSpPr>
-          <p:cNvPr id="39" name="TextBox 38"/>
-          <p:cNvSpPr txBox="1"/>
-          <p:nvPr/>
-        </p:nvSpPr>
-        <p:spPr>
-          <a:xfrm>
-            <a:off x="548639" y="2697480"/>
-            <a:ext cx="2011680" cy="365760"/>
-          </a:xfrm>
-          <a:prstGeom prst="rect">
-            <a:avLst/>
-          </a:prstGeom>
-          <a:noFill/>
-        </p:spPr>
-        <p:txBody>
-          <a:bodyPr wrap="square">
-            <a:spAutoFit/>
-          </a:bodyPr>
-          <a:lstStyle/>
-          <a:p>
-            <a:pPr algn="ctr"/>
-            <a:r>
-              <a:rPr sz="2200" b="1" spc="-22">
-                <a:solidFill>
-                  <a:srgbClr val="006241"/>
-                </a:solidFill>
-                <a:latin typeface="Pretendard"/>
-              </a:rPr>
-              <a:t>2018</a:t>
-            </a:r>
-          </a:p>
-        </p:txBody>
-      </p:sp>
-      <p:sp>
-        <p:nvSpPr>
-          <p:cNvPr id="40" name="TextBox 39"/>
-          <p:cNvSpPr txBox="1"/>
-          <p:nvPr/>
-        </p:nvSpPr>
-        <p:spPr>
-          <a:xfrm>
-            <a:off x="457200" y="3639312"/>
-            <a:ext cx="2194560" cy="822960"/>
-          </a:xfrm>
-          <a:prstGeom prst="rect">
-            <a:avLst/>
-          </a:prstGeom>
-          <a:noFill/>
-        </p:spPr>
-        <p:txBody>
-          <a:bodyPr wrap="square">
-            <a:spAutoFit/>
-          </a:bodyPr>
-          <a:lstStyle/>
-          <a:p>
-            <a:pPr algn="ctr"/>
-            <a:r>
-              <a:rPr sz="1400" b="0" spc="-14">
-                <a:solidFill>
-                  <a:srgbClr val="1F1F1F"/>
-                </a:solidFill>
-                <a:latin typeface="Pretendard"/>
-              </a:rPr>
-              <a:t>Single-center</a:t>
-            </a:r>
-          </a:p>
-          <a:p>
-            <a:pPr algn="ctr"/>
-            <a:r>
-              <a:rPr sz="1400" b="0" spc="-14">
-                <a:solidFill>
-                  <a:srgbClr val="1F1F1F"/>
-                </a:solidFill>
-                <a:latin typeface="Pretendard"/>
-              </a:rPr>
-              <a:t>pilot</a:t>
-            </a:r>
-          </a:p>
-        </p:txBody>
-      </p:sp>
-      <p:sp>
-        <p:nvSpPr>
-          <p:cNvPr id="41" name="Oval 40"/>
+          <p:cNvPr id="51" name="Right Arrow 50"/>
           <p:cNvSpPr/>
           <p:nvPr/>
         </p:nvSpPr>
         <p:spPr>
           <a:xfrm>
-            <a:off x="3717035" y="3259836"/>
-            <a:ext cx="201168" cy="201168"/>
-          </a:xfrm>
-          <a:prstGeom prst="ellipse">
+            <a:off x="8567928" y="3364992"/>
+            <a:ext cx="256032" cy="274320"/>
+          </a:xfrm>
+          <a:prstGeom prst="rightArrow">
             <a:avLst/>
           </a:prstGeom>
           <a:solidFill>
@@ -7740,102 +8659,20 @@
       </p:sp>
       <p:sp>
         <p:nvSpPr>
-          <p:cNvPr id="42" name="TextBox 41"/>
-          <p:cNvSpPr txBox="1"/>
-          <p:nvPr/>
-        </p:nvSpPr>
-        <p:spPr>
-          <a:xfrm>
-            <a:off x="2811779" y="2697480"/>
-            <a:ext cx="2011680" cy="365760"/>
-          </a:xfrm>
-          <a:prstGeom prst="rect">
-            <a:avLst/>
-          </a:prstGeom>
-          <a:noFill/>
-        </p:spPr>
-        <p:txBody>
-          <a:bodyPr wrap="square">
-            <a:spAutoFit/>
-          </a:bodyPr>
-          <a:lstStyle/>
-          <a:p>
-            <a:pPr algn="ctr"/>
-            <a:r>
-              <a:rPr sz="2200" b="1" spc="-22">
-                <a:solidFill>
-                  <a:srgbClr val="006241"/>
-                </a:solidFill>
-                <a:latin typeface="Pretendard"/>
-              </a:rPr>
-              <a:t>2020</a:t>
-            </a:r>
-          </a:p>
-        </p:txBody>
-      </p:sp>
-      <p:sp>
-        <p:nvSpPr>
-          <p:cNvPr id="43" name="TextBox 42"/>
-          <p:cNvSpPr txBox="1"/>
-          <p:nvPr/>
-        </p:nvSpPr>
-        <p:spPr>
-          <a:xfrm>
-            <a:off x="2720339" y="3639312"/>
-            <a:ext cx="2194560" cy="822960"/>
-          </a:xfrm>
-          <a:prstGeom prst="rect">
-            <a:avLst/>
-          </a:prstGeom>
-          <a:noFill/>
-        </p:spPr>
-        <p:txBody>
-          <a:bodyPr wrap="square">
-            <a:spAutoFit/>
-          </a:bodyPr>
-          <a:lstStyle/>
-          <a:p>
-            <a:pPr algn="ctr"/>
-            <a:r>
-              <a:rPr sz="1400" b="0" spc="-14">
-                <a:solidFill>
-                  <a:srgbClr val="1F1F1F"/>
-                </a:solidFill>
-                <a:latin typeface="Pretendard"/>
-              </a:rPr>
-              <a:t>Multicenter</a:t>
-            </a:r>
-          </a:p>
-          <a:p>
-            <a:pPr algn="ctr"/>
-            <a:r>
-              <a:rPr sz="1400" b="0" spc="-14">
-                <a:solidFill>
-                  <a:srgbClr val="1F1F1F"/>
-                </a:solidFill>
-                <a:latin typeface="Pretendard"/>
-              </a:rPr>
-              <a:t>protocol</a:t>
-            </a:r>
-          </a:p>
-        </p:txBody>
-      </p:sp>
-      <p:sp>
-        <p:nvSpPr>
-          <p:cNvPr id="44" name="Oval 43"/>
+          <p:cNvPr id="52" name="Down Arrow 51"/>
           <p:cNvSpPr/>
           <p:nvPr/>
         </p:nvSpPr>
         <p:spPr>
           <a:xfrm>
-            <a:off x="5980176" y="3259836"/>
-            <a:ext cx="201168" cy="201168"/>
-          </a:xfrm>
-          <a:prstGeom prst="ellipse">
+            <a:off x="4434840" y="4297680"/>
+            <a:ext cx="201168" cy="320040"/>
+          </a:xfrm>
+          <a:prstGeom prst="downArrow">
             <a:avLst/>
           </a:prstGeom>
           <a:solidFill>
-            <a:srgbClr val="00754A"/>
+            <a:srgbClr val="6B6B6B"/>
           </a:solidFill>
           <a:ln>
             <a:noFill/>
@@ -7866,105 +8703,23 @@
       </p:sp>
       <p:sp>
         <p:nvSpPr>
-          <p:cNvPr id="45" name="TextBox 44"/>
-          <p:cNvSpPr txBox="1"/>
-          <p:nvPr/>
-        </p:nvSpPr>
-        <p:spPr>
-          <a:xfrm>
-            <a:off x="5074920" y="2697480"/>
-            <a:ext cx="2011680" cy="365760"/>
-          </a:xfrm>
-          <a:prstGeom prst="rect">
-            <a:avLst/>
-          </a:prstGeom>
-          <a:noFill/>
-        </p:spPr>
-        <p:txBody>
-          <a:bodyPr wrap="square">
-            <a:spAutoFit/>
-          </a:bodyPr>
-          <a:lstStyle/>
-          <a:p>
-            <a:pPr algn="ctr"/>
-            <a:r>
-              <a:rPr sz="2200" b="1" spc="-22">
-                <a:solidFill>
-                  <a:srgbClr val="006241"/>
-                </a:solidFill>
-                <a:latin typeface="Pretendard"/>
-              </a:rPr>
-              <a:t>2021</a:t>
-            </a:r>
-          </a:p>
-        </p:txBody>
-      </p:sp>
-      <p:sp>
-        <p:nvSpPr>
-          <p:cNvPr id="46" name="TextBox 45"/>
-          <p:cNvSpPr txBox="1"/>
-          <p:nvPr/>
-        </p:nvSpPr>
-        <p:spPr>
-          <a:xfrm>
-            <a:off x="4983480" y="3639312"/>
-            <a:ext cx="2194560" cy="822960"/>
-          </a:xfrm>
-          <a:prstGeom prst="rect">
-            <a:avLst/>
-          </a:prstGeom>
-          <a:noFill/>
-        </p:spPr>
-        <p:txBody>
-          <a:bodyPr wrap="square">
-            <a:spAutoFit/>
-          </a:bodyPr>
-          <a:lstStyle/>
-          <a:p>
-            <a:pPr algn="ctr"/>
-            <a:r>
-              <a:rPr sz="1400" b="0" spc="-14">
-                <a:solidFill>
-                  <a:srgbClr val="1F1F1F"/>
-                </a:solidFill>
-                <a:latin typeface="Pretendard"/>
-              </a:rPr>
-              <a:t>First RCT</a:t>
-            </a:r>
-          </a:p>
-          <a:p>
-            <a:pPr algn="ctr"/>
-            <a:r>
-              <a:rPr sz="1400" b="0" spc="-14">
-                <a:solidFill>
-                  <a:srgbClr val="1F1F1F"/>
-                </a:solidFill>
-                <a:latin typeface="Pretendard"/>
-              </a:rPr>
-              <a:t>enrolment</a:t>
-            </a:r>
-          </a:p>
-        </p:txBody>
-      </p:sp>
-      <p:sp>
-        <p:nvSpPr>
-          <p:cNvPr id="47" name="Oval 46"/>
+          <p:cNvPr id="53" name="Rounded Rectangle 52"/>
           <p:cNvSpPr/>
           <p:nvPr/>
         </p:nvSpPr>
         <p:spPr>
           <a:xfrm>
-            <a:off x="8243316" y="3259836"/>
-            <a:ext cx="201168" cy="201168"/>
-          </a:xfrm>
-          <a:prstGeom prst="ellipse">
-            <a:avLst/>
-          </a:prstGeom>
-          <a:solidFill>
-            <a:srgbClr val="00754A"/>
-          </a:solidFill>
-          <a:ln>
-            <a:noFill/>
+            <a:off x="3291840" y="4663440"/>
+            <a:ext cx="2468880" cy="868680"/>
+          </a:xfrm>
+          <a:prstGeom prst="roundRect">
+            <a:avLst/>
+          </a:prstGeom>
+          <a:noFill/>
+          <a:ln w="12700">
+            <a:solidFill>
+              <a:srgbClr val="6B6B6B"/>
+            </a:solidFill>
           </a:ln>
         </p:spPr>
         <p:style>
@@ -7992,14 +8747,14 @@
       </p:sp>
       <p:sp>
         <p:nvSpPr>
-          <p:cNvPr id="48" name="TextBox 47"/>
-          <p:cNvSpPr txBox="1"/>
-          <p:nvPr/>
-        </p:nvSpPr>
-        <p:spPr>
-          <a:xfrm>
-            <a:off x="7338060" y="2697480"/>
-            <a:ext cx="2011680" cy="365760"/>
+          <p:cNvPr id="54" name="TextBox 53"/>
+          <p:cNvSpPr txBox="1"/>
+          <p:nvPr/>
+        </p:nvSpPr>
+        <p:spPr>
+          <a:xfrm>
+            <a:off x="3291840" y="4800600"/>
+            <a:ext cx="2468880" cy="640080"/>
           </a:xfrm>
           <a:prstGeom prst="rect">
             <a:avLst/>
@@ -8014,186 +8769,25 @@
           <a:p>
             <a:pPr algn="ctr"/>
             <a:r>
-              <a:rPr sz="2200" b="1" spc="-22">
-                <a:solidFill>
-                  <a:srgbClr val="006241"/>
-                </a:solidFill>
-                <a:latin typeface="Pretendard"/>
-              </a:rPr>
-              <a:t>2023</a:t>
-            </a:r>
-          </a:p>
-        </p:txBody>
-      </p:sp>
-      <p:sp>
-        <p:nvSpPr>
-          <p:cNvPr id="49" name="TextBox 48"/>
-          <p:cNvSpPr txBox="1"/>
-          <p:nvPr/>
-        </p:nvSpPr>
-        <p:spPr>
-          <a:xfrm>
-            <a:off x="7246620" y="3639312"/>
-            <a:ext cx="2194560" cy="822960"/>
-          </a:xfrm>
-          <a:prstGeom prst="rect">
-            <a:avLst/>
-          </a:prstGeom>
-          <a:noFill/>
-        </p:spPr>
-        <p:txBody>
-          <a:bodyPr wrap="square">
-            <a:spAutoFit/>
-          </a:bodyPr>
-          <a:lstStyle/>
-          <a:p>
-            <a:pPr algn="ctr"/>
-            <a:r>
-              <a:rPr sz="1400" b="0" spc="-14">
-                <a:solidFill>
-                  <a:srgbClr val="1F1F1F"/>
-                </a:solidFill>
-                <a:latin typeface="Pretendard"/>
-              </a:rPr>
-              <a:t>Two RCTs</a:t>
-            </a:r>
-          </a:p>
-          <a:p>
-            <a:pPr algn="ctr"/>
-            <a:r>
-              <a:rPr sz="1400" b="0" spc="-14">
-                <a:solidFill>
-                  <a:srgbClr val="1F1F1F"/>
-                </a:solidFill>
-                <a:latin typeface="Pretendard"/>
-              </a:rPr>
-              <a:t>completed</a:t>
-            </a:r>
-          </a:p>
-        </p:txBody>
-      </p:sp>
-      <p:sp>
-        <p:nvSpPr>
-          <p:cNvPr id="50" name="Oval 49"/>
-          <p:cNvSpPr/>
-          <p:nvPr/>
-        </p:nvSpPr>
-        <p:spPr>
-          <a:xfrm>
-            <a:off x="10506456" y="3259836"/>
-            <a:ext cx="201168" cy="201168"/>
-          </a:xfrm>
-          <a:prstGeom prst="ellipse">
-            <a:avLst/>
-          </a:prstGeom>
-          <a:solidFill>
-            <a:srgbClr val="00754A"/>
-          </a:solidFill>
-          <a:ln>
-            <a:noFill/>
-          </a:ln>
-        </p:spPr>
-        <p:style>
-          <a:lnRef idx="1">
-            <a:schemeClr val="accent1"/>
-          </a:lnRef>
-          <a:fillRef idx="3">
-            <a:schemeClr val="accent1"/>
-          </a:fillRef>
-          <a:effectRef idx="0">
-            <a:schemeClr val="accent1"/>
-          </a:effectRef>
-          <a:fontRef idx="minor">
-            <a:schemeClr val="lt1"/>
-          </a:fontRef>
-        </p:style>
-        <p:txBody>
-          <a:bodyPr rtlCol="0" anchor="ctr"/>
-          <a:lstStyle/>
-          <a:p>
-            <a:pPr algn="ctr"/>
-            <a:endParaRPr/>
-          </a:p>
-        </p:txBody>
-      </p:sp>
-      <p:sp>
-        <p:nvSpPr>
-          <p:cNvPr id="51" name="TextBox 50"/>
-          <p:cNvSpPr txBox="1"/>
-          <p:nvPr/>
-        </p:nvSpPr>
-        <p:spPr>
-          <a:xfrm>
-            <a:off x="9601200" y="2697480"/>
-            <a:ext cx="2011680" cy="365760"/>
-          </a:xfrm>
-          <a:prstGeom prst="rect">
-            <a:avLst/>
-          </a:prstGeom>
-          <a:noFill/>
-        </p:spPr>
-        <p:txBody>
-          <a:bodyPr wrap="square">
-            <a:spAutoFit/>
-          </a:bodyPr>
-          <a:lstStyle/>
-          <a:p>
-            <a:pPr algn="ctr"/>
-            <a:r>
-              <a:rPr sz="2200" b="1" spc="-22">
-                <a:solidFill>
-                  <a:srgbClr val="006241"/>
-                </a:solidFill>
-                <a:latin typeface="Pretendard"/>
-              </a:rPr>
-              <a:t>2025</a:t>
-            </a:r>
-          </a:p>
-        </p:txBody>
-      </p:sp>
-      <p:sp>
-        <p:nvSpPr>
-          <p:cNvPr id="52" name="TextBox 51"/>
-          <p:cNvSpPr txBox="1"/>
-          <p:nvPr/>
-        </p:nvSpPr>
-        <p:spPr>
-          <a:xfrm>
-            <a:off x="9509760" y="3639312"/>
-            <a:ext cx="2194560" cy="822960"/>
-          </a:xfrm>
-          <a:prstGeom prst="rect">
-            <a:avLst/>
-          </a:prstGeom>
-          <a:noFill/>
-        </p:spPr>
-        <p:txBody>
-          <a:bodyPr wrap="square">
-            <a:spAutoFit/>
-          </a:bodyPr>
-          <a:lstStyle/>
-          <a:p>
-            <a:pPr algn="ctr"/>
-            <a:r>
-              <a:rPr sz="1400" b="0" spc="-14">
-                <a:solidFill>
-                  <a:srgbClr val="1F1F1F"/>
-                </a:solidFill>
-                <a:latin typeface="Pretendard"/>
-              </a:rPr>
-              <a:t>Pooled</a:t>
-            </a:r>
-          </a:p>
-          <a:p>
-            <a:pPr algn="ctr"/>
-            <a:r>
-              <a:rPr sz="1400" b="0" spc="-14">
-                <a:solidFill>
-                  <a:srgbClr val="1F1F1F"/>
-                </a:solidFill>
-                <a:latin typeface="Pretendard"/>
-              </a:rPr>
-              <a:t>analyses</a:t>
+              <a:rPr sz="1500" b="0" spc="-15">
+                <a:solidFill>
+                  <a:srgbClr val="6B6B6B"/>
+                </a:solidFill>
+                <a:latin typeface="Pretendard"/>
+              </a:rPr>
+              <a:t>Excluded (n = NN)</a:t>
+            </a:r>
+          </a:p>
+          <a:p>
+            <a:pPr algn="ctr"/>
+            <a:r>
+              <a:rPr sz="1500" b="0" spc="-15">
+                <a:solidFill>
+                  <a:srgbClr val="6B6B6B"/>
+                </a:solidFill>
+                <a:latin typeface="Pretendard"/>
+              </a:rPr>
+              <a:t>– reason / criterion</a:t>
             </a:r>
           </a:p>
         </p:txBody>
@@ -8253,7 +8847,7 @@
                 </a:solidFill>
                 <a:latin typeface="Pretendard"/>
               </a:rPr>
-              <a:t>PATTERN K</a:t>
+              <a:t>PATTERN L</a:t>
             </a:r>
           </a:p>
         </p:txBody>
@@ -8317,7 +8911,7 @@
                 </a:solidFill>
                 <a:latin typeface="Pretendard"/>
               </a:rPr>
-              <a:t>Process Flow — CONSORT</a:t>
+              <a:t>Text Block — one editable text frame</a:t>
             </a:r>
           </a:p>
         </p:txBody>
@@ -8440,58 +9034,14 @@
       </p:sp>
       <p:sp>
         <p:nvSpPr>
-          <p:cNvPr id="37" name="Rounded Rectangle 36"/>
-          <p:cNvSpPr/>
-          <p:nvPr/>
-        </p:nvSpPr>
-        <p:spPr>
-          <a:xfrm>
-            <a:off x="502920" y="2834640"/>
-            <a:ext cx="2468880" cy="1325880"/>
-          </a:xfrm>
-          <a:prstGeom prst="roundRect">
-            <a:avLst/>
-          </a:prstGeom>
-          <a:noFill/>
-          <a:ln w="15875">
-            <a:solidFill>
-              <a:srgbClr val="00754A"/>
-            </a:solidFill>
-          </a:ln>
-        </p:spPr>
-        <p:style>
-          <a:lnRef idx="1">
-            <a:schemeClr val="accent1"/>
-          </a:lnRef>
-          <a:fillRef idx="3">
-            <a:schemeClr val="accent1"/>
-          </a:fillRef>
-          <a:effectRef idx="0">
-            <a:schemeClr val="accent1"/>
-          </a:effectRef>
-          <a:fontRef idx="minor">
-            <a:schemeClr val="lt1"/>
-          </a:fontRef>
-        </p:style>
-        <p:txBody>
-          <a:bodyPr rtlCol="0" anchor="ctr"/>
-          <a:lstStyle/>
-          <a:p>
-            <a:pPr algn="ctr"/>
-            <a:endParaRPr/>
-          </a:p>
-        </p:txBody>
-      </p:sp>
-      <p:sp>
-        <p:nvSpPr>
-          <p:cNvPr id="38" name="TextBox 37"/>
-          <p:cNvSpPr txBox="1"/>
-          <p:nvPr/>
-        </p:nvSpPr>
-        <p:spPr>
-          <a:xfrm>
-            <a:off x="502920" y="3154680"/>
-            <a:ext cx="2468880" cy="411480"/>
+          <p:cNvPr id="37" name="TextBox 36"/>
+          <p:cNvSpPr txBox="1"/>
+          <p:nvPr/>
+        </p:nvSpPr>
+        <p:spPr>
+          <a:xfrm>
+            <a:off x="640080" y="1554480"/>
+            <a:ext cx="10881360" cy="4709160"/>
           </a:xfrm>
           <a:prstGeom prst="rect">
             <a:avLst/>
@@ -8500,663 +9050,196 @@
         </p:spPr>
         <p:txBody>
           <a:bodyPr wrap="square">
-            <a:spAutoFit/>
-          </a:bodyPr>
-          <a:lstStyle/>
-          <a:p>
-            <a:pPr algn="ctr"/>
-            <a:r>
-              <a:rPr sz="1800" b="1" spc="-18">
+            <a:noAutofit/>
+          </a:bodyPr>
+          <a:lstStyle/>
+          <a:p>
+            <a:pPr marL="342900" indent="-342900">
+              <a:lnSpc>
+                <a:spcPct val="118000"/>
+              </a:lnSpc>
+              <a:spcBef>
+                <a:spcPts val="1400"/>
+              </a:spcBef>
+              <a:buClr>
+                <a:srgbClr val="00754A"/>
+              </a:buClr>
+              <a:buSzPct val="68000"/>
+              <a:buFont typeface="Arial"/>
+              <a:buChar char="●"/>
+            </a:pPr>
+            <a:r>
+              <a:rPr sz="2800" b="0" spc="-28">
                 <a:solidFill>
                   <a:srgbClr val="1F1F1F"/>
                 </a:solidFill>
                 <a:latin typeface="Pretendard"/>
               </a:rPr>
-              <a:t>Assessed</a:t>
-            </a:r>
-          </a:p>
-        </p:txBody>
-      </p:sp>
-      <p:sp>
-        <p:nvSpPr>
-          <p:cNvPr id="39" name="TextBox 38"/>
-          <p:cNvSpPr txBox="1"/>
-          <p:nvPr/>
-        </p:nvSpPr>
-        <p:spPr>
-          <a:xfrm>
-            <a:off x="502920" y="3611880"/>
-            <a:ext cx="2468880" cy="411480"/>
-          </a:xfrm>
-          <a:prstGeom prst="rect">
-            <a:avLst/>
-          </a:prstGeom>
-          <a:noFill/>
-        </p:spPr>
-        <p:txBody>
-          <a:bodyPr wrap="square">
-            <a:spAutoFit/>
-          </a:bodyPr>
-          <a:lstStyle/>
-          <a:p>
-            <a:pPr algn="ctr"/>
-            <a:r>
-              <a:rPr sz="1600" b="0" spc="-16">
+              <a:t>Primary point — the single message of this slide</a:t>
+            </a:r>
+          </a:p>
+          <a:p>
+            <a:pPr marL="342900" indent="-342900">
+              <a:lnSpc>
+                <a:spcPct val="118000"/>
+              </a:lnSpc>
+              <a:spcBef>
+                <a:spcPts val="1400"/>
+              </a:spcBef>
+              <a:buClr>
+                <a:srgbClr val="00754A"/>
+              </a:buClr>
+              <a:buSzPct val="68000"/>
+              <a:buFont typeface="Arial"/>
+              <a:buChar char="●"/>
+            </a:pPr>
+            <a:r>
+              <a:rPr sz="2800" b="0" spc="-28">
+                <a:solidFill>
+                  <a:srgbClr val="1F1F1F"/>
+                </a:solidFill>
+                <a:latin typeface="Pretendard"/>
+              </a:rPr>
+              <a:t>Supporting line with a </a:t>
+            </a:r>
+            <a:r>
+              <a:rPr sz="2800" b="1" spc="-28">
+                <a:solidFill>
+                  <a:srgbClr val="00754A"/>
+                </a:solidFill>
+                <a:latin typeface="Pretendard"/>
+              </a:rPr>
+              <a:t>key phrase</a:t>
+            </a:r>
+            <a:r>
+              <a:rPr sz="2800" b="0" spc="-28">
+                <a:solidFill>
+                  <a:srgbClr val="1F1F1F"/>
+                </a:solidFill>
+                <a:latin typeface="Pretendard"/>
+              </a:rPr>
+              <a:t> emphasised</a:t>
+            </a:r>
+          </a:p>
+          <a:p>
+            <a:pPr>
+              <a:lnSpc>
+                <a:spcPct val="55000"/>
+              </a:lnSpc>
+              <a:buNone/>
+            </a:pPr>
+            <a:endParaRPr sz="2800" b="0" spc="-28">
+              <a:solidFill>
+                <a:srgbClr val="1F1F1F"/>
+              </a:solidFill>
+              <a:latin typeface="Pretendard"/>
+            </a:endParaRPr>
+          </a:p>
+          <a:p>
+            <a:pPr marL="342900" indent="-342900">
+              <a:lnSpc>
+                <a:spcPct val="118000"/>
+              </a:lnSpc>
+              <a:spcBef>
+                <a:spcPts val="1400"/>
+              </a:spcBef>
+              <a:buClr>
+                <a:srgbClr val="00754A"/>
+              </a:buClr>
+              <a:buSzPct val="68000"/>
+              <a:buFont typeface="Arial"/>
+              <a:buChar char="●"/>
+            </a:pPr>
+            <a:r>
+              <a:rPr sz="3200" b="0" spc="-32">
+                <a:solidFill>
+                  <a:srgbClr val="1F1F1F"/>
+                </a:solidFill>
+                <a:latin typeface="Pretendard"/>
+              </a:rPr>
+              <a:t>A larger line when one statement needs weight</a:t>
+            </a:r>
+          </a:p>
+          <a:p>
+            <a:pPr marL="342900" indent="-342900">
+              <a:lnSpc>
+                <a:spcPct val="118000"/>
+              </a:lnSpc>
+              <a:spcBef>
+                <a:spcPts val="1400"/>
+              </a:spcBef>
+              <a:buClr>
+                <a:srgbClr val="00754A"/>
+              </a:buClr>
+              <a:buSzPct val="68000"/>
+              <a:buFont typeface="Arial"/>
+              <a:buChar char="●"/>
+            </a:pPr>
+            <a:r>
+              <a:rPr sz="2400" b="0" spc="-24">
                 <a:solidFill>
                   <a:srgbClr val="6B6B6B"/>
                 </a:solidFill>
                 <a:latin typeface="Pretendard"/>
               </a:rPr>
-              <a:t>n = NNN</a:t>
-            </a:r>
-          </a:p>
-        </p:txBody>
-      </p:sp>
-      <p:sp>
-        <p:nvSpPr>
-          <p:cNvPr id="40" name="Rounded Rectangle 39"/>
-          <p:cNvSpPr/>
-          <p:nvPr/>
-        </p:nvSpPr>
-        <p:spPr>
-          <a:xfrm>
-            <a:off x="3291840" y="2834640"/>
-            <a:ext cx="2468880" cy="1325880"/>
-          </a:xfrm>
-          <a:prstGeom prst="roundRect">
-            <a:avLst/>
-          </a:prstGeom>
-          <a:noFill/>
-          <a:ln w="15875">
-            <a:solidFill>
-              <a:srgbClr val="00754A"/>
-            </a:solidFill>
-          </a:ln>
-        </p:spPr>
-        <p:style>
-          <a:lnRef idx="1">
-            <a:schemeClr val="accent1"/>
-          </a:lnRef>
-          <a:fillRef idx="3">
-            <a:schemeClr val="accent1"/>
-          </a:fillRef>
-          <a:effectRef idx="0">
-            <a:schemeClr val="accent1"/>
-          </a:effectRef>
-          <a:fontRef idx="minor">
-            <a:schemeClr val="lt1"/>
-          </a:fontRef>
-        </p:style>
-        <p:txBody>
-          <a:bodyPr rtlCol="0" anchor="ctr"/>
-          <a:lstStyle/>
-          <a:p>
-            <a:pPr algn="ctr"/>
-            <a:endParaRPr/>
-          </a:p>
-        </p:txBody>
-      </p:sp>
-      <p:sp>
-        <p:nvSpPr>
-          <p:cNvPr id="41" name="TextBox 40"/>
-          <p:cNvSpPr txBox="1"/>
-          <p:nvPr/>
-        </p:nvSpPr>
-        <p:spPr>
-          <a:xfrm>
-            <a:off x="3291840" y="3154680"/>
-            <a:ext cx="2468880" cy="411480"/>
-          </a:xfrm>
-          <a:prstGeom prst="rect">
-            <a:avLst/>
-          </a:prstGeom>
-          <a:noFill/>
-        </p:spPr>
-        <p:txBody>
-          <a:bodyPr wrap="square">
-            <a:spAutoFit/>
-          </a:bodyPr>
-          <a:lstStyle/>
-          <a:p>
-            <a:pPr algn="ctr"/>
-            <a:r>
-              <a:rPr sz="1800" b="1" spc="-18">
+              <a:t>secondary detail, one step down</a:t>
+            </a:r>
+          </a:p>
+          <a:p>
+            <a:pPr>
+              <a:lnSpc>
+                <a:spcPct val="55000"/>
+              </a:lnSpc>
+              <a:buNone/>
+            </a:pPr>
+            <a:endParaRPr sz="2400" b="0" spc="-24">
+              <a:solidFill>
+                <a:srgbClr val="6B6B6B"/>
+              </a:solidFill>
+              <a:latin typeface="Pretendard"/>
+            </a:endParaRPr>
+          </a:p>
+          <a:p>
+            <a:pPr marL="342900" indent="-342900">
+              <a:lnSpc>
+                <a:spcPct val="118000"/>
+              </a:lnSpc>
+              <a:spcBef>
+                <a:spcPts val="1400"/>
+              </a:spcBef>
+              <a:buClr>
+                <a:srgbClr val="00754A"/>
+              </a:buClr>
+              <a:buSzPct val="68000"/>
+              <a:buFont typeface="Arial"/>
+              <a:buChar char="●"/>
+            </a:pPr>
+            <a:r>
+              <a:rPr sz="2800" b="0" spc="-28">
                 <a:solidFill>
                   <a:srgbClr val="1F1F1F"/>
                 </a:solidFill>
                 <a:latin typeface="Pretendard"/>
               </a:rPr>
-              <a:t>Randomized</a:t>
-            </a:r>
-          </a:p>
-        </p:txBody>
-      </p:sp>
-      <p:sp>
-        <p:nvSpPr>
-          <p:cNvPr id="42" name="TextBox 41"/>
-          <p:cNvSpPr txBox="1"/>
-          <p:nvPr/>
-        </p:nvSpPr>
-        <p:spPr>
-          <a:xfrm>
-            <a:off x="3291840" y="3611880"/>
-            <a:ext cx="2468880" cy="411480"/>
-          </a:xfrm>
-          <a:prstGeom prst="rect">
-            <a:avLst/>
-          </a:prstGeom>
-          <a:noFill/>
-        </p:spPr>
-        <p:txBody>
-          <a:bodyPr wrap="square">
-            <a:spAutoFit/>
-          </a:bodyPr>
-          <a:lstStyle/>
-          <a:p>
-            <a:pPr algn="ctr"/>
-            <a:r>
-              <a:rPr sz="1600" b="0" spc="-16">
-                <a:solidFill>
-                  <a:srgbClr val="6B6B6B"/>
-                </a:solidFill>
-                <a:latin typeface="Pretendard"/>
-              </a:rPr>
-              <a:t>n = NNN</a:t>
-            </a:r>
-          </a:p>
-        </p:txBody>
-      </p:sp>
-      <p:sp>
-        <p:nvSpPr>
-          <p:cNvPr id="43" name="Rounded Rectangle 42"/>
-          <p:cNvSpPr/>
-          <p:nvPr/>
-        </p:nvSpPr>
-        <p:spPr>
-          <a:xfrm>
-            <a:off x="6080760" y="2834640"/>
-            <a:ext cx="2468880" cy="1325880"/>
-          </a:xfrm>
-          <a:prstGeom prst="roundRect">
-            <a:avLst/>
-          </a:prstGeom>
-          <a:noFill/>
-          <a:ln w="15875">
-            <a:solidFill>
-              <a:srgbClr val="00754A"/>
-            </a:solidFill>
-          </a:ln>
-        </p:spPr>
-        <p:style>
-          <a:lnRef idx="1">
-            <a:schemeClr val="accent1"/>
-          </a:lnRef>
-          <a:fillRef idx="3">
-            <a:schemeClr val="accent1"/>
-          </a:fillRef>
-          <a:effectRef idx="0">
-            <a:schemeClr val="accent1"/>
-          </a:effectRef>
-          <a:fontRef idx="minor">
-            <a:schemeClr val="lt1"/>
-          </a:fontRef>
-        </p:style>
-        <p:txBody>
-          <a:bodyPr rtlCol="0" anchor="ctr"/>
-          <a:lstStyle/>
-          <a:p>
-            <a:pPr algn="ctr"/>
-            <a:endParaRPr/>
-          </a:p>
-        </p:txBody>
-      </p:sp>
-      <p:sp>
-        <p:nvSpPr>
-          <p:cNvPr id="44" name="TextBox 43"/>
-          <p:cNvSpPr txBox="1"/>
-          <p:nvPr/>
-        </p:nvSpPr>
-        <p:spPr>
-          <a:xfrm>
-            <a:off x="6080760" y="3154680"/>
-            <a:ext cx="2468880" cy="411480"/>
-          </a:xfrm>
-          <a:prstGeom prst="rect">
-            <a:avLst/>
-          </a:prstGeom>
-          <a:noFill/>
-        </p:spPr>
-        <p:txBody>
-          <a:bodyPr wrap="square">
-            <a:spAutoFit/>
-          </a:bodyPr>
-          <a:lstStyle/>
-          <a:p>
-            <a:pPr algn="ctr"/>
-            <a:r>
-              <a:rPr sz="1800" b="1" spc="-18">
+              <a:t>Closing point — </a:t>
+            </a:r>
+            <a:r>
+              <a:rPr sz="2800" b="1" spc="-28">
+                <a:solidFill>
+                  <a:srgbClr val="00754A"/>
+                </a:solidFill>
+                <a:latin typeface="Pretendard"/>
+              </a:rPr>
+              <a:t>the conclusion</a:t>
+            </a:r>
+            <a:r>
+              <a:rPr sz="2800" b="0" spc="-28">
                 <a:solidFill>
                   <a:srgbClr val="1F1F1F"/>
                 </a:solidFill>
                 <a:latin typeface="Pretendard"/>
               </a:rPr>
-              <a:t>Allocated</a:t>
-            </a:r>
-          </a:p>
-        </p:txBody>
-      </p:sp>
-      <p:sp>
-        <p:nvSpPr>
-          <p:cNvPr id="45" name="TextBox 44"/>
-          <p:cNvSpPr txBox="1"/>
-          <p:nvPr/>
-        </p:nvSpPr>
-        <p:spPr>
-          <a:xfrm>
-            <a:off x="6080760" y="3611880"/>
-            <a:ext cx="2468880" cy="411480"/>
-          </a:xfrm>
-          <a:prstGeom prst="rect">
-            <a:avLst/>
-          </a:prstGeom>
-          <a:noFill/>
-        </p:spPr>
-        <p:txBody>
-          <a:bodyPr wrap="square">
-            <a:spAutoFit/>
-          </a:bodyPr>
-          <a:lstStyle/>
-          <a:p>
-            <a:pPr algn="ctr"/>
-            <a:r>
-              <a:rPr sz="1600" b="0" spc="-16">
-                <a:solidFill>
-                  <a:srgbClr val="6B6B6B"/>
-                </a:solidFill>
-                <a:latin typeface="Pretendard"/>
-              </a:rPr>
-              <a:t>n = NN / NN</a:t>
-            </a:r>
-          </a:p>
-        </p:txBody>
-      </p:sp>
-      <p:sp>
-        <p:nvSpPr>
-          <p:cNvPr id="46" name="Rounded Rectangle 45"/>
-          <p:cNvSpPr/>
-          <p:nvPr/>
-        </p:nvSpPr>
-        <p:spPr>
-          <a:xfrm>
-            <a:off x="8869680" y="2834640"/>
-            <a:ext cx="2468880" cy="1325880"/>
-          </a:xfrm>
-          <a:prstGeom prst="roundRect">
-            <a:avLst/>
-          </a:prstGeom>
-          <a:noFill/>
-          <a:ln w="15875">
-            <a:solidFill>
-              <a:srgbClr val="00754A"/>
-            </a:solidFill>
-          </a:ln>
-        </p:spPr>
-        <p:style>
-          <a:lnRef idx="1">
-            <a:schemeClr val="accent1"/>
-          </a:lnRef>
-          <a:fillRef idx="3">
-            <a:schemeClr val="accent1"/>
-          </a:fillRef>
-          <a:effectRef idx="0">
-            <a:schemeClr val="accent1"/>
-          </a:effectRef>
-          <a:fontRef idx="minor">
-            <a:schemeClr val="lt1"/>
-          </a:fontRef>
-        </p:style>
-        <p:txBody>
-          <a:bodyPr rtlCol="0" anchor="ctr"/>
-          <a:lstStyle/>
-          <a:p>
-            <a:pPr algn="ctr"/>
-            <a:endParaRPr/>
-          </a:p>
-        </p:txBody>
-      </p:sp>
-      <p:sp>
-        <p:nvSpPr>
-          <p:cNvPr id="47" name="TextBox 46"/>
-          <p:cNvSpPr txBox="1"/>
-          <p:nvPr/>
-        </p:nvSpPr>
-        <p:spPr>
-          <a:xfrm>
-            <a:off x="8869680" y="3154680"/>
-            <a:ext cx="2468880" cy="411480"/>
-          </a:xfrm>
-          <a:prstGeom prst="rect">
-            <a:avLst/>
-          </a:prstGeom>
-          <a:noFill/>
-        </p:spPr>
-        <p:txBody>
-          <a:bodyPr wrap="square">
-            <a:spAutoFit/>
-          </a:bodyPr>
-          <a:lstStyle/>
-          <a:p>
-            <a:pPr algn="ctr"/>
-            <a:r>
-              <a:rPr sz="1800" b="1" spc="-18">
-                <a:solidFill>
-                  <a:srgbClr val="1F1F1F"/>
-                </a:solidFill>
-                <a:latin typeface="Pretendard"/>
-              </a:rPr>
-              <a:t>Analyzed</a:t>
-            </a:r>
-          </a:p>
-        </p:txBody>
-      </p:sp>
-      <p:sp>
-        <p:nvSpPr>
-          <p:cNvPr id="48" name="TextBox 47"/>
-          <p:cNvSpPr txBox="1"/>
-          <p:nvPr/>
-        </p:nvSpPr>
-        <p:spPr>
-          <a:xfrm>
-            <a:off x="8869680" y="3611880"/>
-            <a:ext cx="2468880" cy="411480"/>
-          </a:xfrm>
-          <a:prstGeom prst="rect">
-            <a:avLst/>
-          </a:prstGeom>
-          <a:noFill/>
-        </p:spPr>
-        <p:txBody>
-          <a:bodyPr wrap="square">
-            <a:spAutoFit/>
-          </a:bodyPr>
-          <a:lstStyle/>
-          <a:p>
-            <a:pPr algn="ctr"/>
-            <a:r>
-              <a:rPr sz="1600" b="0" spc="-16">
-                <a:solidFill>
-                  <a:srgbClr val="6B6B6B"/>
-                </a:solidFill>
-                <a:latin typeface="Pretendard"/>
-              </a:rPr>
-              <a:t>n = NN / NN</a:t>
-            </a:r>
-          </a:p>
-        </p:txBody>
-      </p:sp>
-      <p:sp>
-        <p:nvSpPr>
-          <p:cNvPr id="49" name="Right Arrow 48"/>
-          <p:cNvSpPr/>
-          <p:nvPr/>
-        </p:nvSpPr>
-        <p:spPr>
-          <a:xfrm>
-            <a:off x="2990088" y="3364992"/>
-            <a:ext cx="256032" cy="274320"/>
-          </a:xfrm>
-          <a:prstGeom prst="rightArrow">
-            <a:avLst/>
-          </a:prstGeom>
-          <a:solidFill>
-            <a:srgbClr val="00754A"/>
-          </a:solidFill>
-          <a:ln>
-            <a:noFill/>
-          </a:ln>
-        </p:spPr>
-        <p:style>
-          <a:lnRef idx="1">
-            <a:schemeClr val="accent1"/>
-          </a:lnRef>
-          <a:fillRef idx="3">
-            <a:schemeClr val="accent1"/>
-          </a:fillRef>
-          <a:effectRef idx="0">
-            <a:schemeClr val="accent1"/>
-          </a:effectRef>
-          <a:fontRef idx="minor">
-            <a:schemeClr val="lt1"/>
-          </a:fontRef>
-        </p:style>
-        <p:txBody>
-          <a:bodyPr rtlCol="0" anchor="ctr"/>
-          <a:lstStyle/>
-          <a:p>
-            <a:pPr algn="ctr"/>
-            <a:endParaRPr/>
-          </a:p>
-        </p:txBody>
-      </p:sp>
-      <p:sp>
-        <p:nvSpPr>
-          <p:cNvPr id="50" name="Right Arrow 49"/>
-          <p:cNvSpPr/>
-          <p:nvPr/>
-        </p:nvSpPr>
-        <p:spPr>
-          <a:xfrm>
-            <a:off x="5779008" y="3364992"/>
-            <a:ext cx="256032" cy="274320"/>
-          </a:xfrm>
-          <a:prstGeom prst="rightArrow">
-            <a:avLst/>
-          </a:prstGeom>
-          <a:solidFill>
-            <a:srgbClr val="00754A"/>
-          </a:solidFill>
-          <a:ln>
-            <a:noFill/>
-          </a:ln>
-        </p:spPr>
-        <p:style>
-          <a:lnRef idx="1">
-            <a:schemeClr val="accent1"/>
-          </a:lnRef>
-          <a:fillRef idx="3">
-            <a:schemeClr val="accent1"/>
-          </a:fillRef>
-          <a:effectRef idx="0">
-            <a:schemeClr val="accent1"/>
-          </a:effectRef>
-          <a:fontRef idx="minor">
-            <a:schemeClr val="lt1"/>
-          </a:fontRef>
-        </p:style>
-        <p:txBody>
-          <a:bodyPr rtlCol="0" anchor="ctr"/>
-          <a:lstStyle/>
-          <a:p>
-            <a:pPr algn="ctr"/>
-            <a:endParaRPr/>
-          </a:p>
-        </p:txBody>
-      </p:sp>
-      <p:sp>
-        <p:nvSpPr>
-          <p:cNvPr id="51" name="Right Arrow 50"/>
-          <p:cNvSpPr/>
-          <p:nvPr/>
-        </p:nvSpPr>
-        <p:spPr>
-          <a:xfrm>
-            <a:off x="8567928" y="3364992"/>
-            <a:ext cx="256032" cy="274320"/>
-          </a:xfrm>
-          <a:prstGeom prst="rightArrow">
-            <a:avLst/>
-          </a:prstGeom>
-          <a:solidFill>
-            <a:srgbClr val="00754A"/>
-          </a:solidFill>
-          <a:ln>
-            <a:noFill/>
-          </a:ln>
-        </p:spPr>
-        <p:style>
-          <a:lnRef idx="1">
-            <a:schemeClr val="accent1"/>
-          </a:lnRef>
-          <a:fillRef idx="3">
-            <a:schemeClr val="accent1"/>
-          </a:fillRef>
-          <a:effectRef idx="0">
-            <a:schemeClr val="accent1"/>
-          </a:effectRef>
-          <a:fontRef idx="minor">
-            <a:schemeClr val="lt1"/>
-          </a:fontRef>
-        </p:style>
-        <p:txBody>
-          <a:bodyPr rtlCol="0" anchor="ctr"/>
-          <a:lstStyle/>
-          <a:p>
-            <a:pPr algn="ctr"/>
-            <a:endParaRPr/>
-          </a:p>
-        </p:txBody>
-      </p:sp>
-      <p:sp>
-        <p:nvSpPr>
-          <p:cNvPr id="52" name="Down Arrow 51"/>
-          <p:cNvSpPr/>
-          <p:nvPr/>
-        </p:nvSpPr>
-        <p:spPr>
-          <a:xfrm>
-            <a:off x="4434840" y="4297680"/>
-            <a:ext cx="201168" cy="320040"/>
-          </a:xfrm>
-          <a:prstGeom prst="downArrow">
-            <a:avLst/>
-          </a:prstGeom>
-          <a:solidFill>
-            <a:srgbClr val="6B6B6B"/>
-          </a:solidFill>
-          <a:ln>
-            <a:noFill/>
-          </a:ln>
-        </p:spPr>
-        <p:style>
-          <a:lnRef idx="1">
-            <a:schemeClr val="accent1"/>
-          </a:lnRef>
-          <a:fillRef idx="3">
-            <a:schemeClr val="accent1"/>
-          </a:fillRef>
-          <a:effectRef idx="0">
-            <a:schemeClr val="accent1"/>
-          </a:effectRef>
-          <a:fontRef idx="minor">
-            <a:schemeClr val="lt1"/>
-          </a:fontRef>
-        </p:style>
-        <p:txBody>
-          <a:bodyPr rtlCol="0" anchor="ctr"/>
-          <a:lstStyle/>
-          <a:p>
-            <a:pPr algn="ctr"/>
-            <a:endParaRPr/>
-          </a:p>
-        </p:txBody>
-      </p:sp>
-      <p:sp>
-        <p:nvSpPr>
-          <p:cNvPr id="53" name="Rounded Rectangle 52"/>
-          <p:cNvSpPr/>
-          <p:nvPr/>
-        </p:nvSpPr>
-        <p:spPr>
-          <a:xfrm>
-            <a:off x="3291840" y="4663440"/>
-            <a:ext cx="2468880" cy="868680"/>
-          </a:xfrm>
-          <a:prstGeom prst="roundRect">
-            <a:avLst/>
-          </a:prstGeom>
-          <a:noFill/>
-          <a:ln w="12700">
-            <a:solidFill>
-              <a:srgbClr val="6B6B6B"/>
-            </a:solidFill>
-          </a:ln>
-        </p:spPr>
-        <p:style>
-          <a:lnRef idx="1">
-            <a:schemeClr val="accent1"/>
-          </a:lnRef>
-          <a:fillRef idx="3">
-            <a:schemeClr val="accent1"/>
-          </a:fillRef>
-          <a:effectRef idx="0">
-            <a:schemeClr val="accent1"/>
-          </a:effectRef>
-          <a:fontRef idx="minor">
-            <a:schemeClr val="lt1"/>
-          </a:fontRef>
-        </p:style>
-        <p:txBody>
-          <a:bodyPr rtlCol="0" anchor="ctr"/>
-          <a:lstStyle/>
-          <a:p>
-            <a:pPr algn="ctr"/>
-            <a:endParaRPr/>
-          </a:p>
-        </p:txBody>
-      </p:sp>
-      <p:sp>
-        <p:nvSpPr>
-          <p:cNvPr id="54" name="TextBox 53"/>
-          <p:cNvSpPr txBox="1"/>
-          <p:nvPr/>
-        </p:nvSpPr>
-        <p:spPr>
-          <a:xfrm>
-            <a:off x="3291840" y="4800600"/>
-            <a:ext cx="2468880" cy="640080"/>
-          </a:xfrm>
-          <a:prstGeom prst="rect">
-            <a:avLst/>
-          </a:prstGeom>
-          <a:noFill/>
-        </p:spPr>
-        <p:txBody>
-          <a:bodyPr wrap="square">
-            <a:spAutoFit/>
-          </a:bodyPr>
-          <a:lstStyle/>
-          <a:p>
-            <a:pPr algn="ctr"/>
-            <a:r>
-              <a:rPr sz="1500" b="0" spc="-15">
-                <a:solidFill>
-                  <a:srgbClr val="6B6B6B"/>
-                </a:solidFill>
-                <a:latin typeface="Pretendard"/>
-              </a:rPr>
-              <a:t>Excluded (n = NN)</a:t>
-            </a:r>
-          </a:p>
-          <a:p>
-            <a:pPr algn="ctr"/>
-            <a:r>
-              <a:rPr sz="1500" b="0" spc="-15">
-                <a:solidFill>
-                  <a:srgbClr val="6B6B6B"/>
-                </a:solidFill>
-                <a:latin typeface="Pretendard"/>
-              </a:rPr>
-              <a:t>– reason / criterion</a:t>
+              <a:t> in bold</a:t>
             </a:r>
           </a:p>
         </p:txBody>
@@ -9172,6 +9255,14 @@
 <file path=ppt/slides/slide15.xml><?xml version="1.0" encoding="utf-8"?>
 <p:sld xmlns:a="http://schemas.openxmlformats.org/drawingml/2006/main" xmlns:r="http://schemas.openxmlformats.org/officeDocument/2006/relationships" xmlns:p="http://schemas.openxmlformats.org/presentationml/2006/main">
   <p:cSld>
+    <p:bg>
+      <p:bgPr>
+        <a:solidFill>
+          <a:srgbClr val="F2F0EB"/>
+        </a:solidFill>
+        <a:effectLst/>
+      </p:bgPr>
+    </p:bg>
     <p:spTree>
       <p:nvGrpSpPr>
         <p:cNvPr id="1" name=""/>
@@ -9188,42 +9279,95 @@
       </p:grpSpPr>
       <p:sp>
         <p:nvSpPr>
-          <p:cNvPr id="2" name="TextBox 1"/>
-          <p:cNvSpPr txBox="1"/>
-          <p:nvPr/>
-        </p:nvSpPr>
-        <p:spPr>
-          <a:xfrm>
-            <a:off x="138257" y="123444"/>
-            <a:ext cx="5486400" cy="256032"/>
-          </a:xfrm>
-          <a:prstGeom prst="rect">
-            <a:avLst/>
-          </a:prstGeom>
-          <a:noFill/>
-        </p:spPr>
-        <p:txBody>
-          <a:bodyPr wrap="square" lIns="0" tIns="0" rIns="0" bIns="0" anchor="t">
-            <a:spAutoFit/>
-          </a:bodyPr>
-          <a:lstStyle/>
-          <a:p>
-            <a:pPr algn="l"/>
-            <a:r>
-              <a:rPr sz="1300" b="1" i="0" spc="-13">
-                <a:solidFill>
-                  <a:srgbClr val="8E8E93"/>
-                </a:solidFill>
-                <a:latin typeface="Pretendard"/>
-              </a:rPr>
-              <a:t>PATTERN L</a:t>
-            </a:r>
+          <p:cNvPr id="2" name="Rectangle 1"/>
+          <p:cNvSpPr/>
+          <p:nvPr/>
+        </p:nvSpPr>
+        <p:spPr>
+          <a:xfrm>
+            <a:off x="0" y="0"/>
+            <a:ext cx="64008" cy="6858000"/>
+          </a:xfrm>
+          <a:prstGeom prst="rect">
+            <a:avLst/>
+          </a:prstGeom>
+          <a:solidFill>
+            <a:srgbClr val="00754A"/>
+          </a:solidFill>
+          <a:ln>
+            <a:noFill/>
+          </a:ln>
+        </p:spPr>
+        <p:style>
+          <a:lnRef idx="1">
+            <a:schemeClr val="accent1"/>
+          </a:lnRef>
+          <a:fillRef idx="3">
+            <a:schemeClr val="accent1"/>
+          </a:fillRef>
+          <a:effectRef idx="0">
+            <a:schemeClr val="accent1"/>
+          </a:effectRef>
+          <a:fontRef idx="minor">
+            <a:schemeClr val="lt1"/>
+          </a:fontRef>
+        </p:style>
+        <p:txBody>
+          <a:bodyPr rtlCol="0" anchor="ctr"/>
+          <a:lstStyle/>
+          <a:p>
+            <a:pPr algn="ctr"/>
+            <a:endParaRPr/>
+          </a:p>
+        </p:txBody>
+      </p:sp>
+      <p:sp>
+        <p:nvSpPr>
+          <p:cNvPr id="3" name="Rectangle 2"/>
+          <p:cNvSpPr/>
+          <p:nvPr/>
+        </p:nvSpPr>
+        <p:spPr>
+          <a:xfrm>
+            <a:off x="6688836" y="0"/>
+            <a:ext cx="5472684" cy="6858000"/>
+          </a:xfrm>
+          <a:prstGeom prst="rect">
+            <a:avLst/>
+          </a:prstGeom>
+          <a:solidFill>
+            <a:srgbClr val="F2F0EB"/>
+          </a:solidFill>
+          <a:ln>
+            <a:noFill/>
+          </a:ln>
+        </p:spPr>
+        <p:style>
+          <a:lnRef idx="1">
+            <a:schemeClr val="accent1"/>
+          </a:lnRef>
+          <a:fillRef idx="3">
+            <a:schemeClr val="accent1"/>
+          </a:fillRef>
+          <a:effectRef idx="0">
+            <a:schemeClr val="accent1"/>
+          </a:effectRef>
+          <a:fontRef idx="minor">
+            <a:schemeClr val="lt1"/>
+          </a:fontRef>
+        </p:style>
+        <p:txBody>
+          <a:bodyPr rtlCol="0" anchor="ctr"/>
+          <a:lstStyle/>
+          <a:p>
+            <a:pPr algn="ctr"/>
+            <a:endParaRPr/>
           </a:p>
         </p:txBody>
       </p:sp>
       <p:pic>
         <p:nvPicPr>
-          <p:cNvPr id="3" name="Picture 2" descr="logo.png"/>
+          <p:cNvPr id="4" name="Picture 3" descr="logo.png"/>
           <p:cNvPicPr>
             <a:picLocks noChangeAspect="1"/>
           </p:cNvPicPr>
@@ -9248,14 +9392,14 @@
       </p:pic>
       <p:sp>
         <p:nvSpPr>
-          <p:cNvPr id="4" name="TextBox 3"/>
-          <p:cNvSpPr txBox="1"/>
-          <p:nvPr/>
-        </p:nvSpPr>
-        <p:spPr>
-          <a:xfrm>
-            <a:off x="251460" y="436260"/>
-            <a:ext cx="10972800" cy="457200"/>
+          <p:cNvPr id="5" name="TextBox 4"/>
+          <p:cNvSpPr txBox="1"/>
+          <p:nvPr/>
+        </p:nvSpPr>
+        <p:spPr>
+          <a:xfrm>
+            <a:off x="548640" y="2286000"/>
+            <a:ext cx="8229600" cy="1463040"/>
           </a:xfrm>
           <a:prstGeom prst="rect">
             <a:avLst/>
@@ -9270,39 +9414,72 @@
           <a:p>
             <a:pPr algn="l">
               <a:lnSpc>
-                <a:spcPct val="120000"/>
+                <a:spcPct val="110000"/>
               </a:lnSpc>
             </a:pPr>
             <a:r>
-              <a:rPr sz="3200" b="1" i="0" spc="-32">
+              <a:rPr sz="7200" b="1" i="0" spc="-72">
                 <a:solidFill>
                   <a:srgbClr val="006241"/>
                 </a:solidFill>
                 <a:latin typeface="Pretendard"/>
               </a:rPr>
-              <a:t>Text Block — one editable text frame</a:t>
-            </a:r>
-          </a:p>
-        </p:txBody>
-      </p:sp>
-      <p:sp>
-        <p:nvSpPr>
-          <p:cNvPr id="6" name="Rounded Rectangle 5"/>
+              <a:t>Thank you</a:t>
+            </a:r>
+          </a:p>
+        </p:txBody>
+      </p:sp>
+      <p:sp>
+        <p:nvSpPr>
+          <p:cNvPr id="6" name="TextBox 5"/>
+          <p:cNvSpPr txBox="1"/>
+          <p:nvPr/>
+        </p:nvSpPr>
+        <p:spPr>
+          <a:xfrm>
+            <a:off x="548640" y="3931920"/>
+            <a:ext cx="8229600" cy="365760"/>
+          </a:xfrm>
+          <a:prstGeom prst="rect">
+            <a:avLst/>
+          </a:prstGeom>
+          <a:noFill/>
+        </p:spPr>
+        <p:txBody>
+          <a:bodyPr wrap="square" lIns="0" tIns="0" rIns="0" bIns="0" anchor="t">
+            <a:spAutoFit/>
+          </a:bodyPr>
+          <a:lstStyle/>
+          <a:p>
+            <a:pPr algn="l"/>
+            <a:r>
+              <a:rPr sz="2000" b="0" i="1" spc="-20">
+                <a:solidFill>
+                  <a:srgbClr val="6B6B6B"/>
+                </a:solidFill>
+                <a:latin typeface="Pretendard"/>
+              </a:rPr>
+              <a:t>Questions and discussion</a:t>
+            </a:r>
+          </a:p>
+        </p:txBody>
+      </p:sp>
+      <p:sp>
+        <p:nvSpPr>
+          <p:cNvPr id="7" name="Rectangle 6"/>
           <p:cNvSpPr/>
           <p:nvPr/>
         </p:nvSpPr>
         <p:spPr>
           <a:xfrm>
-            <a:off x="251642" y="1290309"/>
-            <a:ext cx="11699382" cy="5227350"/>
-          </a:xfrm>
-          <a:prstGeom prst="roundRect">
-            <a:avLst>
-              <a:gd name="adj" fmla="val 2099"/>
-            </a:avLst>
+            <a:off x="548640" y="4572000"/>
+            <a:ext cx="1645920" cy="36576"/>
+          </a:xfrm>
+          <a:prstGeom prst="rect">
+            <a:avLst/>
           </a:prstGeom>
           <a:solidFill>
-            <a:srgbClr val="FFFFFF"/>
+            <a:srgbClr val="00754A"/>
           </a:solidFill>
           <a:ln>
             <a:noFill/>
@@ -9333,14 +9510,14 @@
       </p:sp>
       <p:sp>
         <p:nvSpPr>
-          <p:cNvPr id="35" name="TextBox 34"/>
-          <p:cNvSpPr txBox="1"/>
-          <p:nvPr/>
-        </p:nvSpPr>
-        <p:spPr>
-          <a:xfrm>
-            <a:off x="138257" y="6620256"/>
-            <a:ext cx="548640" cy="228600"/>
+          <p:cNvPr id="8" name="TextBox 7"/>
+          <p:cNvSpPr txBox="1"/>
+          <p:nvPr/>
+        </p:nvSpPr>
+        <p:spPr>
+          <a:xfrm>
+            <a:off x="6866503" y="5102352"/>
+            <a:ext cx="4572000" cy="310896"/>
           </a:xfrm>
           <a:prstGeom prst="rect">
             <a:avLst/>
@@ -9353,262 +9530,85 @@
           </a:bodyPr>
           <a:lstStyle/>
           <a:p>
+            <a:pPr algn="r"/>
+            <a:r>
+              <a:rPr sz="1500" b="0" i="0" spc="-15">
+                <a:solidFill>
+                  <a:srgbClr val="6B6B6B"/>
+                </a:solidFill>
+                <a:latin typeface="Pretendard"/>
+              </a:rPr>
+              <a:t>Seoul National Univ. Bundang Hospital</a:t>
+            </a:r>
+          </a:p>
+        </p:txBody>
+      </p:sp>
+      <p:sp>
+        <p:nvSpPr>
+          <p:cNvPr id="9" name="TextBox 8"/>
+          <p:cNvSpPr txBox="1"/>
+          <p:nvPr/>
+        </p:nvSpPr>
+        <p:spPr>
+          <a:xfrm>
+            <a:off x="6866503" y="5477621"/>
+            <a:ext cx="4572000" cy="411480"/>
+          </a:xfrm>
+          <a:prstGeom prst="rect">
+            <a:avLst/>
+          </a:prstGeom>
+          <a:noFill/>
+        </p:spPr>
+        <p:txBody>
+          <a:bodyPr wrap="square" lIns="0" tIns="0" rIns="0" bIns="0" anchor="t">
+            <a:spAutoFit/>
+          </a:bodyPr>
+          <a:lstStyle/>
+          <a:p>
+            <a:pPr algn="r"/>
+            <a:r>
+              <a:rPr sz="2200" b="1" i="0" spc="-22">
+                <a:solidFill>
+                  <a:srgbClr val="1F1F1F"/>
+                </a:solidFill>
+                <a:latin typeface="Pretendard"/>
+              </a:rPr>
+              <a:t>Sang-Min Park, MD, PhD</a:t>
+            </a:r>
+          </a:p>
+        </p:txBody>
+      </p:sp>
+      <p:sp>
+        <p:nvSpPr>
+          <p:cNvPr id="10" name="TextBox 9"/>
+          <p:cNvSpPr txBox="1"/>
+          <p:nvPr/>
+        </p:nvSpPr>
+        <p:spPr>
+          <a:xfrm>
+            <a:off x="272216" y="6378122"/>
+            <a:ext cx="7315200" cy="384048"/>
+          </a:xfrm>
+          <a:prstGeom prst="rect">
+            <a:avLst/>
+          </a:prstGeom>
+          <a:noFill/>
+        </p:spPr>
+        <p:txBody>
+          <a:bodyPr wrap="square" lIns="0" tIns="0" rIns="0" bIns="0" anchor="t">
+            <a:spAutoFit/>
+          </a:bodyPr>
+          <a:lstStyle/>
+          <a:p>
             <a:pPr algn="l"/>
             <a:r>
-              <a:rPr sz="1100" b="0" i="0" spc="-11">
-                <a:solidFill>
-                  <a:srgbClr val="8E8E93"/>
-                </a:solidFill>
-                <a:latin typeface="Pretendard"/>
-              </a:rPr>
-              <a:t>15</a:t>
-            </a:r>
-          </a:p>
-        </p:txBody>
-      </p:sp>
-      <p:sp>
-        <p:nvSpPr>
-          <p:cNvPr id="36" name="TextBox 35"/>
-          <p:cNvSpPr txBox="1"/>
-          <p:nvPr/>
-        </p:nvSpPr>
-        <p:spPr>
-          <a:xfrm>
-            <a:off x="6567403" y="6617421"/>
-            <a:ext cx="5486400" cy="228600"/>
-          </a:xfrm>
-          <a:prstGeom prst="rect">
-            <a:avLst/>
-          </a:prstGeom>
-          <a:noFill/>
-        </p:spPr>
-        <p:txBody>
-          <a:bodyPr wrap="square" lIns="0" tIns="0" rIns="0" bIns="0" anchor="t">
-            <a:spAutoFit/>
-          </a:bodyPr>
-          <a:lstStyle/>
-          <a:p>
-            <a:pPr algn="r"/>
-            <a:r>
-              <a:rPr sz="1200" b="0" i="0" spc="-12">
-                <a:solidFill>
-                  <a:srgbClr val="8E8E93"/>
-                </a:solidFill>
-                <a:latin typeface="Pretendard"/>
-              </a:rPr>
-              <a:t>Source: study cohort  ·  n = NN</a:t>
-            </a:r>
-          </a:p>
-        </p:txBody>
-      </p:sp>
-      <p:sp>
-        <p:nvSpPr>
-          <p:cNvPr id="37" name="TextBox 36"/>
-          <p:cNvSpPr txBox="1"/>
-          <p:nvPr/>
-        </p:nvSpPr>
-        <p:spPr>
-          <a:xfrm>
-            <a:off x="640080" y="1554480"/>
-            <a:ext cx="10881360" cy="4709160"/>
-          </a:xfrm>
-          <a:prstGeom prst="rect">
-            <a:avLst/>
-          </a:prstGeom>
-          <a:noFill/>
-        </p:spPr>
-        <p:txBody>
-          <a:bodyPr wrap="square">
-            <a:noAutofit/>
-          </a:bodyPr>
-          <a:lstStyle/>
-          <a:p>
-            <a:pPr marL="342900" indent="-342900">
-              <a:lnSpc>
-                <a:spcPct val="118000"/>
-              </a:lnSpc>
-              <a:spcBef>
-                <a:spcPts val="1400"/>
-              </a:spcBef>
-              <a:buClr>
-                <a:srgbClr val="00754A"/>
-              </a:buClr>
-              <a:buSzPct val="68000"/>
-              <a:buFont typeface="Arial"/>
-              <a:buChar char="●"/>
-            </a:pPr>
-            <a:r>
-              <a:rPr sz="2800" b="0" spc="-28">
-                <a:solidFill>
-                  <a:srgbClr val="1F1F1F"/>
-                </a:solidFill>
-                <a:latin typeface="Pretendard"/>
-              </a:rPr>
-              <a:t>Primary point — the single message of this slide</a:t>
-            </a:r>
-          </a:p>
-          <a:p>
-            <a:pPr marL="342900" indent="-342900">
-              <a:lnSpc>
-                <a:spcPct val="118000"/>
-              </a:lnSpc>
-              <a:spcBef>
-                <a:spcPts val="1400"/>
-              </a:spcBef>
-              <a:buClr>
-                <a:srgbClr val="00754A"/>
-              </a:buClr>
-              <a:buSzPct val="68000"/>
-              <a:buFont typeface="Arial"/>
-              <a:buChar char="●"/>
-            </a:pPr>
-            <a:r>
-              <a:rPr sz="2800" b="0" spc="-28">
-                <a:solidFill>
-                  <a:srgbClr val="1F1F1F"/>
-                </a:solidFill>
-                <a:latin typeface="Pretendard"/>
-              </a:rPr>
-              <a:t>Supporting line with a </a:t>
-            </a:r>
-            <a:r>
-              <a:rPr sz="2800" b="1" spc="-28">
-                <a:solidFill>
-                  <a:srgbClr val="00754A"/>
-                </a:solidFill>
-                <a:latin typeface="Pretendard"/>
-              </a:rPr>
-              <a:t>key phrase</a:t>
-            </a:r>
-            <a:r>
-              <a:rPr sz="2800" b="0" spc="-28">
-                <a:solidFill>
-                  <a:srgbClr val="1F1F1F"/>
-                </a:solidFill>
-                <a:latin typeface="Pretendard"/>
-              </a:rPr>
-              <a:t> emphasised</a:t>
-            </a:r>
-          </a:p>
-          <a:p>
-            <a:pPr>
-              <a:lnSpc>
-                <a:spcPct val="55000"/>
-              </a:lnSpc>
-              <a:buNone/>
-            </a:pPr>
-            <a:endParaRPr sz="2800" b="0" spc="-28">
-              <a:solidFill>
-                <a:srgbClr val="1F1F1F"/>
-              </a:solidFill>
-              <a:latin typeface="Pretendard"/>
-            </a:endParaRPr>
-          </a:p>
-          <a:p>
-            <a:pPr marL="342900" indent="-342900">
-              <a:lnSpc>
-                <a:spcPct val="118000"/>
-              </a:lnSpc>
-              <a:spcBef>
-                <a:spcPts val="1400"/>
-              </a:spcBef>
-              <a:buClr>
-                <a:srgbClr val="00754A"/>
-              </a:buClr>
-              <a:buSzPct val="68000"/>
-              <a:buFont typeface="Arial"/>
-              <a:buChar char="●"/>
-            </a:pPr>
-            <a:r>
-              <a:rPr sz="3200" b="0" spc="-32">
-                <a:solidFill>
-                  <a:srgbClr val="1F1F1F"/>
-                </a:solidFill>
-                <a:latin typeface="Pretendard"/>
-              </a:rPr>
-              <a:t>A larger line when one statement needs weight</a:t>
-            </a:r>
-          </a:p>
-          <a:p>
-            <a:pPr marL="342900" indent="-342900">
-              <a:lnSpc>
-                <a:spcPct val="118000"/>
-              </a:lnSpc>
-              <a:spcBef>
-                <a:spcPts val="1400"/>
-              </a:spcBef>
-              <a:buClr>
-                <a:srgbClr val="00754A"/>
-              </a:buClr>
-              <a:buSzPct val="68000"/>
-              <a:buFont typeface="Arial"/>
-              <a:buChar char="●"/>
-            </a:pPr>
-            <a:r>
-              <a:rPr sz="2400" b="0" spc="-24">
+              <a:rPr sz="1400" b="0" i="0" spc="-14">
                 <a:solidFill>
                   <a:srgbClr val="6B6B6B"/>
                 </a:solidFill>
                 <a:latin typeface="Pretendard"/>
               </a:rPr>
-              <a:t>secondary detail, one step down</a:t>
-            </a:r>
-          </a:p>
-          <a:p>
-            <a:pPr>
-              <a:lnSpc>
-                <a:spcPct val="55000"/>
-              </a:lnSpc>
-              <a:buNone/>
-            </a:pPr>
-            <a:endParaRPr sz="2400" b="0" spc="-24">
-              <a:solidFill>
-                <a:srgbClr val="6B6B6B"/>
-              </a:solidFill>
-              <a:latin typeface="Pretendard"/>
-            </a:endParaRPr>
-          </a:p>
-          <a:p>
-            <a:pPr marL="342900" indent="-342900">
-              <a:lnSpc>
-                <a:spcPct val="118000"/>
-              </a:lnSpc>
-              <a:spcBef>
-                <a:spcPts val="1400"/>
-              </a:spcBef>
-              <a:buClr>
-                <a:srgbClr val="00754A"/>
-              </a:buClr>
-              <a:buSzPct val="68000"/>
-              <a:buFont typeface="Arial"/>
-              <a:buChar char="●"/>
-            </a:pPr>
-            <a:r>
-              <a:rPr sz="2800" b="0" spc="-28">
-                <a:solidFill>
-                  <a:srgbClr val="1F1F1F"/>
-                </a:solidFill>
-                <a:latin typeface="Pretendard"/>
-              </a:rPr>
-              <a:t>Closing point — </a:t>
-            </a:r>
-            <a:r>
-              <a:rPr sz="2800" b="1" spc="-28">
-                <a:solidFill>
-                  <a:srgbClr val="00754A"/>
-                </a:solidFill>
-                <a:latin typeface="Pretendard"/>
-              </a:rPr>
-              <a:t>the conclusion</a:t>
-            </a:r>
-            <a:r>
-              <a:rPr sz="2800" b="0" spc="-28">
-                <a:solidFill>
-                  <a:srgbClr val="1F1F1F"/>
-                </a:solidFill>
-                <a:latin typeface="Pretendard"/>
-              </a:rPr>
-              <a:t> in bold</a:t>
+              <a:t>Conference name   |   YYYY.MM</a:t>
             </a:r>
           </a:p>
         </p:txBody>

--- a/backbone_slides.pptx
+++ b/backbone_slides.pptx
@@ -9161,19 +9161,19 @@
             </a:r>
           </a:p>
           <a:p>
-            <a:pPr marL="342900" indent="-342900">
+            <a:pPr marL="685800" indent="-228600" lvl="1">
               <a:lnSpc>
-                <a:spcPct val="118000"/>
+                <a:spcPct val="112000"/>
               </a:lnSpc>
               <a:spcBef>
-                <a:spcPts val="1400"/>
+                <a:spcPts val="800"/>
               </a:spcBef>
               <a:buClr>
-                <a:srgbClr val="00754A"/>
+                <a:srgbClr val="6B6B6B"/>
               </a:buClr>
-              <a:buSzPct val="68000"/>
+              <a:buSzPct val="78000"/>
               <a:buFont typeface="Arial"/>
-              <a:buChar char="●"/>
+              <a:buChar char="–"/>
             </a:pPr>
             <a:r>
               <a:rPr sz="2400" b="0" spc="-24">

--- a/backbone_slides.pptx
+++ b/backbone_slides.pptx
@@ -16,10 +16,10 @@
     <p:sldId id="264" r:id="rId10"/>
     <p:sldId id="265" r:id="rId11"/>
     <p:sldId id="266" r:id="rId12"/>
-    <p:sldId id="268" r:id="rId14"/>
-    <p:sldId id="269" r:id="rId15"/>
-    <p:sldId id="270" r:id="rId16"/>
-    <p:sldId id="267" r:id="rId13"/>
+    <p:sldId id="268" r:id="rId13"/>
+    <p:sldId id="269" r:id="rId14"/>
+    <p:sldId id="270" r:id="rId15"/>
+    <p:sldId id="267" r:id="rId16"/>
   </p:sldIdLst>
   <p:sldSz cx="12192000" cy="6858000"/>
   <p:notesSz cx="6858000" cy="9144000"/>
@@ -142,7 +142,7 @@
   <pc:docChgLst>
     <pc:chgData name="Sangmin Park" userId="4d1078831f804aa8" providerId="LiveId" clId="{FD74ABD8-2DB4-4925-8651-47553808EDF3}"/>
     <pc:docChg chg="modSld">
-      <pc:chgData name="Sangmin Park" userId="4d1078831f804aa8" providerId="LiveId" clId="{FD74ABD8-2DB4-4925-8651-47553808EDF3}" dt="2026-06-06T15:28:18.166" v="0" actId="14861"/>
+      <pc:chgData name="Sangmin Park" userId="4d1078831f804aa8" providerId="LiveId" clId="{FD74ABD8-2DB4-4925-8651-47553808EDF3}" dt="2026-06-09T15:15:31.833" v="2" actId="6549"/>
       <pc:docMkLst>
         <pc:docMk/>
       </pc:docMkLst>
@@ -158,6 +158,21 @@
             <pc:docMk/>
             <pc:sldMk cId="0" sldId="259"/>
             <ac:spMk id="13" creationId="{00000000-0000-0000-0000-000000000000}"/>
+          </ac:spMkLst>
+        </pc:spChg>
+      </pc:sldChg>
+      <pc:sldChg chg="modSp mod">
+        <pc:chgData name="Sangmin Park" userId="4d1078831f804aa8" providerId="LiveId" clId="{FD74ABD8-2DB4-4925-8651-47553808EDF3}" dt="2026-06-09T15:15:31.833" v="2" actId="6549"/>
+        <pc:sldMkLst>
+          <pc:docMk/>
+          <pc:sldMk cId="0" sldId="270"/>
+        </pc:sldMkLst>
+        <pc:spChg chg="mod">
+          <ac:chgData name="Sangmin Park" userId="4d1078831f804aa8" providerId="LiveId" clId="{FD74ABD8-2DB4-4925-8651-47553808EDF3}" dt="2026-06-09T15:15:31.833" v="2" actId="6549"/>
+          <ac:spMkLst>
+            <pc:docMk/>
+            <pc:sldMk cId="0" sldId="270"/>
+            <ac:spMk id="37" creationId="{00000000-0000-0000-0000-000000000000}"/>
           </ac:spMkLst>
         </pc:spChg>
       </pc:sldChg>
@@ -345,7 +360,7 @@
           <a:p>
             <a:fld id="{5BCAD085-E8A6-8845-BD4E-CB4CCA059FC4}" type="datetimeFigureOut">
               <a:rPr lang="en-US" smtClean="0"/>
-              <a:t>6/9/2026</a:t>
+              <a:t>6/10/2026</a:t>
             </a:fld>
             <a:endParaRPr lang="en-US"/>
           </a:p>
@@ -513,7 +528,7 @@
           <a:p>
             <a:fld id="{5BCAD085-E8A6-8845-BD4E-CB4CCA059FC4}" type="datetimeFigureOut">
               <a:rPr lang="en-US" smtClean="0"/>
-              <a:t>6/9/2026</a:t>
+              <a:t>6/10/2026</a:t>
             </a:fld>
             <a:endParaRPr lang="en-US"/>
           </a:p>
@@ -691,7 +706,7 @@
           <a:p>
             <a:fld id="{5BCAD085-E8A6-8845-BD4E-CB4CCA059FC4}" type="datetimeFigureOut">
               <a:rPr lang="en-US" smtClean="0"/>
-              <a:t>6/9/2026</a:t>
+              <a:t>6/10/2026</a:t>
             </a:fld>
             <a:endParaRPr lang="en-US"/>
           </a:p>
@@ -859,7 +874,7 @@
           <a:p>
             <a:fld id="{5BCAD085-E8A6-8845-BD4E-CB4CCA059FC4}" type="datetimeFigureOut">
               <a:rPr lang="en-US" smtClean="0"/>
-              <a:t>6/9/2026</a:t>
+              <a:t>6/10/2026</a:t>
             </a:fld>
             <a:endParaRPr lang="en-US"/>
           </a:p>
@@ -1104,7 +1119,7 @@
           <a:p>
             <a:fld id="{5BCAD085-E8A6-8845-BD4E-CB4CCA059FC4}" type="datetimeFigureOut">
               <a:rPr lang="en-US" smtClean="0"/>
-              <a:t>6/9/2026</a:t>
+              <a:t>6/10/2026</a:t>
             </a:fld>
             <a:endParaRPr lang="en-US"/>
           </a:p>
@@ -1389,7 +1404,7 @@
           <a:p>
             <a:fld id="{5BCAD085-E8A6-8845-BD4E-CB4CCA059FC4}" type="datetimeFigureOut">
               <a:rPr lang="en-US" smtClean="0"/>
-              <a:t>6/9/2026</a:t>
+              <a:t>6/10/2026</a:t>
             </a:fld>
             <a:endParaRPr lang="en-US"/>
           </a:p>
@@ -1808,7 +1823,7 @@
           <a:p>
             <a:fld id="{5BCAD085-E8A6-8845-BD4E-CB4CCA059FC4}" type="datetimeFigureOut">
               <a:rPr lang="en-US" smtClean="0"/>
-              <a:t>6/9/2026</a:t>
+              <a:t>6/10/2026</a:t>
             </a:fld>
             <a:endParaRPr lang="en-US"/>
           </a:p>
@@ -1925,7 +1940,7 @@
           <a:p>
             <a:fld id="{5BCAD085-E8A6-8845-BD4E-CB4CCA059FC4}" type="datetimeFigureOut">
               <a:rPr lang="en-US" smtClean="0"/>
-              <a:t>6/9/2026</a:t>
+              <a:t>6/10/2026</a:t>
             </a:fld>
             <a:endParaRPr lang="en-US"/>
           </a:p>
@@ -2020,7 +2035,7 @@
           <a:p>
             <a:fld id="{5BCAD085-E8A6-8845-BD4E-CB4CCA059FC4}" type="datetimeFigureOut">
               <a:rPr lang="en-US" smtClean="0"/>
-              <a:t>6/9/2026</a:t>
+              <a:t>6/10/2026</a:t>
             </a:fld>
             <a:endParaRPr lang="en-US"/>
           </a:p>
@@ -2295,7 +2310,7 @@
           <a:p>
             <a:fld id="{5BCAD085-E8A6-8845-BD4E-CB4CCA059FC4}" type="datetimeFigureOut">
               <a:rPr lang="en-US" smtClean="0"/>
-              <a:t>6/9/2026</a:t>
+              <a:t>6/10/2026</a:t>
             </a:fld>
             <a:endParaRPr lang="en-US"/>
           </a:p>
@@ -2547,7 +2562,7 @@
           <a:p>
             <a:fld id="{5BCAD085-E8A6-8845-BD4E-CB4CCA059FC4}" type="datetimeFigureOut">
               <a:rPr lang="en-US" smtClean="0"/>
-              <a:t>6/9/2026</a:t>
+              <a:t>6/10/2026</a:t>
             </a:fld>
             <a:endParaRPr lang="en-US"/>
           </a:p>
@@ -2758,7 +2773,7 @@
           <a:p>
             <a:fld id="{5BCAD085-E8A6-8845-BD4E-CB4CCA059FC4}" type="datetimeFigureOut">
               <a:rPr lang="en-US" smtClean="0"/>
-              <a:t>6/9/2026</a:t>
+              <a:t>6/10/2026</a:t>
             </a:fld>
             <a:endParaRPr lang="en-US"/>
           </a:p>
@@ -9064,12 +9079,12 @@
               <a:buClr>
                 <a:srgbClr val="00754A"/>
               </a:buClr>
-              <a:buSzPct val="68000"/>
+              <a:buSzPts val="2800"/>
               <a:buFont typeface="Arial"/>
               <a:buChar char="●"/>
             </a:pPr>
             <a:r>
-              <a:rPr sz="2800" b="0" spc="-28">
+              <a:rPr sz="2800" b="0" spc="-28" dirty="0">
                 <a:solidFill>
                   <a:srgbClr val="1F1F1F"/>
                 </a:solidFill>
@@ -9089,12 +9104,12 @@
               <a:buClr>
                 <a:srgbClr val="00754A"/>
               </a:buClr>
-              <a:buSzPct val="68000"/>
+              <a:buSzPts val="2800"/>
               <a:buFont typeface="Arial"/>
               <a:buChar char="●"/>
             </a:pPr>
             <a:r>
-              <a:rPr sz="2800" b="0" spc="-28">
+              <a:rPr sz="2800" b="0" spc="-28" dirty="0">
                 <a:solidFill>
                   <a:srgbClr val="1F1F1F"/>
                 </a:solidFill>
@@ -9103,7 +9118,7 @@
               <a:t>Supporting line with a </a:t>
             </a:r>
             <a:r>
-              <a:rPr sz="2800" b="1" spc="-28">
+              <a:rPr sz="2800" b="1" spc="-28" dirty="0">
                 <a:solidFill>
                   <a:srgbClr val="00754A"/>
                 </a:solidFill>
@@ -9112,23 +9127,24 @@
               <a:t>key phrase</a:t>
             </a:r>
             <a:r>
-              <a:rPr sz="2800" b="0" spc="-28">
+              <a:rPr sz="2800" b="0" spc="-28" dirty="0">
                 <a:solidFill>
                   <a:srgbClr val="1F1F1F"/>
                 </a:solidFill>
                 <a:latin typeface="Pretendard"/>
               </a:rPr>
-              <a:t> emphasised</a:t>
-            </a:r>
-          </a:p>
-          <a:p>
-            <a:pPr>
-              <a:lnSpc>
-                <a:spcPct val="55000"/>
-              </a:lnSpc>
-              <a:buNone/>
-            </a:pPr>
-            <a:endParaRPr sz="2800" b="0" spc="-28">
+              <a:t> </a:t>
+            </a:r>
+            <a:r>
+              <a:rPr sz="2800" b="0" spc="-28" dirty="0" err="1">
+                <a:solidFill>
+                  <a:srgbClr val="1F1F1F"/>
+                </a:solidFill>
+                <a:latin typeface="Pretendard"/>
+              </a:rPr>
+              <a:t>emphasised</a:t>
+            </a:r>
+            <a:endParaRPr sz="2800" b="0" spc="-28" dirty="0">
               <a:solidFill>
                 <a:srgbClr val="1F1F1F"/>
               </a:solidFill>
@@ -9146,12 +9162,12 @@
               <a:buClr>
                 <a:srgbClr val="00754A"/>
               </a:buClr>
-              <a:buSzPct val="68000"/>
+              <a:buSzPts val="2800"/>
               <a:buFont typeface="Arial"/>
               <a:buChar char="●"/>
             </a:pPr>
             <a:r>
-              <a:rPr sz="3200" b="0" spc="-32">
+              <a:rPr sz="3200" b="0" spc="-32" dirty="0">
                 <a:solidFill>
                   <a:srgbClr val="1F1F1F"/>
                 </a:solidFill>
@@ -9161,7 +9177,7 @@
             </a:r>
           </a:p>
           <a:p>
-            <a:pPr marL="685800" indent="-228600" lvl="1">
+            <a:pPr marL="685800" lvl="1" indent="-228600">
               <a:lnSpc>
                 <a:spcPct val="112000"/>
               </a:lnSpc>
@@ -9171,12 +9187,12 @@
               <a:buClr>
                 <a:srgbClr val="6B6B6B"/>
               </a:buClr>
-              <a:buSzPct val="78000"/>
+              <a:buSzPts val="2400"/>
               <a:buFont typeface="Arial"/>
               <a:buChar char="–"/>
             </a:pPr>
             <a:r>
-              <a:rPr sz="2400" b="0" spc="-24">
+              <a:rPr sz="2400" b="0" spc="-24" dirty="0">
                 <a:solidFill>
                   <a:srgbClr val="6B6B6B"/>
                 </a:solidFill>
@@ -9184,20 +9200,6 @@
               </a:rPr>
               <a:t>secondary detail, one step down</a:t>
             </a:r>
-          </a:p>
-          <a:p>
-            <a:pPr>
-              <a:lnSpc>
-                <a:spcPct val="55000"/>
-              </a:lnSpc>
-              <a:buNone/>
-            </a:pPr>
-            <a:endParaRPr sz="2400" b="0" spc="-24">
-              <a:solidFill>
-                <a:srgbClr val="6B6B6B"/>
-              </a:solidFill>
-              <a:latin typeface="Pretendard"/>
-            </a:endParaRPr>
           </a:p>
           <a:p>
             <a:pPr marL="342900" indent="-342900">
@@ -9210,12 +9212,12 @@
               <a:buClr>
                 <a:srgbClr val="00754A"/>
               </a:buClr>
-              <a:buSzPct val="68000"/>
+              <a:buSzPts val="2800"/>
               <a:buFont typeface="Arial"/>
               <a:buChar char="●"/>
             </a:pPr>
             <a:r>
-              <a:rPr sz="2800" b="0" spc="-28">
+              <a:rPr sz="2800" b="0" spc="-28" dirty="0">
                 <a:solidFill>
                   <a:srgbClr val="1F1F1F"/>
                 </a:solidFill>
@@ -9224,7 +9226,7 @@
               <a:t>Closing point — </a:t>
             </a:r>
             <a:r>
-              <a:rPr sz="2800" b="1" spc="-28">
+              <a:rPr sz="2800" b="1" spc="-28" dirty="0">
                 <a:solidFill>
                   <a:srgbClr val="00754A"/>
                 </a:solidFill>
@@ -9233,7 +9235,7 @@
               <a:t>the conclusion</a:t>
             </a:r>
             <a:r>
-              <a:rPr sz="2800" b="0" spc="-28">
+              <a:rPr sz="2800" b="0" spc="-28" dirty="0">
                 <a:solidFill>
                   <a:srgbClr val="1F1F1F"/>
                 </a:solidFill>

--- a/backbone_slides.pptx
+++ b/backbone_slides.pptx
@@ -9079,7 +9079,7 @@
               <a:buClr>
                 <a:srgbClr val="00754A"/>
               </a:buClr>
-              <a:buSzPts val="2800"/>
+              <a:buSzPts val="1000"/>
               <a:buFont typeface="Arial"/>
               <a:buChar char="●"/>
             </a:pPr>
@@ -9104,7 +9104,7 @@
               <a:buClr>
                 <a:srgbClr val="00754A"/>
               </a:buClr>
-              <a:buSzPts val="2800"/>
+              <a:buSzPts val="1000"/>
               <a:buFont typeface="Arial"/>
               <a:buChar char="●"/>
             </a:pPr>
@@ -9162,7 +9162,7 @@
               <a:buClr>
                 <a:srgbClr val="00754A"/>
               </a:buClr>
-              <a:buSzPts val="2800"/>
+              <a:buSzPts val="1000"/>
               <a:buFont typeface="Arial"/>
               <a:buChar char="●"/>
             </a:pPr>
@@ -9187,7 +9187,7 @@
               <a:buClr>
                 <a:srgbClr val="6B6B6B"/>
               </a:buClr>
-              <a:buSzPts val="2400"/>
+              <a:buSzPts val="900"/>
               <a:buFont typeface="Arial"/>
               <a:buChar char="–"/>
             </a:pPr>
@@ -9212,7 +9212,7 @@
               <a:buClr>
                 <a:srgbClr val="00754A"/>
               </a:buClr>
-              <a:buSzPts val="2800"/>
+              <a:buSzPts val="1000"/>
               <a:buFont typeface="Arial"/>
               <a:buChar char="●"/>
             </a:pPr>

--- a/backbone_slides.pptx
+++ b/backbone_slides.pptx
@@ -9079,7 +9079,7 @@
               <a:buClr>
                 <a:srgbClr val="00754A"/>
               </a:buClr>
-              <a:buSzPts val="1000"/>
+              <a:buSzPts val="1400"/>
               <a:buFont typeface="Arial"/>
               <a:buChar char="●"/>
             </a:pPr>
@@ -9104,7 +9104,7 @@
               <a:buClr>
                 <a:srgbClr val="00754A"/>
               </a:buClr>
-              <a:buSzPts val="1000"/>
+              <a:buSzPts val="1400"/>
               <a:buFont typeface="Arial"/>
               <a:buChar char="●"/>
             </a:pPr>
@@ -9162,7 +9162,7 @@
               <a:buClr>
                 <a:srgbClr val="00754A"/>
               </a:buClr>
-              <a:buSzPts val="1000"/>
+              <a:buSzPts val="1400"/>
               <a:buFont typeface="Arial"/>
               <a:buChar char="●"/>
             </a:pPr>
@@ -9187,7 +9187,7 @@
               <a:buClr>
                 <a:srgbClr val="6B6B6B"/>
               </a:buClr>
-              <a:buSzPts val="900"/>
+              <a:buSzPts val="1200"/>
               <a:buFont typeface="Arial"/>
               <a:buChar char="–"/>
             </a:pPr>
@@ -9212,7 +9212,7 @@
               <a:buClr>
                 <a:srgbClr val="00754A"/>
               </a:buClr>
-              <a:buSzPts val="1000"/>
+              <a:buSzPts val="1400"/>
               <a:buFont typeface="Arial"/>
               <a:buChar char="●"/>
             </a:pPr>
